--- a/docs/submission-preselection/deck/anker-SenseLoop-答辩材料.pptx
+++ b/docs/submission-preselection/deck/anker-SenseLoop-答辩材料.pptx
@@ -2,22 +2,23 @@
 <file path=ppt/presentation.xml><?xml version="1.0" encoding="utf-8"?>
 <p:presentation xmlns:p="http://schemas.openxmlformats.org/presentationml/2006/main">
   <p:sldMasterIdLst>
-    <p:sldMasterId xmlns:r="http://schemas.openxmlformats.org/officeDocument/2006/relationships" id="2147483648" r:id="R54b667c27a0c4e11"/>
+    <p:sldMasterId xmlns:r="http://schemas.openxmlformats.org/officeDocument/2006/relationships" id="2147483648" r:id="Rb02c8cf5a020433f"/>
   </p:sldMasterIdLst>
   <p:notesMasterIdLst>
-    <p:notesMasterId xmlns:r="http://schemas.openxmlformats.org/officeDocument/2006/relationships" r:id="R82be7d259ac04a50"/>
+    <p:notesMasterId xmlns:r="http://schemas.openxmlformats.org/officeDocument/2006/relationships" r:id="Rda829d647a4a4446"/>
   </p:notesMasterIdLst>
   <p:sldIdLst>
-    <p:sldId xmlns:r="http://schemas.openxmlformats.org/officeDocument/2006/relationships" id="256" r:id="R09c917c726e14004"/>
-    <p:sldId xmlns:r="http://schemas.openxmlformats.org/officeDocument/2006/relationships" id="257" r:id="Rd769405a8594469a"/>
-    <p:sldId xmlns:r="http://schemas.openxmlformats.org/officeDocument/2006/relationships" id="258" r:id="R6e32deca6c9e4127"/>
-    <p:sldId xmlns:r="http://schemas.openxmlformats.org/officeDocument/2006/relationships" id="259" r:id="R8572acec2dcc4060"/>
-    <p:sldId xmlns:r="http://schemas.openxmlformats.org/officeDocument/2006/relationships" id="260" r:id="R6cdaa888bdee4a27"/>
-    <p:sldId xmlns:r="http://schemas.openxmlformats.org/officeDocument/2006/relationships" id="261" r:id="R2f6585e5342c4727"/>
-    <p:sldId xmlns:r="http://schemas.openxmlformats.org/officeDocument/2006/relationships" id="262" r:id="R02821d615baf4d78"/>
-    <p:sldId xmlns:r="http://schemas.openxmlformats.org/officeDocument/2006/relationships" id="263" r:id="R22e8c5381f214ab8"/>
-    <p:sldId xmlns:r="http://schemas.openxmlformats.org/officeDocument/2006/relationships" id="264" r:id="Rddb208a2fbb64f70"/>
-    <p:sldId xmlns:r="http://schemas.openxmlformats.org/officeDocument/2006/relationships" id="265" r:id="R75d5526b74214ba9"/>
+    <p:sldId xmlns:r="http://schemas.openxmlformats.org/officeDocument/2006/relationships" id="256" r:id="R9d45c6c9b89647d0"/>
+    <p:sldId xmlns:r="http://schemas.openxmlformats.org/officeDocument/2006/relationships" id="257" r:id="R3c5e23acc2264d4a"/>
+    <p:sldId xmlns:r="http://schemas.openxmlformats.org/officeDocument/2006/relationships" id="258" r:id="R623c78e1b1ea4f3d"/>
+    <p:sldId xmlns:r="http://schemas.openxmlformats.org/officeDocument/2006/relationships" id="259" r:id="Rb698886224a24735"/>
+    <p:sldId xmlns:r="http://schemas.openxmlformats.org/officeDocument/2006/relationships" id="260" r:id="R00d49fa5667849cb"/>
+    <p:sldId xmlns:r="http://schemas.openxmlformats.org/officeDocument/2006/relationships" id="261" r:id="R0647c08a0dd7444c"/>
+    <p:sldId xmlns:r="http://schemas.openxmlformats.org/officeDocument/2006/relationships" id="262" r:id="R72a06317dd68454e"/>
+    <p:sldId xmlns:r="http://schemas.openxmlformats.org/officeDocument/2006/relationships" id="263" r:id="Rb9c9971b019b4869"/>
+    <p:sldId xmlns:r="http://schemas.openxmlformats.org/officeDocument/2006/relationships" id="264" r:id="Ra8c217be0c39456e"/>
+    <p:sldId xmlns:r="http://schemas.openxmlformats.org/officeDocument/2006/relationships" id="265" r:id="R81e7cc299dd64043"/>
+    <p:sldId xmlns:r="http://schemas.openxmlformats.org/officeDocument/2006/relationships" id="266" r:id="R0413fd1ebb0c4736"/>
   </p:sldIdLst>
   <p:sldSz cx="12192000" cy="6858000"/>
   <p:notesSz cx="6858000" cy="9144000"/>
@@ -638,6 +639,72 @@
 </p:notes>
 </file>
 
+<file path=ppt/notesSlides/notesSlide11.xml><?xml version="1.0" encoding="utf-8"?>
+<p:notes xmlns:p="http://schemas.openxmlformats.org/presentationml/2006/main">
+  <p:cSld>
+    <p:spTree>
+      <p:nvGrpSpPr>
+        <p:cNvPr id="1" name=""/>
+        <p:cNvGrpSpPr/>
+        <p:nvPr/>
+      </p:nvGrpSpPr>
+      <p:grpSpPr>
+        <a:xfrm xmlns:a="http://schemas.openxmlformats.org/drawingml/2006/main"/>
+      </p:grpSpPr>
+      <p:sp>
+        <p:nvSpPr>
+          <p:cNvPr id="2" name="Slide Image Placeholder 1"/>
+          <p:cNvSpPr>
+            <a:spLocks xmlns:a="http://schemas.openxmlformats.org/drawingml/2006/main" noGrp="1"/>
+          </p:cNvSpPr>
+          <p:nvPr>
+            <p:ph type="sldImg" idx="0"/>
+          </p:nvPr>
+        </p:nvSpPr>
+        <p:spPr/>
+      </p:sp>
+      <p:sp>
+        <p:nvSpPr>
+          <p:cNvPr id="3" name="Notes Placeholder 2"/>
+          <p:cNvSpPr>
+            <a:spLocks xmlns:a="http://schemas.openxmlformats.org/drawingml/2006/main" noGrp="1"/>
+          </p:cNvSpPr>
+          <p:nvPr>
+            <p:ph type="body" idx="1"/>
+          </p:nvPr>
+        </p:nvSpPr>
+        <p:spPr/>
+        <p:txBody>
+          <a:bodyPr xmlns:a="http://schemas.openxmlformats.org/drawingml/2006/main"/>
+          <a:lstStyle xmlns:a="http://schemas.openxmlformats.org/drawingml/2006/main"/>
+          <a:p xmlns:a="http://schemas.openxmlformats.org/drawingml/2006/main"/>
+        </p:txBody>
+      </p:sp>
+      <p:sp>
+        <p:nvSpPr>
+          <p:cNvPr id="4" name="Slide Number Placeholder 3"/>
+          <p:cNvSpPr>
+            <a:spLocks xmlns:a="http://schemas.openxmlformats.org/drawingml/2006/main" noGrp="1"/>
+          </p:cNvSpPr>
+          <p:nvPr>
+            <p:ph type="sldNum" idx="5"/>
+          </p:nvPr>
+        </p:nvSpPr>
+        <p:spPr/>
+        <p:txBody>
+          <a:bodyPr xmlns:a="http://schemas.openxmlformats.org/drawingml/2006/main"/>
+          <a:lstStyle xmlns:a="http://schemas.openxmlformats.org/drawingml/2006/main"/>
+          <a:p xmlns:a="http://schemas.openxmlformats.org/drawingml/2006/main"/>
+        </p:txBody>
+      </p:sp>
+    </p:spTree>
+  </p:cSld>
+  <p:clrMapOvr>
+    <a:masterClrMapping xmlns:a="http://schemas.openxmlformats.org/drawingml/2006/main"/>
+  </p:clrMapOvr>
+</p:notes>
+</file>
+
 <file path=ppt/notesSlides/notesSlide2.xml><?xml version="1.0" encoding="utf-8"?>
 <p:notes xmlns:p="http://schemas.openxmlformats.org/presentationml/2006/main">
   <p:cSld>
@@ -1204,7 +1271,7 @@
   </p:cSld>
   <p:clrMap bg1="lt1" tx1="dk1" bg2="lt2" tx2="dk2" accent1="accent1" accent2="accent2" accent3="accent3" accent4="accent4" accent5="accent5" accent6="accent6" hlink="hlink" folHlink="folHlink"/>
   <p:sldLayoutIdLst>
-    <p:sldLayoutId xmlns:r="http://schemas.openxmlformats.org/officeDocument/2006/relationships" id="2147483649" r:id="Ra6d2eadaaaa444e4"/>
+    <p:sldLayoutId xmlns:r="http://schemas.openxmlformats.org/officeDocument/2006/relationships" id="2147483649" r:id="R384fe94b3e0d4778"/>
   </p:sldLayoutIdLst>
   <p:txStyles>
     <p:titleStyle>
@@ -1759,7 +1826,7 @@
           <p:nvPr/>
         </p:nvPicPr>
         <p:blipFill>
-          <a:blip xmlns:r="http://schemas.openxmlformats.org/officeDocument/2006/relationships" xmlns:a="http://schemas.openxmlformats.org/drawingml/2006/main" r:embed="Rda4c71a8f00e49a2"/>
+          <a:blip xmlns:r="http://schemas.openxmlformats.org/officeDocument/2006/relationships" xmlns:a="http://schemas.openxmlformats.org/drawingml/2006/main" r:embed="R831d9d5a225a4a3d"/>
           <a:stretch xmlns:a="http://schemas.openxmlformats.org/drawingml/2006/main"/>
         </p:blipFill>
         <p:spPr>
@@ -1777,7 +1844,7 @@
           <p:cNvPr id="2" name="">
             <a:extLst xmlns:a="http://schemas.openxmlformats.org/drawingml/2006/main">
               <a:ext uri="{FF2B5EF4-FFF2-40B4-BE49-F238E27FC236}">
-                <a16:creationId xmlns:a16="http://schemas.microsoft.com/office/drawing/2014/main" id="{D4A21CF5-A4B8-4713-8E03-B4AE709DEF89}"/>
+                <a16:creationId xmlns:a16="http://schemas.microsoft.com/office/drawing/2014/main" id="{11F0C837-2642-4B75-8379-D2C2BDA98F9C}"/>
               </a:ext>
             </a:extLst>
           </p:cNvPr>
@@ -1827,7 +1894,7 @@
           <p:cNvPr id="3" name="">
             <a:extLst xmlns:a="http://schemas.openxmlformats.org/drawingml/2006/main">
               <a:ext uri="{FF2B5EF4-FFF2-40B4-BE49-F238E27FC236}">
-                <a16:creationId xmlns:a16="http://schemas.microsoft.com/office/drawing/2014/main" id="{D9A5B0C1-52C7-4847-9723-F98F1A777DF0}"/>
+                <a16:creationId xmlns:a16="http://schemas.microsoft.com/office/drawing/2014/main" id="{BF266D7C-CC4B-4B03-B7EC-A596DF3866C9}"/>
               </a:ext>
             </a:extLst>
           </p:cNvPr>
@@ -1877,7 +1944,7 @@
           <p:cNvPr id="4" name="">
             <a:extLst xmlns:a="http://schemas.openxmlformats.org/drawingml/2006/main">
               <a:ext uri="{FF2B5EF4-FFF2-40B4-BE49-F238E27FC236}">
-                <a16:creationId xmlns:a16="http://schemas.microsoft.com/office/drawing/2014/main" id="{8AAC58EF-81E7-4190-B923-FD82815BC1E5}"/>
+                <a16:creationId xmlns:a16="http://schemas.microsoft.com/office/drawing/2014/main" id="{8DD91E55-D13C-4077-9539-50C9A1A04A1F}"/>
               </a:ext>
             </a:extLst>
           </p:cNvPr>
@@ -1912,7 +1979,7 @@
           <p:cNvPr id="5" name="">
             <a:extLst xmlns:a="http://schemas.openxmlformats.org/drawingml/2006/main">
               <a:ext uri="{FF2B5EF4-FFF2-40B4-BE49-F238E27FC236}">
-                <a16:creationId xmlns:a16="http://schemas.microsoft.com/office/drawing/2014/main" id="{FBFFFA34-F954-41CE-BE13-DE02D7B72473}"/>
+                <a16:creationId xmlns:a16="http://schemas.microsoft.com/office/drawing/2014/main" id="{3C4D72C0-62E2-4BAD-88BF-97AF095AB188}"/>
               </a:ext>
             </a:extLst>
           </p:cNvPr>
@@ -1962,7 +2029,7 @@
           <p:cNvPr id="6" name="">
             <a:extLst xmlns:a="http://schemas.openxmlformats.org/drawingml/2006/main">
               <a:ext uri="{FF2B5EF4-FFF2-40B4-BE49-F238E27FC236}">
-                <a16:creationId xmlns:a16="http://schemas.microsoft.com/office/drawing/2014/main" id="{05EC0641-3260-493D-8272-300645258CF9}"/>
+                <a16:creationId xmlns:a16="http://schemas.microsoft.com/office/drawing/2014/main" id="{1F4F3853-6168-4C0C-AC18-881A322A0BD6}"/>
               </a:ext>
             </a:extLst>
           </p:cNvPr>
@@ -1997,7 +2064,7 @@
           <p:cNvPr id="7" name="">
             <a:extLst xmlns:a="http://schemas.openxmlformats.org/drawingml/2006/main">
               <a:ext uri="{FF2B5EF4-FFF2-40B4-BE49-F238E27FC236}">
-                <a16:creationId xmlns:a16="http://schemas.microsoft.com/office/drawing/2014/main" id="{ADB6B5BB-5B27-4EC6-9741-66561B036BFB}"/>
+                <a16:creationId xmlns:a16="http://schemas.microsoft.com/office/drawing/2014/main" id="{7A852982-D2A1-4F88-BFDE-5566DEC35B80}"/>
               </a:ext>
             </a:extLst>
           </p:cNvPr>
@@ -2047,7 +2114,7 @@
           <p:cNvPr id="8" name="">
             <a:extLst xmlns:a="http://schemas.openxmlformats.org/drawingml/2006/main">
               <a:ext uri="{FF2B5EF4-FFF2-40B4-BE49-F238E27FC236}">
-                <a16:creationId xmlns:a16="http://schemas.microsoft.com/office/drawing/2014/main" id="{5CA9A379-6243-4E59-A79A-E10F4151BF16}"/>
+                <a16:creationId xmlns:a16="http://schemas.microsoft.com/office/drawing/2014/main" id="{1D20CD67-6714-4CFD-9B14-4815B6179F78}"/>
               </a:ext>
             </a:extLst>
           </p:cNvPr>
@@ -2082,7 +2149,7 @@
           <p:cNvPr id="9" name="">
             <a:extLst xmlns:a="http://schemas.openxmlformats.org/drawingml/2006/main">
               <a:ext uri="{FF2B5EF4-FFF2-40B4-BE49-F238E27FC236}">
-                <a16:creationId xmlns:a16="http://schemas.microsoft.com/office/drawing/2014/main" id="{A9955265-91AC-4BAE-9A1D-760634CAD406}"/>
+                <a16:creationId xmlns:a16="http://schemas.microsoft.com/office/drawing/2014/main" id="{F7483803-0B13-4691-AC2B-21F931288D0A}"/>
               </a:ext>
             </a:extLst>
           </p:cNvPr>
@@ -2117,7 +2184,7 @@
           <p:cNvPr id="10" name="">
             <a:extLst xmlns:a="http://schemas.openxmlformats.org/drawingml/2006/main">
               <a:ext uri="{FF2B5EF4-FFF2-40B4-BE49-F238E27FC236}">
-                <a16:creationId xmlns:a16="http://schemas.microsoft.com/office/drawing/2014/main" id="{8C30B777-4DD3-4BD0-BACE-4C18F6040CBE}"/>
+                <a16:creationId xmlns:a16="http://schemas.microsoft.com/office/drawing/2014/main" id="{1F23A935-7911-4053-9B21-FFB1F5227A8C}"/>
               </a:ext>
             </a:extLst>
           </p:cNvPr>
@@ -2152,7 +2219,7 @@
           <p:cNvPr id="11" name="">
             <a:extLst xmlns:a="http://schemas.openxmlformats.org/drawingml/2006/main">
               <a:ext uri="{FF2B5EF4-FFF2-40B4-BE49-F238E27FC236}">
-                <a16:creationId xmlns:a16="http://schemas.microsoft.com/office/drawing/2014/main" id="{7C7B1020-A2A4-42D7-BCDC-452E5D612BDB}"/>
+                <a16:creationId xmlns:a16="http://schemas.microsoft.com/office/drawing/2014/main" id="{3E32055D-9A49-4ABF-B799-BFF871B94CAC}"/>
               </a:ext>
             </a:extLst>
           </p:cNvPr>
@@ -2202,7 +2269,7 @@
           <p:cNvPr id="12" name="">
             <a:extLst xmlns:a="http://schemas.openxmlformats.org/drawingml/2006/main">
               <a:ext uri="{FF2B5EF4-FFF2-40B4-BE49-F238E27FC236}">
-                <a16:creationId xmlns:a16="http://schemas.microsoft.com/office/drawing/2014/main" id="{349EEDF2-4AF5-4D09-859A-65D1494037DC}"/>
+                <a16:creationId xmlns:a16="http://schemas.microsoft.com/office/drawing/2014/main" id="{FEB36A9B-052F-4668-93DE-ACA840D558F0}"/>
               </a:ext>
             </a:extLst>
           </p:cNvPr>
@@ -2252,7 +2319,7 @@
           <p:cNvPr id="13" name="">
             <a:extLst xmlns:a="http://schemas.openxmlformats.org/drawingml/2006/main">
               <a:ext uri="{FF2B5EF4-FFF2-40B4-BE49-F238E27FC236}">
-                <a16:creationId xmlns:a16="http://schemas.microsoft.com/office/drawing/2014/main" id="{37A65ED8-BB85-4AF7-9CF4-99EAEDAFC00B}"/>
+                <a16:creationId xmlns:a16="http://schemas.microsoft.com/office/drawing/2014/main" id="{189E2F64-092D-485B-A7F3-84020C0E1C6A}"/>
               </a:ext>
             </a:extLst>
           </p:cNvPr>
@@ -2302,7 +2369,7 @@
           <p:cNvPr id="14" name="">
             <a:extLst xmlns:a="http://schemas.openxmlformats.org/drawingml/2006/main">
               <a:ext uri="{FF2B5EF4-FFF2-40B4-BE49-F238E27FC236}">
-                <a16:creationId xmlns:a16="http://schemas.microsoft.com/office/drawing/2014/main" id="{1ABD3D2F-4A9D-4485-A274-A498493E78B3}"/>
+                <a16:creationId xmlns:a16="http://schemas.microsoft.com/office/drawing/2014/main" id="{2D441094-F5B8-442C-BB26-EDCE8BC33FE5}"/>
               </a:ext>
             </a:extLst>
           </p:cNvPr>
@@ -2352,7 +2419,7 @@
           <p:cNvPr id="15" name="">
             <a:extLst xmlns:a="http://schemas.openxmlformats.org/drawingml/2006/main">
               <a:ext uri="{FF2B5EF4-FFF2-40B4-BE49-F238E27FC236}">
-                <a16:creationId xmlns:a16="http://schemas.microsoft.com/office/drawing/2014/main" id="{5D6D0E84-56F9-4210-95B9-A9C711A45F6D}"/>
+                <a16:creationId xmlns:a16="http://schemas.microsoft.com/office/drawing/2014/main" id="{B42A873C-B054-4B83-8B12-B1188CB9DAF2}"/>
               </a:ext>
             </a:extLst>
           </p:cNvPr>
@@ -2402,7 +2469,7 @@
           <p:cNvPr id="16" name="">
             <a:extLst xmlns:a="http://schemas.openxmlformats.org/drawingml/2006/main">
               <a:ext uri="{FF2B5EF4-FFF2-40B4-BE49-F238E27FC236}">
-                <a16:creationId xmlns:a16="http://schemas.microsoft.com/office/drawing/2014/main" id="{A013939B-2FA2-4749-862D-0B1AFE861958}"/>
+                <a16:creationId xmlns:a16="http://schemas.microsoft.com/office/drawing/2014/main" id="{3972AC37-6BEF-40A1-A4E9-916378C7C12D}"/>
               </a:ext>
             </a:extLst>
           </p:cNvPr>
@@ -2452,7 +2519,7 @@
           <p:cNvPr id="17" name="">
             <a:extLst xmlns:a="http://schemas.openxmlformats.org/drawingml/2006/main">
               <a:ext uri="{FF2B5EF4-FFF2-40B4-BE49-F238E27FC236}">
-                <a16:creationId xmlns:a16="http://schemas.microsoft.com/office/drawing/2014/main" id="{F29BB1D9-4B65-40EB-B476-9A5F5FF14367}"/>
+                <a16:creationId xmlns:a16="http://schemas.microsoft.com/office/drawing/2014/main" id="{FB16F79A-9F6A-4682-8040-BC277FF0B437}"/>
               </a:ext>
             </a:extLst>
           </p:cNvPr>
@@ -2485,7 +2552,7 @@
           <p:cNvPr id="18" name="">
             <a:extLst xmlns:a="http://schemas.openxmlformats.org/drawingml/2006/main">
               <a:ext uri="{FF2B5EF4-FFF2-40B4-BE49-F238E27FC236}">
-                <a16:creationId xmlns:a16="http://schemas.microsoft.com/office/drawing/2014/main" id="{E4E15D99-CFE5-46A7-BEF7-C28CF61680F0}"/>
+                <a16:creationId xmlns:a16="http://schemas.microsoft.com/office/drawing/2014/main" id="{1E377A8F-4C1C-4D76-8AEF-680B92A03318}"/>
               </a:ext>
             </a:extLst>
           </p:cNvPr>
@@ -2518,7 +2585,7 @@
           <p:cNvPr id="19" name="">
             <a:extLst xmlns:a="http://schemas.openxmlformats.org/drawingml/2006/main">
               <a:ext uri="{FF2B5EF4-FFF2-40B4-BE49-F238E27FC236}">
-                <a16:creationId xmlns:a16="http://schemas.microsoft.com/office/drawing/2014/main" id="{5587BE86-4E3D-43D3-98CD-6D9AC7CF597A}"/>
+                <a16:creationId xmlns:a16="http://schemas.microsoft.com/office/drawing/2014/main" id="{7290BF04-314A-4237-9DDE-4979AB6641C2}"/>
               </a:ext>
             </a:extLst>
           </p:cNvPr>
@@ -2566,7 +2633,7 @@
     </p:spTree>
     <p:extLst>
       <p:ext uri="{BB962C8B-B14F-4D97-AF65-F5344CB8AC3E}">
-        <p14:creationId xmlns:p14="http://schemas.microsoft.com/office/powerpoint/2010/main" val="290376134"/>
+        <p14:creationId xmlns:p14="http://schemas.microsoft.com/office/powerpoint/2010/main" val="1528240972"/>
       </p:ext>
     </p:extLst>
   </p:cSld>
@@ -2574,6 +2641,1357 @@
 </file>
 
 <file path=ppt/slides/slide10.xml><?xml version="1.0" encoding="utf-8"?>
+<p:sld xmlns:p="http://schemas.openxmlformats.org/presentationml/2006/main">
+  <p:cSld>
+    <p:bg>
+      <p:bgPr>
+        <a:solidFill xmlns:a="http://schemas.openxmlformats.org/drawingml/2006/main">
+          <a:srgbClr val="FFFFFF"/>
+        </a:solidFill>
+      </p:bgPr>
+    </p:bg>
+    <p:spTree>
+      <p:nvGrpSpPr>
+        <p:cNvPr id="1" name=""/>
+        <p:cNvGrpSpPr/>
+        <p:nvPr/>
+      </p:nvGrpSpPr>
+      <p:grpSpPr>
+        <a:xfrm xmlns:a="http://schemas.openxmlformats.org/drawingml/2006/main"/>
+      </p:grpSpPr>
+      <p:sp>
+        <p:nvSpPr>
+          <p:cNvPr id="1" name="">
+            <a:extLst xmlns:a="http://schemas.openxmlformats.org/drawingml/2006/main">
+              <a:ext uri="{FF2B5EF4-FFF2-40B4-BE49-F238E27FC236}">
+                <a16:creationId xmlns:a16="http://schemas.microsoft.com/office/drawing/2014/main" id="{B3D24D8D-A948-4244-9C45-1C7C8E7CB81E}"/>
+              </a:ext>
+            </a:extLst>
+          </p:cNvPr>
+          <p:cNvSpPr>
+            <a:spLocks xmlns:a="http://schemas.openxmlformats.org/drawingml/2006/main" noGrp="1"/>
+          </p:cNvSpPr>
+          <p:nvPr/>
+        </p:nvSpPr>
+        <p:spPr>
+          <a:xfrm xmlns:a="http://schemas.openxmlformats.org/drawingml/2006/main">
+            <a:off x="666750" y="419100"/>
+            <a:ext cx="7810500" cy="552450"/>
+          </a:xfrm>
+          <a:prstGeom xmlns:a="http://schemas.openxmlformats.org/drawingml/2006/main" prst="rect">
+            <a:avLst/>
+          </a:prstGeom>
+          <a:noFill xmlns:a="http://schemas.openxmlformats.org/drawingml/2006/main"/>
+          <a:ln xmlns:a="http://schemas.openxmlformats.org/drawingml/2006/main" w="0">
+            <a:noFill/>
+            <a:prstDash val="solid"/>
+          </a:ln>
+        </p:spPr>
+        <p:txBody>
+          <a:bodyPr xmlns:a="http://schemas.openxmlformats.org/drawingml/2006/main" anchor="t"/>
+          <a:lstStyle xmlns:a="http://schemas.openxmlformats.org/drawingml/2006/main"/>
+          <a:p xmlns:a="http://schemas.openxmlformats.org/drawingml/2006/main">
+            <a:pPr algn="l">
+              <a:defRPr sz="2850" b="1">
+                <a:solidFill>
+                  <a:srgbClr val="10201A"/>
+                </a:solidFill>
+              </a:defRPr>
+            </a:pPr>
+            <a:r>
+              <a:rPr sz="2850" b="1">
+                <a:solidFill>
+                  <a:srgbClr val="10201A"/>
+                </a:solidFill>
+              </a:rPr>
+              <a:t>这不是一次性 Demo，而是一条产品化路线</a:t>
+            </a:r>
+          </a:p>
+        </p:txBody>
+      </p:sp>
+      <p:sp>
+        <p:nvSpPr>
+          <p:cNvPr id="2" name="">
+            <a:extLst xmlns:a="http://schemas.openxmlformats.org/drawingml/2006/main">
+              <a:ext uri="{FF2B5EF4-FFF2-40B4-BE49-F238E27FC236}">
+                <a16:creationId xmlns:a16="http://schemas.microsoft.com/office/drawing/2014/main" id="{C70F4FD5-648B-4C61-8ECD-CB0C8850D162}"/>
+              </a:ext>
+            </a:extLst>
+          </p:cNvPr>
+          <p:cNvSpPr>
+            <a:spLocks xmlns:a="http://schemas.openxmlformats.org/drawingml/2006/main" noGrp="1"/>
+          </p:cNvSpPr>
+          <p:nvPr/>
+        </p:nvSpPr>
+        <p:spPr>
+          <a:xfrm xmlns:a="http://schemas.openxmlformats.org/drawingml/2006/main">
+            <a:off x="666750" y="971550"/>
+            <a:ext cx="8191500" cy="323850"/>
+          </a:xfrm>
+          <a:prstGeom xmlns:a="http://schemas.openxmlformats.org/drawingml/2006/main" prst="rect">
+            <a:avLst/>
+          </a:prstGeom>
+          <a:noFill xmlns:a="http://schemas.openxmlformats.org/drawingml/2006/main"/>
+          <a:ln xmlns:a="http://schemas.openxmlformats.org/drawingml/2006/main" w="0">
+            <a:noFill/>
+            <a:prstDash val="solid"/>
+          </a:ln>
+        </p:spPr>
+        <p:txBody>
+          <a:bodyPr xmlns:a="http://schemas.openxmlformats.org/drawingml/2006/main" anchor="t"/>
+          <a:lstStyle xmlns:a="http://schemas.openxmlformats.org/drawingml/2006/main"/>
+          <a:p xmlns:a="http://schemas.openxmlformats.org/drawingml/2006/main">
+            <a:pPr algn="l">
+              <a:defRPr sz="1350" b="0">
+                <a:solidFill>
+                  <a:srgbClr val="587068"/>
+                </a:solidFill>
+              </a:defRPr>
+            </a:pPr>
+            <a:r>
+              <a:rPr sz="1350" b="0">
+                <a:solidFill>
+                  <a:srgbClr val="587068"/>
+                </a:solidFill>
+              </a:rPr>
+              <a:t>Roadmap 回答的是：现在能演示什么，现场增强什么，比赛后怎样继续落地。</a:t>
+            </a:r>
+          </a:p>
+        </p:txBody>
+      </p:sp>
+      <p:sp>
+        <p:nvSpPr>
+          <p:cNvPr id="3" name="">
+            <a:extLst xmlns:a="http://schemas.openxmlformats.org/drawingml/2006/main">
+              <a:ext uri="{FF2B5EF4-FFF2-40B4-BE49-F238E27FC236}">
+                <a16:creationId xmlns:a16="http://schemas.microsoft.com/office/drawing/2014/main" id="{6DE9D275-7E63-4C8E-8EC4-4A483B254D3C}"/>
+              </a:ext>
+            </a:extLst>
+          </p:cNvPr>
+          <p:cNvSpPr>
+            <a:spLocks xmlns:a="http://schemas.openxmlformats.org/drawingml/2006/main" noGrp="1"/>
+          </p:cNvSpPr>
+          <p:nvPr/>
+        </p:nvSpPr>
+        <p:spPr>
+          <a:xfrm xmlns:a="http://schemas.openxmlformats.org/drawingml/2006/main">
+            <a:off x="666750" y="1352550"/>
+            <a:ext cx="10858500" cy="9525"/>
+          </a:xfrm>
+          <a:prstGeom xmlns:a="http://schemas.openxmlformats.org/drawingml/2006/main" prst="rect">
+            <a:avLst/>
+          </a:prstGeom>
+          <a:solidFill xmlns:a="http://schemas.openxmlformats.org/drawingml/2006/main">
+            <a:srgbClr val="C9DED4"/>
+          </a:solidFill>
+          <a:ln xmlns:a="http://schemas.openxmlformats.org/drawingml/2006/main" w="0">
+            <a:solidFill>
+              <a:srgbClr val="C9DED4"/>
+            </a:solidFill>
+            <a:prstDash val="solid"/>
+          </a:ln>
+        </p:spPr>
+      </p:sp>
+      <p:sp>
+        <p:nvSpPr>
+          <p:cNvPr id="4" name="">
+            <a:extLst xmlns:a="http://schemas.openxmlformats.org/drawingml/2006/main">
+              <a:ext uri="{FF2B5EF4-FFF2-40B4-BE49-F238E27FC236}">
+                <a16:creationId xmlns:a16="http://schemas.microsoft.com/office/drawing/2014/main" id="{05CAB049-16E1-47EC-BDC9-EE7B64BD99B4}"/>
+              </a:ext>
+            </a:extLst>
+          </p:cNvPr>
+          <p:cNvSpPr>
+            <a:spLocks xmlns:a="http://schemas.openxmlformats.org/drawingml/2006/main" noGrp="1"/>
+          </p:cNvSpPr>
+          <p:nvPr/>
+        </p:nvSpPr>
+        <p:spPr>
+          <a:xfrm xmlns:a="http://schemas.openxmlformats.org/drawingml/2006/main">
+            <a:off x="723900" y="1828800"/>
+            <a:ext cx="2286000" cy="2286000"/>
+          </a:xfrm>
+          <a:prstGeom xmlns:a="http://schemas.openxmlformats.org/drawingml/2006/main" prst="roundRect">
+            <a:avLst>
+              <a:gd name="adj" fmla="val 4167"/>
+            </a:avLst>
+          </a:prstGeom>
+          <a:solidFill xmlns:a="http://schemas.openxmlformats.org/drawingml/2006/main">
+            <a:srgbClr val="DFF6EA"/>
+          </a:solidFill>
+          <a:ln xmlns:a="http://schemas.openxmlformats.org/drawingml/2006/main" w="9525">
+            <a:solidFill>
+              <a:srgbClr val="C9DED4"/>
+            </a:solidFill>
+            <a:prstDash val="solid"/>
+          </a:ln>
+        </p:spPr>
+      </p:sp>
+      <p:sp>
+        <p:nvSpPr>
+          <p:cNvPr id="5" name="">
+            <a:extLst xmlns:a="http://schemas.openxmlformats.org/drawingml/2006/main">
+              <a:ext uri="{FF2B5EF4-FFF2-40B4-BE49-F238E27FC236}">
+                <a16:creationId xmlns:a16="http://schemas.microsoft.com/office/drawing/2014/main" id="{728CA109-A761-4086-AB01-99C44DED2DB4}"/>
+              </a:ext>
+            </a:extLst>
+          </p:cNvPr>
+          <p:cNvSpPr>
+            <a:spLocks xmlns:a="http://schemas.openxmlformats.org/drawingml/2006/main" noGrp="1"/>
+          </p:cNvSpPr>
+          <p:nvPr/>
+        </p:nvSpPr>
+        <p:spPr>
+          <a:xfrm xmlns:a="http://schemas.openxmlformats.org/drawingml/2006/main">
+            <a:off x="952500" y="2057400"/>
+            <a:ext cx="514350" cy="323850"/>
+          </a:xfrm>
+          <a:prstGeom xmlns:a="http://schemas.openxmlformats.org/drawingml/2006/main" prst="rect">
+            <a:avLst/>
+          </a:prstGeom>
+          <a:noFill xmlns:a="http://schemas.openxmlformats.org/drawingml/2006/main"/>
+          <a:ln xmlns:a="http://schemas.openxmlformats.org/drawingml/2006/main" w="0">
+            <a:noFill/>
+            <a:prstDash val="solid"/>
+          </a:ln>
+        </p:spPr>
+        <p:txBody>
+          <a:bodyPr xmlns:a="http://schemas.openxmlformats.org/drawingml/2006/main" anchor="t"/>
+          <a:lstStyle xmlns:a="http://schemas.openxmlformats.org/drawingml/2006/main"/>
+          <a:p xmlns:a="http://schemas.openxmlformats.org/drawingml/2006/main">
+            <a:pPr algn="l">
+              <a:defRPr sz="1875" b="1">
+                <a:solidFill>
+                  <a:srgbClr val="38A169"/>
+                </a:solidFill>
+              </a:defRPr>
+            </a:pPr>
+            <a:r>
+              <a:rPr sz="1875" b="1">
+                <a:solidFill>
+                  <a:srgbClr val="38A169"/>
+                </a:solidFill>
+              </a:rPr>
+              <a:t>01</a:t>
+            </a:r>
+          </a:p>
+        </p:txBody>
+      </p:sp>
+      <p:sp>
+        <p:nvSpPr>
+          <p:cNvPr id="6" name="">
+            <a:extLst xmlns:a="http://schemas.openxmlformats.org/drawingml/2006/main">
+              <a:ext uri="{FF2B5EF4-FFF2-40B4-BE49-F238E27FC236}">
+                <a16:creationId xmlns:a16="http://schemas.microsoft.com/office/drawing/2014/main" id="{52F28B39-7E1C-43DE-A893-5D38AE65B10E}"/>
+              </a:ext>
+            </a:extLst>
+          </p:cNvPr>
+          <p:cNvSpPr>
+            <a:spLocks xmlns:a="http://schemas.openxmlformats.org/drawingml/2006/main" noGrp="1"/>
+          </p:cNvSpPr>
+          <p:nvPr/>
+        </p:nvSpPr>
+        <p:spPr>
+          <a:xfrm xmlns:a="http://schemas.openxmlformats.org/drawingml/2006/main">
+            <a:off x="952500" y="2533650"/>
+            <a:ext cx="1809750" cy="323850"/>
+          </a:xfrm>
+          <a:prstGeom xmlns:a="http://schemas.openxmlformats.org/drawingml/2006/main" prst="rect">
+            <a:avLst/>
+          </a:prstGeom>
+          <a:noFill xmlns:a="http://schemas.openxmlformats.org/drawingml/2006/main"/>
+          <a:ln xmlns:a="http://schemas.openxmlformats.org/drawingml/2006/main" w="0">
+            <a:noFill/>
+            <a:prstDash val="solid"/>
+          </a:ln>
+        </p:spPr>
+        <p:txBody>
+          <a:bodyPr xmlns:a="http://schemas.openxmlformats.org/drawingml/2006/main" anchor="t"/>
+          <a:lstStyle xmlns:a="http://schemas.openxmlformats.org/drawingml/2006/main"/>
+          <a:p xmlns:a="http://schemas.openxmlformats.org/drawingml/2006/main">
+            <a:pPr algn="l">
+              <a:defRPr sz="1875" b="1">
+                <a:solidFill>
+                  <a:srgbClr val="10201A"/>
+                </a:solidFill>
+              </a:defRPr>
+            </a:pPr>
+            <a:r>
+              <a:rPr sz="1875" b="1">
+                <a:solidFill>
+                  <a:srgbClr val="10201A"/>
+                </a:solidFill>
+              </a:rPr>
+              <a:t>预选 Demo</a:t>
+            </a:r>
+          </a:p>
+        </p:txBody>
+      </p:sp>
+      <p:sp>
+        <p:nvSpPr>
+          <p:cNvPr id="7" name="">
+            <a:extLst xmlns:a="http://schemas.openxmlformats.org/drawingml/2006/main">
+              <a:ext uri="{FF2B5EF4-FFF2-40B4-BE49-F238E27FC236}">
+                <a16:creationId xmlns:a16="http://schemas.microsoft.com/office/drawing/2014/main" id="{2699CC21-DF6A-4032-8116-CCC7935DFD4D}"/>
+              </a:ext>
+            </a:extLst>
+          </p:cNvPr>
+          <p:cNvSpPr>
+            <a:spLocks xmlns:a="http://schemas.openxmlformats.org/drawingml/2006/main" noGrp="1"/>
+          </p:cNvSpPr>
+          <p:nvPr/>
+        </p:nvSpPr>
+        <p:spPr>
+          <a:xfrm xmlns:a="http://schemas.openxmlformats.org/drawingml/2006/main">
+            <a:off x="952500" y="3009900"/>
+            <a:ext cx="1790700" cy="514350"/>
+          </a:xfrm>
+          <a:prstGeom xmlns:a="http://schemas.openxmlformats.org/drawingml/2006/main" prst="rect">
+            <a:avLst/>
+          </a:prstGeom>
+          <a:noFill xmlns:a="http://schemas.openxmlformats.org/drawingml/2006/main"/>
+          <a:ln xmlns:a="http://schemas.openxmlformats.org/drawingml/2006/main" w="0">
+            <a:noFill/>
+            <a:prstDash val="solid"/>
+          </a:ln>
+        </p:spPr>
+        <p:txBody>
+          <a:bodyPr xmlns:a="http://schemas.openxmlformats.org/drawingml/2006/main" anchor="t"/>
+          <a:lstStyle xmlns:a="http://schemas.openxmlformats.org/drawingml/2006/main"/>
+          <a:p xmlns:a="http://schemas.openxmlformats.org/drawingml/2006/main">
+            <a:pPr algn="l">
+              <a:defRPr sz="1350" b="0">
+                <a:solidFill>
+                  <a:srgbClr val="587068"/>
+                </a:solidFill>
+              </a:defRPr>
+            </a:pPr>
+            <a:r>
+              <a:rPr sz="1350" b="0">
+                <a:solidFill>
+                  <a:srgbClr val="587068"/>
+                </a:solidFill>
+              </a:rPr>
+              <a:t>mock 数据 + 前端闭环</a:t>
+            </a:r>
+          </a:p>
+        </p:txBody>
+      </p:sp>
+      <p:sp>
+        <p:nvSpPr>
+          <p:cNvPr id="8" name="">
+            <a:extLst xmlns:a="http://schemas.openxmlformats.org/drawingml/2006/main">
+              <a:ext uri="{FF2B5EF4-FFF2-40B4-BE49-F238E27FC236}">
+                <a16:creationId xmlns:a16="http://schemas.microsoft.com/office/drawing/2014/main" id="{855A81D0-B78C-4538-A0B5-F7DA708A53BF}"/>
+              </a:ext>
+            </a:extLst>
+          </p:cNvPr>
+          <p:cNvSpPr>
+            <a:spLocks xmlns:a="http://schemas.openxmlformats.org/drawingml/2006/main" noGrp="1"/>
+          </p:cNvSpPr>
+          <p:nvPr/>
+        </p:nvSpPr>
+        <p:spPr>
+          <a:xfrm xmlns:a="http://schemas.openxmlformats.org/drawingml/2006/main">
+            <a:off x="952500" y="3638550"/>
+            <a:ext cx="1790700" cy="457200"/>
+          </a:xfrm>
+          <a:prstGeom xmlns:a="http://schemas.openxmlformats.org/drawingml/2006/main" prst="rect">
+            <a:avLst/>
+          </a:prstGeom>
+          <a:noFill xmlns:a="http://schemas.openxmlformats.org/drawingml/2006/main"/>
+          <a:ln xmlns:a="http://schemas.openxmlformats.org/drawingml/2006/main" w="0">
+            <a:noFill/>
+            <a:prstDash val="solid"/>
+          </a:ln>
+        </p:spPr>
+        <p:txBody>
+          <a:bodyPr xmlns:a="http://schemas.openxmlformats.org/drawingml/2006/main" anchor="t"/>
+          <a:lstStyle xmlns:a="http://schemas.openxmlformats.org/drawingml/2006/main"/>
+          <a:p xmlns:a="http://schemas.openxmlformats.org/drawingml/2006/main">
+            <a:pPr algn="l">
+              <a:defRPr sz="1275" b="0">
+                <a:solidFill>
+                  <a:srgbClr val="10201A"/>
+                </a:solidFill>
+              </a:defRPr>
+            </a:pPr>
+            <a:r>
+              <a:rPr sz="1275" b="0">
+                <a:solidFill>
+                  <a:srgbClr val="10201A"/>
+                </a:solidFill>
+              </a:rPr>
+              <a:t>证明夜间声音到晨间建议的体验成立</a:t>
+            </a:r>
+          </a:p>
+        </p:txBody>
+      </p:sp>
+      <p:sp>
+        <p:nvSpPr>
+          <p:cNvPr id="9" name="">
+            <a:extLst xmlns:a="http://schemas.openxmlformats.org/drawingml/2006/main">
+              <a:ext uri="{FF2B5EF4-FFF2-40B4-BE49-F238E27FC236}">
+                <a16:creationId xmlns:a16="http://schemas.microsoft.com/office/drawing/2014/main" id="{D3613189-6F0B-43D5-8456-936144A348B8}"/>
+              </a:ext>
+            </a:extLst>
+          </p:cNvPr>
+          <p:cNvSpPr>
+            <a:spLocks xmlns:a="http://schemas.openxmlformats.org/drawingml/2006/main" noGrp="1"/>
+          </p:cNvSpPr>
+          <p:nvPr/>
+        </p:nvSpPr>
+        <p:spPr>
+          <a:xfrm xmlns:a="http://schemas.openxmlformats.org/drawingml/2006/main">
+            <a:off x="3048000" y="2914650"/>
+            <a:ext cx="304800" cy="152400"/>
+          </a:xfrm>
+          <a:prstGeom xmlns:a="http://schemas.openxmlformats.org/drawingml/2006/main" prst="rightArrow">
+            <a:avLst/>
+          </a:prstGeom>
+          <a:solidFill xmlns:a="http://schemas.openxmlformats.org/drawingml/2006/main">
+            <a:srgbClr val="38A169"/>
+          </a:solidFill>
+          <a:ln xmlns:a="http://schemas.openxmlformats.org/drawingml/2006/main" w="0">
+            <a:solidFill>
+              <a:srgbClr val="38A169"/>
+            </a:solidFill>
+            <a:prstDash val="solid"/>
+          </a:ln>
+        </p:spPr>
+      </p:sp>
+      <p:sp>
+        <p:nvSpPr>
+          <p:cNvPr id="10" name="">
+            <a:extLst xmlns:a="http://schemas.openxmlformats.org/drawingml/2006/main">
+              <a:ext uri="{FF2B5EF4-FFF2-40B4-BE49-F238E27FC236}">
+                <a16:creationId xmlns:a16="http://schemas.microsoft.com/office/drawing/2014/main" id="{0FD0D570-6FF8-4567-A9B9-9749C478A32F}"/>
+              </a:ext>
+            </a:extLst>
+          </p:cNvPr>
+          <p:cNvSpPr>
+            <a:spLocks xmlns:a="http://schemas.openxmlformats.org/drawingml/2006/main" noGrp="1"/>
+          </p:cNvSpPr>
+          <p:nvPr/>
+        </p:nvSpPr>
+        <p:spPr>
+          <a:xfrm xmlns:a="http://schemas.openxmlformats.org/drawingml/2006/main">
+            <a:off x="3467100" y="1828800"/>
+            <a:ext cx="2286000" cy="2286000"/>
+          </a:xfrm>
+          <a:prstGeom xmlns:a="http://schemas.openxmlformats.org/drawingml/2006/main" prst="roundRect">
+            <a:avLst>
+              <a:gd name="adj" fmla="val 4167"/>
+            </a:avLst>
+          </a:prstGeom>
+          <a:solidFill xmlns:a="http://schemas.openxmlformats.org/drawingml/2006/main">
+            <a:srgbClr val="EAF1FF"/>
+          </a:solidFill>
+          <a:ln xmlns:a="http://schemas.openxmlformats.org/drawingml/2006/main" w="9525">
+            <a:solidFill>
+              <a:srgbClr val="C9DED4"/>
+            </a:solidFill>
+            <a:prstDash val="solid"/>
+          </a:ln>
+        </p:spPr>
+      </p:sp>
+      <p:sp>
+        <p:nvSpPr>
+          <p:cNvPr id="11" name="">
+            <a:extLst xmlns:a="http://schemas.openxmlformats.org/drawingml/2006/main">
+              <a:ext uri="{FF2B5EF4-FFF2-40B4-BE49-F238E27FC236}">
+                <a16:creationId xmlns:a16="http://schemas.microsoft.com/office/drawing/2014/main" id="{B62EDF95-D7AB-4754-B719-54FE3B4E11F0}"/>
+              </a:ext>
+            </a:extLst>
+          </p:cNvPr>
+          <p:cNvSpPr>
+            <a:spLocks xmlns:a="http://schemas.openxmlformats.org/drawingml/2006/main" noGrp="1"/>
+          </p:cNvSpPr>
+          <p:nvPr/>
+        </p:nvSpPr>
+        <p:spPr>
+          <a:xfrm xmlns:a="http://schemas.openxmlformats.org/drawingml/2006/main">
+            <a:off x="3695700" y="2057400"/>
+            <a:ext cx="514350" cy="323850"/>
+          </a:xfrm>
+          <a:prstGeom xmlns:a="http://schemas.openxmlformats.org/drawingml/2006/main" prst="rect">
+            <a:avLst/>
+          </a:prstGeom>
+          <a:noFill xmlns:a="http://schemas.openxmlformats.org/drawingml/2006/main"/>
+          <a:ln xmlns:a="http://schemas.openxmlformats.org/drawingml/2006/main" w="0">
+            <a:noFill/>
+            <a:prstDash val="solid"/>
+          </a:ln>
+        </p:spPr>
+        <p:txBody>
+          <a:bodyPr xmlns:a="http://schemas.openxmlformats.org/drawingml/2006/main" anchor="t"/>
+          <a:lstStyle xmlns:a="http://schemas.openxmlformats.org/drawingml/2006/main"/>
+          <a:p xmlns:a="http://schemas.openxmlformats.org/drawingml/2006/main">
+            <a:pPr algn="l">
+              <a:defRPr sz="1875" b="1">
+                <a:solidFill>
+                  <a:srgbClr val="38A169"/>
+                </a:solidFill>
+              </a:defRPr>
+            </a:pPr>
+            <a:r>
+              <a:rPr sz="1875" b="1">
+                <a:solidFill>
+                  <a:srgbClr val="38A169"/>
+                </a:solidFill>
+              </a:rPr>
+              <a:t>02</a:t>
+            </a:r>
+          </a:p>
+        </p:txBody>
+      </p:sp>
+      <p:sp>
+        <p:nvSpPr>
+          <p:cNvPr id="12" name="">
+            <a:extLst xmlns:a="http://schemas.openxmlformats.org/drawingml/2006/main">
+              <a:ext uri="{FF2B5EF4-FFF2-40B4-BE49-F238E27FC236}">
+                <a16:creationId xmlns:a16="http://schemas.microsoft.com/office/drawing/2014/main" id="{093BCC27-7317-41D7-B464-90BD0F694F75}"/>
+              </a:ext>
+            </a:extLst>
+          </p:cNvPr>
+          <p:cNvSpPr>
+            <a:spLocks xmlns:a="http://schemas.openxmlformats.org/drawingml/2006/main" noGrp="1"/>
+          </p:cNvSpPr>
+          <p:nvPr/>
+        </p:nvSpPr>
+        <p:spPr>
+          <a:xfrm xmlns:a="http://schemas.openxmlformats.org/drawingml/2006/main">
+            <a:off x="3695700" y="2533650"/>
+            <a:ext cx="1809750" cy="323850"/>
+          </a:xfrm>
+          <a:prstGeom xmlns:a="http://schemas.openxmlformats.org/drawingml/2006/main" prst="rect">
+            <a:avLst/>
+          </a:prstGeom>
+          <a:noFill xmlns:a="http://schemas.openxmlformats.org/drawingml/2006/main"/>
+          <a:ln xmlns:a="http://schemas.openxmlformats.org/drawingml/2006/main" w="0">
+            <a:noFill/>
+            <a:prstDash val="solid"/>
+          </a:ln>
+        </p:spPr>
+        <p:txBody>
+          <a:bodyPr xmlns:a="http://schemas.openxmlformats.org/drawingml/2006/main" anchor="t"/>
+          <a:lstStyle xmlns:a="http://schemas.openxmlformats.org/drawingml/2006/main"/>
+          <a:p xmlns:a="http://schemas.openxmlformats.org/drawingml/2006/main">
+            <a:pPr algn="l">
+              <a:defRPr sz="1875" b="1">
+                <a:solidFill>
+                  <a:srgbClr val="10201A"/>
+                </a:solidFill>
+              </a:defRPr>
+            </a:pPr>
+            <a:r>
+              <a:rPr sz="1875" b="1">
+                <a:solidFill>
+                  <a:srgbClr val="10201A"/>
+                </a:solidFill>
+              </a:rPr>
+              <a:t>现场增强</a:t>
+            </a:r>
+          </a:p>
+        </p:txBody>
+      </p:sp>
+      <p:sp>
+        <p:nvSpPr>
+          <p:cNvPr id="13" name="">
+            <a:extLst xmlns:a="http://schemas.openxmlformats.org/drawingml/2006/main">
+              <a:ext uri="{FF2B5EF4-FFF2-40B4-BE49-F238E27FC236}">
+                <a16:creationId xmlns:a16="http://schemas.microsoft.com/office/drawing/2014/main" id="{467491ED-24C6-4BFC-AF6A-FB81254282B9}"/>
+              </a:ext>
+            </a:extLst>
+          </p:cNvPr>
+          <p:cNvSpPr>
+            <a:spLocks xmlns:a="http://schemas.openxmlformats.org/drawingml/2006/main" noGrp="1"/>
+          </p:cNvSpPr>
+          <p:nvPr/>
+        </p:nvSpPr>
+        <p:spPr>
+          <a:xfrm xmlns:a="http://schemas.openxmlformats.org/drawingml/2006/main">
+            <a:off x="3695700" y="3009900"/>
+            <a:ext cx="1790700" cy="514350"/>
+          </a:xfrm>
+          <a:prstGeom xmlns:a="http://schemas.openxmlformats.org/drawingml/2006/main" prst="rect">
+            <a:avLst/>
+          </a:prstGeom>
+          <a:noFill xmlns:a="http://schemas.openxmlformats.org/drawingml/2006/main"/>
+          <a:ln xmlns:a="http://schemas.openxmlformats.org/drawingml/2006/main" w="0">
+            <a:noFill/>
+            <a:prstDash val="solid"/>
+          </a:ln>
+        </p:spPr>
+        <p:txBody>
+          <a:bodyPr xmlns:a="http://schemas.openxmlformats.org/drawingml/2006/main" anchor="t"/>
+          <a:lstStyle xmlns:a="http://schemas.openxmlformats.org/drawingml/2006/main"/>
+          <a:p xmlns:a="http://schemas.openxmlformats.org/drawingml/2006/main">
+            <a:pPr algn="l">
+              <a:defRPr sz="1350" b="0">
+                <a:solidFill>
+                  <a:srgbClr val="587068"/>
+                </a:solidFill>
+              </a:defRPr>
+            </a:pPr>
+            <a:r>
+              <a:rPr sz="1350" b="0">
+                <a:solidFill>
+                  <a:srgbClr val="587068"/>
+                </a:solidFill>
+              </a:rPr>
+              <a:t>soundcore Work / 上传音频 / 报告增强</a:t>
+            </a:r>
+          </a:p>
+        </p:txBody>
+      </p:sp>
+      <p:sp>
+        <p:nvSpPr>
+          <p:cNvPr id="14" name="">
+            <a:extLst xmlns:a="http://schemas.openxmlformats.org/drawingml/2006/main">
+              <a:ext uri="{FF2B5EF4-FFF2-40B4-BE49-F238E27FC236}">
+                <a16:creationId xmlns:a16="http://schemas.microsoft.com/office/drawing/2014/main" id="{84050FF1-81B0-46F2-9ACA-D8D5FACEC804}"/>
+              </a:ext>
+            </a:extLst>
+          </p:cNvPr>
+          <p:cNvSpPr>
+            <a:spLocks xmlns:a="http://schemas.openxmlformats.org/drawingml/2006/main" noGrp="1"/>
+          </p:cNvSpPr>
+          <p:nvPr/>
+        </p:nvSpPr>
+        <p:spPr>
+          <a:xfrm xmlns:a="http://schemas.openxmlformats.org/drawingml/2006/main">
+            <a:off x="3695700" y="3638550"/>
+            <a:ext cx="1790700" cy="457200"/>
+          </a:xfrm>
+          <a:prstGeom xmlns:a="http://schemas.openxmlformats.org/drawingml/2006/main" prst="rect">
+            <a:avLst/>
+          </a:prstGeom>
+          <a:noFill xmlns:a="http://schemas.openxmlformats.org/drawingml/2006/main"/>
+          <a:ln xmlns:a="http://schemas.openxmlformats.org/drawingml/2006/main" w="0">
+            <a:noFill/>
+            <a:prstDash val="solid"/>
+          </a:ln>
+        </p:spPr>
+        <p:txBody>
+          <a:bodyPr xmlns:a="http://schemas.openxmlformats.org/drawingml/2006/main" anchor="t"/>
+          <a:lstStyle xmlns:a="http://schemas.openxmlformats.org/drawingml/2006/main"/>
+          <a:p xmlns:a="http://schemas.openxmlformats.org/drawingml/2006/main">
+            <a:pPr algn="l">
+              <a:defRPr sz="1275" b="0">
+                <a:solidFill>
+                  <a:srgbClr val="10201A"/>
+                </a:solidFill>
+              </a:defRPr>
+            </a:pPr>
+            <a:r>
+              <a:rPr sz="1275" b="0">
+                <a:solidFill>
+                  <a:srgbClr val="10201A"/>
+                </a:solidFill>
+              </a:rPr>
+              <a:t>把原型推进到真实设备和真实输入</a:t>
+            </a:r>
+          </a:p>
+        </p:txBody>
+      </p:sp>
+      <p:sp>
+        <p:nvSpPr>
+          <p:cNvPr id="15" name="">
+            <a:extLst xmlns:a="http://schemas.openxmlformats.org/drawingml/2006/main">
+              <a:ext uri="{FF2B5EF4-FFF2-40B4-BE49-F238E27FC236}">
+                <a16:creationId xmlns:a16="http://schemas.microsoft.com/office/drawing/2014/main" id="{090F5B21-3DE7-46C8-994C-80C3105CC6D9}"/>
+              </a:ext>
+            </a:extLst>
+          </p:cNvPr>
+          <p:cNvSpPr>
+            <a:spLocks xmlns:a="http://schemas.openxmlformats.org/drawingml/2006/main" noGrp="1"/>
+          </p:cNvSpPr>
+          <p:nvPr/>
+        </p:nvSpPr>
+        <p:spPr>
+          <a:xfrm xmlns:a="http://schemas.openxmlformats.org/drawingml/2006/main">
+            <a:off x="5791200" y="2914650"/>
+            <a:ext cx="304800" cy="152400"/>
+          </a:xfrm>
+          <a:prstGeom xmlns:a="http://schemas.openxmlformats.org/drawingml/2006/main" prst="rightArrow">
+            <a:avLst/>
+          </a:prstGeom>
+          <a:solidFill xmlns:a="http://schemas.openxmlformats.org/drawingml/2006/main">
+            <a:srgbClr val="38A169"/>
+          </a:solidFill>
+          <a:ln xmlns:a="http://schemas.openxmlformats.org/drawingml/2006/main" w="0">
+            <a:solidFill>
+              <a:srgbClr val="38A169"/>
+            </a:solidFill>
+            <a:prstDash val="solid"/>
+          </a:ln>
+        </p:spPr>
+      </p:sp>
+      <p:sp>
+        <p:nvSpPr>
+          <p:cNvPr id="16" name="">
+            <a:extLst xmlns:a="http://schemas.openxmlformats.org/drawingml/2006/main">
+              <a:ext uri="{FF2B5EF4-FFF2-40B4-BE49-F238E27FC236}">
+                <a16:creationId xmlns:a16="http://schemas.microsoft.com/office/drawing/2014/main" id="{E6B7F7A2-79C1-46CA-889C-70431FCC9D3E}"/>
+              </a:ext>
+            </a:extLst>
+          </p:cNvPr>
+          <p:cNvSpPr>
+            <a:spLocks xmlns:a="http://schemas.openxmlformats.org/drawingml/2006/main" noGrp="1"/>
+          </p:cNvSpPr>
+          <p:nvPr/>
+        </p:nvSpPr>
+        <p:spPr>
+          <a:xfrm xmlns:a="http://schemas.openxmlformats.org/drawingml/2006/main">
+            <a:off x="6210300" y="1828800"/>
+            <a:ext cx="2286000" cy="2286000"/>
+          </a:xfrm>
+          <a:prstGeom xmlns:a="http://schemas.openxmlformats.org/drawingml/2006/main" prst="roundRect">
+            <a:avLst>
+              <a:gd name="adj" fmla="val 4167"/>
+            </a:avLst>
+          </a:prstGeom>
+          <a:solidFill xmlns:a="http://schemas.openxmlformats.org/drawingml/2006/main">
+            <a:srgbClr val="FFF4DC"/>
+          </a:solidFill>
+          <a:ln xmlns:a="http://schemas.openxmlformats.org/drawingml/2006/main" w="9525">
+            <a:solidFill>
+              <a:srgbClr val="C9DED4"/>
+            </a:solidFill>
+            <a:prstDash val="solid"/>
+          </a:ln>
+        </p:spPr>
+      </p:sp>
+      <p:sp>
+        <p:nvSpPr>
+          <p:cNvPr id="17" name="">
+            <a:extLst xmlns:a="http://schemas.openxmlformats.org/drawingml/2006/main">
+              <a:ext uri="{FF2B5EF4-FFF2-40B4-BE49-F238E27FC236}">
+                <a16:creationId xmlns:a16="http://schemas.microsoft.com/office/drawing/2014/main" id="{09DC117F-079A-40E8-8812-E8D00DF1D411}"/>
+              </a:ext>
+            </a:extLst>
+          </p:cNvPr>
+          <p:cNvSpPr>
+            <a:spLocks xmlns:a="http://schemas.openxmlformats.org/drawingml/2006/main" noGrp="1"/>
+          </p:cNvSpPr>
+          <p:nvPr/>
+        </p:nvSpPr>
+        <p:spPr>
+          <a:xfrm xmlns:a="http://schemas.openxmlformats.org/drawingml/2006/main">
+            <a:off x="6438900" y="2057400"/>
+            <a:ext cx="514350" cy="323850"/>
+          </a:xfrm>
+          <a:prstGeom xmlns:a="http://schemas.openxmlformats.org/drawingml/2006/main" prst="rect">
+            <a:avLst/>
+          </a:prstGeom>
+          <a:noFill xmlns:a="http://schemas.openxmlformats.org/drawingml/2006/main"/>
+          <a:ln xmlns:a="http://schemas.openxmlformats.org/drawingml/2006/main" w="0">
+            <a:noFill/>
+            <a:prstDash val="solid"/>
+          </a:ln>
+        </p:spPr>
+        <p:txBody>
+          <a:bodyPr xmlns:a="http://schemas.openxmlformats.org/drawingml/2006/main" anchor="t"/>
+          <a:lstStyle xmlns:a="http://schemas.openxmlformats.org/drawingml/2006/main"/>
+          <a:p xmlns:a="http://schemas.openxmlformats.org/drawingml/2006/main">
+            <a:pPr algn="l">
+              <a:defRPr sz="1875" b="1">
+                <a:solidFill>
+                  <a:srgbClr val="38A169"/>
+                </a:solidFill>
+              </a:defRPr>
+            </a:pPr>
+            <a:r>
+              <a:rPr sz="1875" b="1">
+                <a:solidFill>
+                  <a:srgbClr val="38A169"/>
+                </a:solidFill>
+              </a:rPr>
+              <a:t>03</a:t>
+            </a:r>
+          </a:p>
+        </p:txBody>
+      </p:sp>
+      <p:sp>
+        <p:nvSpPr>
+          <p:cNvPr id="18" name="">
+            <a:extLst xmlns:a="http://schemas.openxmlformats.org/drawingml/2006/main">
+              <a:ext uri="{FF2B5EF4-FFF2-40B4-BE49-F238E27FC236}">
+                <a16:creationId xmlns:a16="http://schemas.microsoft.com/office/drawing/2014/main" id="{CFF552FD-554B-4824-ACC5-55A22E571575}"/>
+              </a:ext>
+            </a:extLst>
+          </p:cNvPr>
+          <p:cNvSpPr>
+            <a:spLocks xmlns:a="http://schemas.openxmlformats.org/drawingml/2006/main" noGrp="1"/>
+          </p:cNvSpPr>
+          <p:nvPr/>
+        </p:nvSpPr>
+        <p:spPr>
+          <a:xfrm xmlns:a="http://schemas.openxmlformats.org/drawingml/2006/main">
+            <a:off x="6438900" y="2533650"/>
+            <a:ext cx="1809750" cy="323850"/>
+          </a:xfrm>
+          <a:prstGeom xmlns:a="http://schemas.openxmlformats.org/drawingml/2006/main" prst="rect">
+            <a:avLst/>
+          </a:prstGeom>
+          <a:noFill xmlns:a="http://schemas.openxmlformats.org/drawingml/2006/main"/>
+          <a:ln xmlns:a="http://schemas.openxmlformats.org/drawingml/2006/main" w="0">
+            <a:noFill/>
+            <a:prstDash val="solid"/>
+          </a:ln>
+        </p:spPr>
+        <p:txBody>
+          <a:bodyPr xmlns:a="http://schemas.openxmlformats.org/drawingml/2006/main" anchor="t"/>
+          <a:lstStyle xmlns:a="http://schemas.openxmlformats.org/drawingml/2006/main"/>
+          <a:p xmlns:a="http://schemas.openxmlformats.org/drawingml/2006/main">
+            <a:pPr algn="l">
+              <a:defRPr sz="1875" b="1">
+                <a:solidFill>
+                  <a:srgbClr val="10201A"/>
+                </a:solidFill>
+              </a:defRPr>
+            </a:pPr>
+            <a:r>
+              <a:rPr sz="1875" b="1">
+                <a:solidFill>
+                  <a:srgbClr val="10201A"/>
+                </a:solidFill>
+              </a:rPr>
+              <a:t>可试用 MVP</a:t>
+            </a:r>
+          </a:p>
+        </p:txBody>
+      </p:sp>
+      <p:sp>
+        <p:nvSpPr>
+          <p:cNvPr id="19" name="">
+            <a:extLst xmlns:a="http://schemas.openxmlformats.org/drawingml/2006/main">
+              <a:ext uri="{FF2B5EF4-FFF2-40B4-BE49-F238E27FC236}">
+                <a16:creationId xmlns:a16="http://schemas.microsoft.com/office/drawing/2014/main" id="{413E1CBB-6A9D-490E-87FD-A96753ED07A5}"/>
+              </a:ext>
+            </a:extLst>
+          </p:cNvPr>
+          <p:cNvSpPr>
+            <a:spLocks xmlns:a="http://schemas.openxmlformats.org/drawingml/2006/main" noGrp="1"/>
+          </p:cNvSpPr>
+          <p:nvPr/>
+        </p:nvSpPr>
+        <p:spPr>
+          <a:xfrm xmlns:a="http://schemas.openxmlformats.org/drawingml/2006/main">
+            <a:off x="6438900" y="3009900"/>
+            <a:ext cx="1790700" cy="514350"/>
+          </a:xfrm>
+          <a:prstGeom xmlns:a="http://schemas.openxmlformats.org/drawingml/2006/main" prst="rect">
+            <a:avLst/>
+          </a:prstGeom>
+          <a:noFill xmlns:a="http://schemas.openxmlformats.org/drawingml/2006/main"/>
+          <a:ln xmlns:a="http://schemas.openxmlformats.org/drawingml/2006/main" w="0">
+            <a:noFill/>
+            <a:prstDash val="solid"/>
+          </a:ln>
+        </p:spPr>
+        <p:txBody>
+          <a:bodyPr xmlns:a="http://schemas.openxmlformats.org/drawingml/2006/main" anchor="t"/>
+          <a:lstStyle xmlns:a="http://schemas.openxmlformats.org/drawingml/2006/main"/>
+          <a:p xmlns:a="http://schemas.openxmlformats.org/drawingml/2006/main">
+            <a:pPr algn="l">
+              <a:defRPr sz="1350" b="0">
+                <a:solidFill>
+                  <a:srgbClr val="587068"/>
+                </a:solidFill>
+              </a:defRPr>
+            </a:pPr>
+            <a:r>
+              <a:rPr sz="1350" b="0">
+                <a:solidFill>
+                  <a:srgbClr val="587068"/>
+                </a:solidFill>
+              </a:rPr>
+              <a:t>真实录音 + 7 天趋势 + 用户反馈</a:t>
+            </a:r>
+          </a:p>
+        </p:txBody>
+      </p:sp>
+      <p:sp>
+        <p:nvSpPr>
+          <p:cNvPr id="20" name="">
+            <a:extLst xmlns:a="http://schemas.openxmlformats.org/drawingml/2006/main">
+              <a:ext uri="{FF2B5EF4-FFF2-40B4-BE49-F238E27FC236}">
+                <a16:creationId xmlns:a16="http://schemas.microsoft.com/office/drawing/2014/main" id="{EFAEB8EF-88DD-465C-A66A-228909964C6A}"/>
+              </a:ext>
+            </a:extLst>
+          </p:cNvPr>
+          <p:cNvSpPr>
+            <a:spLocks xmlns:a="http://schemas.openxmlformats.org/drawingml/2006/main" noGrp="1"/>
+          </p:cNvSpPr>
+          <p:nvPr/>
+        </p:nvSpPr>
+        <p:spPr>
+          <a:xfrm xmlns:a="http://schemas.openxmlformats.org/drawingml/2006/main">
+            <a:off x="6438900" y="3638550"/>
+            <a:ext cx="1790700" cy="457200"/>
+          </a:xfrm>
+          <a:prstGeom xmlns:a="http://schemas.openxmlformats.org/drawingml/2006/main" prst="rect">
+            <a:avLst/>
+          </a:prstGeom>
+          <a:noFill xmlns:a="http://schemas.openxmlformats.org/drawingml/2006/main"/>
+          <a:ln xmlns:a="http://schemas.openxmlformats.org/drawingml/2006/main" w="0">
+            <a:noFill/>
+            <a:prstDash val="solid"/>
+          </a:ln>
+        </p:spPr>
+        <p:txBody>
+          <a:bodyPr xmlns:a="http://schemas.openxmlformats.org/drawingml/2006/main" anchor="t"/>
+          <a:lstStyle xmlns:a="http://schemas.openxmlformats.org/drawingml/2006/main"/>
+          <a:p xmlns:a="http://schemas.openxmlformats.org/drawingml/2006/main">
+            <a:pPr algn="l">
+              <a:defRPr sz="1275" b="0">
+                <a:solidFill>
+                  <a:srgbClr val="10201A"/>
+                </a:solidFill>
+              </a:defRPr>
+            </a:pPr>
+            <a:r>
+              <a:rPr sz="1275" b="0">
+                <a:solidFill>
+                  <a:srgbClr val="10201A"/>
+                </a:solidFill>
+              </a:rPr>
+              <a:t>验证用户是否愿意每天早晨打开</a:t>
+            </a:r>
+          </a:p>
+        </p:txBody>
+      </p:sp>
+      <p:sp>
+        <p:nvSpPr>
+          <p:cNvPr id="21" name="">
+            <a:extLst xmlns:a="http://schemas.openxmlformats.org/drawingml/2006/main">
+              <a:ext uri="{FF2B5EF4-FFF2-40B4-BE49-F238E27FC236}">
+                <a16:creationId xmlns:a16="http://schemas.microsoft.com/office/drawing/2014/main" id="{4505EFC1-0849-42D8-AE7B-2BB7A4BF87E9}"/>
+              </a:ext>
+            </a:extLst>
+          </p:cNvPr>
+          <p:cNvSpPr>
+            <a:spLocks xmlns:a="http://schemas.openxmlformats.org/drawingml/2006/main" noGrp="1"/>
+          </p:cNvSpPr>
+          <p:nvPr/>
+        </p:nvSpPr>
+        <p:spPr>
+          <a:xfrm xmlns:a="http://schemas.openxmlformats.org/drawingml/2006/main">
+            <a:off x="8534400" y="2914650"/>
+            <a:ext cx="304800" cy="152400"/>
+          </a:xfrm>
+          <a:prstGeom xmlns:a="http://schemas.openxmlformats.org/drawingml/2006/main" prst="rightArrow">
+            <a:avLst/>
+          </a:prstGeom>
+          <a:solidFill xmlns:a="http://schemas.openxmlformats.org/drawingml/2006/main">
+            <a:srgbClr val="38A169"/>
+          </a:solidFill>
+          <a:ln xmlns:a="http://schemas.openxmlformats.org/drawingml/2006/main" w="0">
+            <a:solidFill>
+              <a:srgbClr val="38A169"/>
+            </a:solidFill>
+            <a:prstDash val="solid"/>
+          </a:ln>
+        </p:spPr>
+      </p:sp>
+      <p:sp>
+        <p:nvSpPr>
+          <p:cNvPr id="22" name="">
+            <a:extLst xmlns:a="http://schemas.openxmlformats.org/drawingml/2006/main">
+              <a:ext uri="{FF2B5EF4-FFF2-40B4-BE49-F238E27FC236}">
+                <a16:creationId xmlns:a16="http://schemas.microsoft.com/office/drawing/2014/main" id="{DEB00C6D-A19B-4FB5-B34A-FC3B28A55FE9}"/>
+              </a:ext>
+            </a:extLst>
+          </p:cNvPr>
+          <p:cNvSpPr>
+            <a:spLocks xmlns:a="http://schemas.openxmlformats.org/drawingml/2006/main" noGrp="1"/>
+          </p:cNvSpPr>
+          <p:nvPr/>
+        </p:nvSpPr>
+        <p:spPr>
+          <a:xfrm xmlns:a="http://schemas.openxmlformats.org/drawingml/2006/main">
+            <a:off x="8953500" y="1828800"/>
+            <a:ext cx="2286000" cy="2286000"/>
+          </a:xfrm>
+          <a:prstGeom xmlns:a="http://schemas.openxmlformats.org/drawingml/2006/main" prst="roundRect">
+            <a:avLst>
+              <a:gd name="adj" fmla="val 4167"/>
+            </a:avLst>
+          </a:prstGeom>
+          <a:solidFill xmlns:a="http://schemas.openxmlformats.org/drawingml/2006/main">
+            <a:srgbClr val="FDECEA"/>
+          </a:solidFill>
+          <a:ln xmlns:a="http://schemas.openxmlformats.org/drawingml/2006/main" w="9525">
+            <a:solidFill>
+              <a:srgbClr val="C9DED4"/>
+            </a:solidFill>
+            <a:prstDash val="solid"/>
+          </a:ln>
+        </p:spPr>
+      </p:sp>
+      <p:sp>
+        <p:nvSpPr>
+          <p:cNvPr id="23" name="">
+            <a:extLst xmlns:a="http://schemas.openxmlformats.org/drawingml/2006/main">
+              <a:ext uri="{FF2B5EF4-FFF2-40B4-BE49-F238E27FC236}">
+                <a16:creationId xmlns:a16="http://schemas.microsoft.com/office/drawing/2014/main" id="{7ADB07E1-EA29-4B14-BE3F-4E62E6275486}"/>
+              </a:ext>
+            </a:extLst>
+          </p:cNvPr>
+          <p:cNvSpPr>
+            <a:spLocks xmlns:a="http://schemas.openxmlformats.org/drawingml/2006/main" noGrp="1"/>
+          </p:cNvSpPr>
+          <p:nvPr/>
+        </p:nvSpPr>
+        <p:spPr>
+          <a:xfrm xmlns:a="http://schemas.openxmlformats.org/drawingml/2006/main">
+            <a:off x="9182100" y="2057400"/>
+            <a:ext cx="514350" cy="323850"/>
+          </a:xfrm>
+          <a:prstGeom xmlns:a="http://schemas.openxmlformats.org/drawingml/2006/main" prst="rect">
+            <a:avLst/>
+          </a:prstGeom>
+          <a:noFill xmlns:a="http://schemas.openxmlformats.org/drawingml/2006/main"/>
+          <a:ln xmlns:a="http://schemas.openxmlformats.org/drawingml/2006/main" w="0">
+            <a:noFill/>
+            <a:prstDash val="solid"/>
+          </a:ln>
+        </p:spPr>
+        <p:txBody>
+          <a:bodyPr xmlns:a="http://schemas.openxmlformats.org/drawingml/2006/main" anchor="t"/>
+          <a:lstStyle xmlns:a="http://schemas.openxmlformats.org/drawingml/2006/main"/>
+          <a:p xmlns:a="http://schemas.openxmlformats.org/drawingml/2006/main">
+            <a:pPr algn="l">
+              <a:defRPr sz="1875" b="1">
+                <a:solidFill>
+                  <a:srgbClr val="38A169"/>
+                </a:solidFill>
+              </a:defRPr>
+            </a:pPr>
+            <a:r>
+              <a:rPr sz="1875" b="1">
+                <a:solidFill>
+                  <a:srgbClr val="38A169"/>
+                </a:solidFill>
+              </a:rPr>
+              <a:t>04</a:t>
+            </a:r>
+          </a:p>
+        </p:txBody>
+      </p:sp>
+      <p:sp>
+        <p:nvSpPr>
+          <p:cNvPr id="24" name="">
+            <a:extLst xmlns:a="http://schemas.openxmlformats.org/drawingml/2006/main">
+              <a:ext uri="{FF2B5EF4-FFF2-40B4-BE49-F238E27FC236}">
+                <a16:creationId xmlns:a16="http://schemas.microsoft.com/office/drawing/2014/main" id="{75F8C01B-0DC8-4ECD-A0F0-9E9E618314F2}"/>
+              </a:ext>
+            </a:extLst>
+          </p:cNvPr>
+          <p:cNvSpPr>
+            <a:spLocks xmlns:a="http://schemas.openxmlformats.org/drawingml/2006/main" noGrp="1"/>
+          </p:cNvSpPr>
+          <p:nvPr/>
+        </p:nvSpPr>
+        <p:spPr>
+          <a:xfrm xmlns:a="http://schemas.openxmlformats.org/drawingml/2006/main">
+            <a:off x="9182100" y="2533650"/>
+            <a:ext cx="1809750" cy="323850"/>
+          </a:xfrm>
+          <a:prstGeom xmlns:a="http://schemas.openxmlformats.org/drawingml/2006/main" prst="rect">
+            <a:avLst/>
+          </a:prstGeom>
+          <a:noFill xmlns:a="http://schemas.openxmlformats.org/drawingml/2006/main"/>
+          <a:ln xmlns:a="http://schemas.openxmlformats.org/drawingml/2006/main" w="0">
+            <a:noFill/>
+            <a:prstDash val="solid"/>
+          </a:ln>
+        </p:spPr>
+        <p:txBody>
+          <a:bodyPr xmlns:a="http://schemas.openxmlformats.org/drawingml/2006/main" anchor="t"/>
+          <a:lstStyle xmlns:a="http://schemas.openxmlformats.org/drawingml/2006/main"/>
+          <a:p xmlns:a="http://schemas.openxmlformats.org/drawingml/2006/main">
+            <a:pPr algn="l">
+              <a:defRPr sz="1875" b="1">
+                <a:solidFill>
+                  <a:srgbClr val="10201A"/>
+                </a:solidFill>
+              </a:defRPr>
+            </a:pPr>
+            <a:r>
+              <a:rPr sz="1875" b="1">
+                <a:solidFill>
+                  <a:srgbClr val="10201A"/>
+                </a:solidFill>
+              </a:rPr>
+              <a:t>产品化硬件</a:t>
+            </a:r>
+          </a:p>
+        </p:txBody>
+      </p:sp>
+      <p:sp>
+        <p:nvSpPr>
+          <p:cNvPr id="25" name="">
+            <a:extLst xmlns:a="http://schemas.openxmlformats.org/drawingml/2006/main">
+              <a:ext uri="{FF2B5EF4-FFF2-40B4-BE49-F238E27FC236}">
+                <a16:creationId xmlns:a16="http://schemas.microsoft.com/office/drawing/2014/main" id="{9BCC559B-5119-43DB-A540-10639E983232}"/>
+              </a:ext>
+            </a:extLst>
+          </p:cNvPr>
+          <p:cNvSpPr>
+            <a:spLocks xmlns:a="http://schemas.openxmlformats.org/drawingml/2006/main" noGrp="1"/>
+          </p:cNvSpPr>
+          <p:nvPr/>
+        </p:nvSpPr>
+        <p:spPr>
+          <a:xfrm xmlns:a="http://schemas.openxmlformats.org/drawingml/2006/main">
+            <a:off x="9182100" y="3009900"/>
+            <a:ext cx="1790700" cy="514350"/>
+          </a:xfrm>
+          <a:prstGeom xmlns:a="http://schemas.openxmlformats.org/drawingml/2006/main" prst="rect">
+            <a:avLst/>
+          </a:prstGeom>
+          <a:noFill xmlns:a="http://schemas.openxmlformats.org/drawingml/2006/main"/>
+          <a:ln xmlns:a="http://schemas.openxmlformats.org/drawingml/2006/main" w="0">
+            <a:noFill/>
+            <a:prstDash val="solid"/>
+          </a:ln>
+        </p:spPr>
+        <p:txBody>
+          <a:bodyPr xmlns:a="http://schemas.openxmlformats.org/drawingml/2006/main" anchor="t"/>
+          <a:lstStyle xmlns:a="http://schemas.openxmlformats.org/drawingml/2006/main"/>
+          <a:p xmlns:a="http://schemas.openxmlformats.org/drawingml/2006/main">
+            <a:pPr algn="l">
+              <a:defRPr sz="1350" b="0">
+                <a:solidFill>
+                  <a:srgbClr val="587068"/>
+                </a:solidFill>
+              </a:defRPr>
+            </a:pPr>
+            <a:r>
+              <a:rPr sz="1350" b="0">
+                <a:solidFill>
+                  <a:srgbClr val="587068"/>
+                </a:solidFill>
+              </a:rPr>
+              <a:t>SenseLoop Watch / Band / Pendant</a:t>
+            </a:r>
+          </a:p>
+        </p:txBody>
+      </p:sp>
+      <p:sp>
+        <p:nvSpPr>
+          <p:cNvPr id="26" name="">
+            <a:extLst xmlns:a="http://schemas.openxmlformats.org/drawingml/2006/main">
+              <a:ext uri="{FF2B5EF4-FFF2-40B4-BE49-F238E27FC236}">
+                <a16:creationId xmlns:a16="http://schemas.microsoft.com/office/drawing/2014/main" id="{62625272-44AA-46B3-8903-302B01521F09}"/>
+              </a:ext>
+            </a:extLst>
+          </p:cNvPr>
+          <p:cNvSpPr>
+            <a:spLocks xmlns:a="http://schemas.openxmlformats.org/drawingml/2006/main" noGrp="1"/>
+          </p:cNvSpPr>
+          <p:nvPr/>
+        </p:nvSpPr>
+        <p:spPr>
+          <a:xfrm xmlns:a="http://schemas.openxmlformats.org/drawingml/2006/main">
+            <a:off x="9182100" y="3638550"/>
+            <a:ext cx="1790700" cy="457200"/>
+          </a:xfrm>
+          <a:prstGeom xmlns:a="http://schemas.openxmlformats.org/drawingml/2006/main" prst="rect">
+            <a:avLst/>
+          </a:prstGeom>
+          <a:noFill xmlns:a="http://schemas.openxmlformats.org/drawingml/2006/main"/>
+          <a:ln xmlns:a="http://schemas.openxmlformats.org/drawingml/2006/main" w="0">
+            <a:noFill/>
+            <a:prstDash val="solid"/>
+          </a:ln>
+        </p:spPr>
+        <p:txBody>
+          <a:bodyPr xmlns:a="http://schemas.openxmlformats.org/drawingml/2006/main" anchor="t"/>
+          <a:lstStyle xmlns:a="http://schemas.openxmlformats.org/drawingml/2006/main"/>
+          <a:p xmlns:a="http://schemas.openxmlformats.org/drawingml/2006/main">
+            <a:pPr algn="l">
+              <a:defRPr sz="1275" b="0">
+                <a:solidFill>
+                  <a:srgbClr val="10201A"/>
+                </a:solidFill>
+              </a:defRPr>
+            </a:pPr>
+            <a:r>
+              <a:rPr sz="1275" b="0">
+                <a:solidFill>
+                  <a:srgbClr val="10201A"/>
+                </a:solidFill>
+              </a:rPr>
+              <a:t>扩展为 Anker 健康穿戴新品类</a:t>
+            </a:r>
+          </a:p>
+        </p:txBody>
+      </p:sp>
+      <p:sp>
+        <p:nvSpPr>
+          <p:cNvPr id="27" name="">
+            <a:extLst xmlns:a="http://schemas.openxmlformats.org/drawingml/2006/main">
+              <a:ext uri="{FF2B5EF4-FFF2-40B4-BE49-F238E27FC236}">
+                <a16:creationId xmlns:a16="http://schemas.microsoft.com/office/drawing/2014/main" id="{3FD23B41-9381-4249-BD6B-BA2EE276FE46}"/>
+              </a:ext>
+            </a:extLst>
+          </p:cNvPr>
+          <p:cNvSpPr>
+            <a:spLocks xmlns:a="http://schemas.openxmlformats.org/drawingml/2006/main" noGrp="1"/>
+          </p:cNvSpPr>
+          <p:nvPr/>
+        </p:nvSpPr>
+        <p:spPr>
+          <a:xfrm xmlns:a="http://schemas.openxmlformats.org/drawingml/2006/main">
+            <a:off x="1143000" y="4953000"/>
+            <a:ext cx="9906000" cy="361950"/>
+          </a:xfrm>
+          <a:prstGeom xmlns:a="http://schemas.openxmlformats.org/drawingml/2006/main" prst="rect">
+            <a:avLst/>
+          </a:prstGeom>
+          <a:noFill xmlns:a="http://schemas.openxmlformats.org/drawingml/2006/main"/>
+          <a:ln xmlns:a="http://schemas.openxmlformats.org/drawingml/2006/main" w="0">
+            <a:noFill/>
+            <a:prstDash val="solid"/>
+          </a:ln>
+        </p:spPr>
+        <p:txBody>
+          <a:bodyPr xmlns:a="http://schemas.openxmlformats.org/drawingml/2006/main" anchor="t"/>
+          <a:lstStyle xmlns:a="http://schemas.openxmlformats.org/drawingml/2006/main"/>
+          <a:p xmlns:a="http://schemas.openxmlformats.org/drawingml/2006/main">
+            <a:pPr algn="ctr">
+              <a:defRPr sz="2025" b="1">
+                <a:solidFill>
+                  <a:srgbClr val="38A169"/>
+                </a:solidFill>
+              </a:defRPr>
+            </a:pPr>
+            <a:r>
+              <a:rPr sz="2025" b="1">
+                <a:solidFill>
+                  <a:srgbClr val="38A169"/>
+                </a:solidFill>
+              </a:rPr>
+              <a:t>主线始终不变：夜间声音 -&gt; 身体信号理解 -&gt; 晨间行动建议。</a:t>
+            </a:r>
+          </a:p>
+        </p:txBody>
+      </p:sp>
+      <p:sp>
+        <p:nvSpPr>
+          <p:cNvPr id="28" name="">
+            <a:extLst xmlns:a="http://schemas.openxmlformats.org/drawingml/2006/main">
+              <a:ext uri="{FF2B5EF4-FFF2-40B4-BE49-F238E27FC236}">
+                <a16:creationId xmlns:a16="http://schemas.microsoft.com/office/drawing/2014/main" id="{048C11B0-FAC0-4882-9953-B3726ADAC901}"/>
+              </a:ext>
+            </a:extLst>
+          </p:cNvPr>
+          <p:cNvSpPr>
+            <a:spLocks xmlns:a="http://schemas.openxmlformats.org/drawingml/2006/main" noGrp="1"/>
+          </p:cNvSpPr>
+          <p:nvPr/>
+        </p:nvSpPr>
+        <p:spPr>
+          <a:xfrm xmlns:a="http://schemas.openxmlformats.org/drawingml/2006/main">
+            <a:off x="666750" y="6457950"/>
+            <a:ext cx="2476500" cy="209550"/>
+          </a:xfrm>
+          <a:prstGeom xmlns:a="http://schemas.openxmlformats.org/drawingml/2006/main" prst="rect">
+            <a:avLst/>
+          </a:prstGeom>
+          <a:noFill xmlns:a="http://schemas.openxmlformats.org/drawingml/2006/main"/>
+          <a:ln xmlns:a="http://schemas.openxmlformats.org/drawingml/2006/main" w="0">
+            <a:noFill/>
+            <a:prstDash val="solid"/>
+          </a:ln>
+        </p:spPr>
+        <p:txBody>
+          <a:bodyPr xmlns:a="http://schemas.openxmlformats.org/drawingml/2006/main" anchor="t"/>
+          <a:lstStyle xmlns:a="http://schemas.openxmlformats.org/drawingml/2006/main"/>
+          <a:p xmlns:a="http://schemas.openxmlformats.org/drawingml/2006/main">
+            <a:pPr algn="l">
+              <a:defRPr sz="975" b="0">
+                <a:solidFill>
+                  <a:srgbClr val="587068"/>
+                </a:solidFill>
+              </a:defRPr>
+            </a:pPr>
+            <a:r>
+              <a:rPr sz="975" b="0">
+                <a:solidFill>
+                  <a:srgbClr val="587068"/>
+                </a:solidFill>
+              </a:rPr>
+              <a:t>anker-SenseLoop 观息</a:t>
+            </a:r>
+          </a:p>
+        </p:txBody>
+      </p:sp>
+      <p:sp>
+        <p:nvSpPr>
+          <p:cNvPr id="29" name="">
+            <a:extLst xmlns:a="http://schemas.openxmlformats.org/drawingml/2006/main">
+              <a:ext uri="{FF2B5EF4-FFF2-40B4-BE49-F238E27FC236}">
+                <a16:creationId xmlns:a16="http://schemas.microsoft.com/office/drawing/2014/main" id="{17736981-612C-445E-B36D-928E043A1076}"/>
+              </a:ext>
+            </a:extLst>
+          </p:cNvPr>
+          <p:cNvSpPr>
+            <a:spLocks xmlns:a="http://schemas.openxmlformats.org/drawingml/2006/main" noGrp="1"/>
+          </p:cNvSpPr>
+          <p:nvPr/>
+        </p:nvSpPr>
+        <p:spPr>
+          <a:xfrm xmlns:a="http://schemas.openxmlformats.org/drawingml/2006/main">
+            <a:off x="11125200" y="6457950"/>
+            <a:ext cx="419100" cy="209550"/>
+          </a:xfrm>
+          <a:prstGeom xmlns:a="http://schemas.openxmlformats.org/drawingml/2006/main" prst="rect">
+            <a:avLst/>
+          </a:prstGeom>
+          <a:noFill xmlns:a="http://schemas.openxmlformats.org/drawingml/2006/main"/>
+          <a:ln xmlns:a="http://schemas.openxmlformats.org/drawingml/2006/main" w="0">
+            <a:noFill/>
+            <a:prstDash val="solid"/>
+          </a:ln>
+        </p:spPr>
+        <p:txBody>
+          <a:bodyPr xmlns:a="http://schemas.openxmlformats.org/drawingml/2006/main" anchor="t"/>
+          <a:lstStyle xmlns:a="http://schemas.openxmlformats.org/drawingml/2006/main"/>
+          <a:p xmlns:a="http://schemas.openxmlformats.org/drawingml/2006/main">
+            <a:pPr algn="r">
+              <a:defRPr sz="975" b="0">
+                <a:solidFill>
+                  <a:srgbClr val="587068"/>
+                </a:solidFill>
+              </a:defRPr>
+            </a:pPr>
+            <a:r>
+              <a:rPr sz="975" b="0">
+                <a:solidFill>
+                  <a:srgbClr val="587068"/>
+                </a:solidFill>
+              </a:rPr>
+              <a:t>10</a:t>
+            </a:r>
+          </a:p>
+        </p:txBody>
+      </p:sp>
+    </p:spTree>
+    <p:extLst>
+      <p:ext uri="{BB962C8B-B14F-4D97-AF65-F5344CB8AC3E}">
+        <p14:creationId xmlns:p14="http://schemas.microsoft.com/office/powerpoint/2010/main" val="505847042"/>
+      </p:ext>
+    </p:extLst>
+  </p:cSld>
+</p:sld>
+</file>
+
+<file path=ppt/slides/slide11.xml><?xml version="1.0" encoding="utf-8"?>
 <p:sld xmlns:p="http://schemas.openxmlformats.org/presentationml/2006/main">
   <p:cSld>
     <p:bg>
@@ -2597,7 +4015,7 @@
           <p:cNvPr id="1" name="">
             <a:extLst xmlns:a="http://schemas.openxmlformats.org/drawingml/2006/main">
               <a:ext uri="{FF2B5EF4-FFF2-40B4-BE49-F238E27FC236}">
-                <a16:creationId xmlns:a16="http://schemas.microsoft.com/office/drawing/2014/main" id="{D846AA4E-E3B7-461F-8309-999C4A42E9D6}"/>
+                <a16:creationId xmlns:a16="http://schemas.microsoft.com/office/drawing/2014/main" id="{EC66CC93-F832-4F3F-A10F-E3F83756736E}"/>
               </a:ext>
             </a:extLst>
           </p:cNvPr>
@@ -2647,7 +4065,7 @@
           <p:cNvPr id="2" name="">
             <a:extLst xmlns:a="http://schemas.openxmlformats.org/drawingml/2006/main">
               <a:ext uri="{FF2B5EF4-FFF2-40B4-BE49-F238E27FC236}">
-                <a16:creationId xmlns:a16="http://schemas.microsoft.com/office/drawing/2014/main" id="{9D1902E3-087E-4394-91ED-79011A8AC073}"/>
+                <a16:creationId xmlns:a16="http://schemas.microsoft.com/office/drawing/2014/main" id="{E51AD3C2-D958-44F7-803A-5A0FC9F60FA9}"/>
               </a:ext>
             </a:extLst>
           </p:cNvPr>
@@ -2697,7 +4115,7 @@
           <p:cNvPr id="3" name="">
             <a:extLst xmlns:a="http://schemas.openxmlformats.org/drawingml/2006/main">
               <a:ext uri="{FF2B5EF4-FFF2-40B4-BE49-F238E27FC236}">
-                <a16:creationId xmlns:a16="http://schemas.microsoft.com/office/drawing/2014/main" id="{A32A466C-E24A-44FB-AF9F-7218923F8E15}"/>
+                <a16:creationId xmlns:a16="http://schemas.microsoft.com/office/drawing/2014/main" id="{104F4680-7CE3-49EE-945A-E94C8B3A1335}"/>
               </a:ext>
             </a:extLst>
           </p:cNvPr>
@@ -2730,7 +4148,7 @@
           <p:cNvPr id="4" name="">
             <a:extLst xmlns:a="http://schemas.openxmlformats.org/drawingml/2006/main">
               <a:ext uri="{FF2B5EF4-FFF2-40B4-BE49-F238E27FC236}">
-                <a16:creationId xmlns:a16="http://schemas.microsoft.com/office/drawing/2014/main" id="{B53E562A-626E-4642-9FD6-E2E03F68EB04}"/>
+                <a16:creationId xmlns:a16="http://schemas.microsoft.com/office/drawing/2014/main" id="{94E5788C-F7E3-490E-9F95-48E902F4C2EB}"/>
               </a:ext>
             </a:extLst>
           </p:cNvPr>
@@ -2765,7 +4183,7 @@
           <p:cNvPr id="5" name="">
             <a:extLst xmlns:a="http://schemas.openxmlformats.org/drawingml/2006/main">
               <a:ext uri="{FF2B5EF4-FFF2-40B4-BE49-F238E27FC236}">
-                <a16:creationId xmlns:a16="http://schemas.microsoft.com/office/drawing/2014/main" id="{7D669DE3-03EB-42FF-AD33-88686F0C2D7A}"/>
+                <a16:creationId xmlns:a16="http://schemas.microsoft.com/office/drawing/2014/main" id="{9499BD60-47DC-4A5F-87CA-03EC46BE4CE6}"/>
               </a:ext>
             </a:extLst>
           </p:cNvPr>
@@ -2815,7 +4233,7 @@
           <p:cNvPr id="6" name="">
             <a:extLst xmlns:a="http://schemas.openxmlformats.org/drawingml/2006/main">
               <a:ext uri="{FF2B5EF4-FFF2-40B4-BE49-F238E27FC236}">
-                <a16:creationId xmlns:a16="http://schemas.microsoft.com/office/drawing/2014/main" id="{AE2D21D4-AFFB-441F-B9CC-94487AAE0438}"/>
+                <a16:creationId xmlns:a16="http://schemas.microsoft.com/office/drawing/2014/main" id="{3A2E9981-88C3-4437-BF3D-8EAFB0031975}"/>
               </a:ext>
             </a:extLst>
           </p:cNvPr>
@@ -2865,7 +4283,7 @@
           <p:cNvPr id="7" name="">
             <a:extLst xmlns:a="http://schemas.openxmlformats.org/drawingml/2006/main">
               <a:ext uri="{FF2B5EF4-FFF2-40B4-BE49-F238E27FC236}">
-                <a16:creationId xmlns:a16="http://schemas.microsoft.com/office/drawing/2014/main" id="{72B20F1E-5972-4990-A7B2-53A058B413A9}"/>
+                <a16:creationId xmlns:a16="http://schemas.microsoft.com/office/drawing/2014/main" id="{C714FBE8-F7F9-4843-9FAD-C9E399544F13}"/>
               </a:ext>
             </a:extLst>
           </p:cNvPr>
@@ -2900,7 +4318,7 @@
           <p:cNvPr id="8" name="">
             <a:extLst xmlns:a="http://schemas.openxmlformats.org/drawingml/2006/main">
               <a:ext uri="{FF2B5EF4-FFF2-40B4-BE49-F238E27FC236}">
-                <a16:creationId xmlns:a16="http://schemas.microsoft.com/office/drawing/2014/main" id="{8D789C32-6343-4C92-BA90-CF56E07FAA03}"/>
+                <a16:creationId xmlns:a16="http://schemas.microsoft.com/office/drawing/2014/main" id="{97F43A36-7964-4C56-BF5A-3C1C7905F3B3}"/>
               </a:ext>
             </a:extLst>
           </p:cNvPr>
@@ -2950,7 +4368,7 @@
           <p:cNvPr id="9" name="">
             <a:extLst xmlns:a="http://schemas.openxmlformats.org/drawingml/2006/main">
               <a:ext uri="{FF2B5EF4-FFF2-40B4-BE49-F238E27FC236}">
-                <a16:creationId xmlns:a16="http://schemas.microsoft.com/office/drawing/2014/main" id="{7BD30B92-6128-498D-8C49-DAE4D5F6EBB0}"/>
+                <a16:creationId xmlns:a16="http://schemas.microsoft.com/office/drawing/2014/main" id="{28D45933-96B7-45D2-B612-4D61B354A213}"/>
               </a:ext>
             </a:extLst>
           </p:cNvPr>
@@ -3000,7 +4418,7 @@
           <p:cNvPr id="10" name="">
             <a:extLst xmlns:a="http://schemas.openxmlformats.org/drawingml/2006/main">
               <a:ext uri="{FF2B5EF4-FFF2-40B4-BE49-F238E27FC236}">
-                <a16:creationId xmlns:a16="http://schemas.microsoft.com/office/drawing/2014/main" id="{C063237B-CB47-464B-BB43-C14C312B96DC}"/>
+                <a16:creationId xmlns:a16="http://schemas.microsoft.com/office/drawing/2014/main" id="{07407EBA-04A9-4464-B3B1-0146C332D459}"/>
               </a:ext>
             </a:extLst>
           </p:cNvPr>
@@ -3035,7 +4453,7 @@
           <p:cNvPr id="11" name="">
             <a:extLst xmlns:a="http://schemas.openxmlformats.org/drawingml/2006/main">
               <a:ext uri="{FF2B5EF4-FFF2-40B4-BE49-F238E27FC236}">
-                <a16:creationId xmlns:a16="http://schemas.microsoft.com/office/drawing/2014/main" id="{3C15F9DB-05B1-45CD-BF52-14A6A3CA9016}"/>
+                <a16:creationId xmlns:a16="http://schemas.microsoft.com/office/drawing/2014/main" id="{A2408975-17C7-4DEB-A829-FFAAD1AA29B2}"/>
               </a:ext>
             </a:extLst>
           </p:cNvPr>
@@ -3085,7 +4503,7 @@
           <p:cNvPr id="12" name="">
             <a:extLst xmlns:a="http://schemas.openxmlformats.org/drawingml/2006/main">
               <a:ext uri="{FF2B5EF4-FFF2-40B4-BE49-F238E27FC236}">
-                <a16:creationId xmlns:a16="http://schemas.microsoft.com/office/drawing/2014/main" id="{509A5C11-3A0C-4B50-B78C-A783446BF794}"/>
+                <a16:creationId xmlns:a16="http://schemas.microsoft.com/office/drawing/2014/main" id="{D0CAEB66-5B48-4D66-9E3E-33633E1F8852}"/>
               </a:ext>
             </a:extLst>
           </p:cNvPr>
@@ -3135,7 +4553,7 @@
           <p:cNvPr id="13" name="">
             <a:extLst xmlns:a="http://schemas.openxmlformats.org/drawingml/2006/main">
               <a:ext uri="{FF2B5EF4-FFF2-40B4-BE49-F238E27FC236}">
-                <a16:creationId xmlns:a16="http://schemas.microsoft.com/office/drawing/2014/main" id="{A8FEF3C5-F9D4-4336-B36C-E68A04B932F7}"/>
+                <a16:creationId xmlns:a16="http://schemas.microsoft.com/office/drawing/2014/main" id="{99611C38-3E2B-452F-98BB-2ACDFEF504F2}"/>
               </a:ext>
             </a:extLst>
           </p:cNvPr>
@@ -3174,7 +4592,7 @@
           <p:nvPr/>
         </p:nvPicPr>
         <p:blipFill>
-          <a:blip xmlns:r="http://schemas.openxmlformats.org/officeDocument/2006/relationships" xmlns:a="http://schemas.openxmlformats.org/drawingml/2006/main" r:embed="R1a2d43c68c9c483c"/>
+          <a:blip xmlns:r="http://schemas.openxmlformats.org/officeDocument/2006/relationships" xmlns:a="http://schemas.openxmlformats.org/drawingml/2006/main" r:embed="R8f1c52235fba44ee"/>
           <a:stretch xmlns:a="http://schemas.openxmlformats.org/drawingml/2006/main"/>
         </p:blipFill>
         <p:spPr>
@@ -3192,7 +4610,7 @@
           <p:cNvPr id="15" name="">
             <a:extLst xmlns:a="http://schemas.openxmlformats.org/drawingml/2006/main">
               <a:ext uri="{FF2B5EF4-FFF2-40B4-BE49-F238E27FC236}">
-                <a16:creationId xmlns:a16="http://schemas.microsoft.com/office/drawing/2014/main" id="{08080B94-572D-4E35-906B-164A50471E71}"/>
+                <a16:creationId xmlns:a16="http://schemas.microsoft.com/office/drawing/2014/main" id="{5755C081-D2D8-4DB6-AF58-D84B226FC1E7}"/>
               </a:ext>
             </a:extLst>
           </p:cNvPr>
@@ -3242,7 +4660,7 @@
           <p:cNvPr id="16" name="">
             <a:extLst xmlns:a="http://schemas.openxmlformats.org/drawingml/2006/main">
               <a:ext uri="{FF2B5EF4-FFF2-40B4-BE49-F238E27FC236}">
-                <a16:creationId xmlns:a16="http://schemas.microsoft.com/office/drawing/2014/main" id="{8A4645A7-125A-4770-9C76-8BB0F0C85C73}"/>
+                <a16:creationId xmlns:a16="http://schemas.microsoft.com/office/drawing/2014/main" id="{D9FF5FA4-6D0E-4D9A-B49F-2C196183C53F}"/>
               </a:ext>
             </a:extLst>
           </p:cNvPr>
@@ -3292,7 +4710,7 @@
           <p:cNvPr id="17" name="">
             <a:extLst xmlns:a="http://schemas.openxmlformats.org/drawingml/2006/main">
               <a:ext uri="{FF2B5EF4-FFF2-40B4-BE49-F238E27FC236}">
-                <a16:creationId xmlns:a16="http://schemas.microsoft.com/office/drawing/2014/main" id="{ED685374-0C6E-41FB-96E7-BF69662D9F72}"/>
+                <a16:creationId xmlns:a16="http://schemas.microsoft.com/office/drawing/2014/main" id="{0950F6C2-24A8-418B-8DF3-3902C6E65C0F}"/>
               </a:ext>
             </a:extLst>
           </p:cNvPr>
@@ -3342,7 +4760,7 @@
           <p:cNvPr id="18" name="">
             <a:extLst xmlns:a="http://schemas.openxmlformats.org/drawingml/2006/main">
               <a:ext uri="{FF2B5EF4-FFF2-40B4-BE49-F238E27FC236}">
-                <a16:creationId xmlns:a16="http://schemas.microsoft.com/office/drawing/2014/main" id="{CF5D74CD-CABD-4408-B238-E71DF9F2E3C5}"/>
+                <a16:creationId xmlns:a16="http://schemas.microsoft.com/office/drawing/2014/main" id="{2E3CB9A3-39B0-469C-B9AF-744BA39F8399}"/>
               </a:ext>
             </a:extLst>
           </p:cNvPr>
@@ -3392,7 +4810,7 @@
           <p:cNvPr id="19" name="">
             <a:extLst xmlns:a="http://schemas.openxmlformats.org/drawingml/2006/main">
               <a:ext uri="{FF2B5EF4-FFF2-40B4-BE49-F238E27FC236}">
-                <a16:creationId xmlns:a16="http://schemas.microsoft.com/office/drawing/2014/main" id="{BE744242-2A1A-40ED-B8F5-0991090E99B1}"/>
+                <a16:creationId xmlns:a16="http://schemas.microsoft.com/office/drawing/2014/main" id="{5DC38B14-70FE-4E1C-9232-DE7DF5B7C53A}"/>
               </a:ext>
             </a:extLst>
           </p:cNvPr>
@@ -3432,7 +4850,7 @@
                   <a:srgbClr val="587068"/>
                 </a:solidFill>
               </a:rPr>
-              <a:t>10</a:t>
+              <a:t>11</a:t>
             </a:r>
           </a:p>
         </p:txBody>
@@ -3440,7 +4858,7 @@
     </p:spTree>
     <p:extLst>
       <p:ext uri="{BB962C8B-B14F-4D97-AF65-F5344CB8AC3E}">
-        <p14:creationId xmlns:p14="http://schemas.microsoft.com/office/powerpoint/2010/main" val="221256886"/>
+        <p14:creationId xmlns:p14="http://schemas.microsoft.com/office/powerpoint/2010/main" val="1651609865"/>
       </p:ext>
     </p:extLst>
   </p:cSld>
@@ -3471,7 +4889,7 @@
           <p:cNvPr id="1" name="">
             <a:extLst xmlns:a="http://schemas.openxmlformats.org/drawingml/2006/main">
               <a:ext uri="{FF2B5EF4-FFF2-40B4-BE49-F238E27FC236}">
-                <a16:creationId xmlns:a16="http://schemas.microsoft.com/office/drawing/2014/main" id="{628A81FE-CFB6-4264-A7AD-743DFBF770F5}"/>
+                <a16:creationId xmlns:a16="http://schemas.microsoft.com/office/drawing/2014/main" id="{C2BB4B1F-1F23-41B3-A540-C129620591A2}"/>
               </a:ext>
             </a:extLst>
           </p:cNvPr>
@@ -3521,7 +4939,7 @@
           <p:cNvPr id="2" name="">
             <a:extLst xmlns:a="http://schemas.openxmlformats.org/drawingml/2006/main">
               <a:ext uri="{FF2B5EF4-FFF2-40B4-BE49-F238E27FC236}">
-                <a16:creationId xmlns:a16="http://schemas.microsoft.com/office/drawing/2014/main" id="{6FC4546E-6D5C-4B42-9FB6-F38254FF6F1F}"/>
+                <a16:creationId xmlns:a16="http://schemas.microsoft.com/office/drawing/2014/main" id="{94ECC985-D4AB-4CA0-83AE-7BFE6FFC295E}"/>
               </a:ext>
             </a:extLst>
           </p:cNvPr>
@@ -3571,7 +4989,7 @@
           <p:cNvPr id="3" name="">
             <a:extLst xmlns:a="http://schemas.openxmlformats.org/drawingml/2006/main">
               <a:ext uri="{FF2B5EF4-FFF2-40B4-BE49-F238E27FC236}">
-                <a16:creationId xmlns:a16="http://schemas.microsoft.com/office/drawing/2014/main" id="{89DFCAD7-4FCE-477D-BD8C-32446C888EF7}"/>
+                <a16:creationId xmlns:a16="http://schemas.microsoft.com/office/drawing/2014/main" id="{3B2A37A0-D52B-43C7-9C65-16D1FD6CE980}"/>
               </a:ext>
             </a:extLst>
           </p:cNvPr>
@@ -3604,7 +5022,7 @@
           <p:cNvPr id="4" name="">
             <a:extLst xmlns:a="http://schemas.openxmlformats.org/drawingml/2006/main">
               <a:ext uri="{FF2B5EF4-FFF2-40B4-BE49-F238E27FC236}">
-                <a16:creationId xmlns:a16="http://schemas.microsoft.com/office/drawing/2014/main" id="{46316262-4D84-4DAC-BAC4-C3D928C6CD1F}"/>
+                <a16:creationId xmlns:a16="http://schemas.microsoft.com/office/drawing/2014/main" id="{1677C260-0DCB-4D74-A64E-F4AC42978DE9}"/>
               </a:ext>
             </a:extLst>
           </p:cNvPr>
@@ -3639,7 +5057,7 @@
           <p:cNvPr id="5" name="">
             <a:extLst xmlns:a="http://schemas.openxmlformats.org/drawingml/2006/main">
               <a:ext uri="{FF2B5EF4-FFF2-40B4-BE49-F238E27FC236}">
-                <a16:creationId xmlns:a16="http://schemas.microsoft.com/office/drawing/2014/main" id="{CFF857B7-C2B3-42D7-8983-A7CE76ACE521}"/>
+                <a16:creationId xmlns:a16="http://schemas.microsoft.com/office/drawing/2014/main" id="{C0A1B4E4-9AE5-4077-994A-72A31E196568}"/>
               </a:ext>
             </a:extLst>
           </p:cNvPr>
@@ -3689,7 +5107,7 @@
           <p:cNvPr id="6" name="">
             <a:extLst xmlns:a="http://schemas.openxmlformats.org/drawingml/2006/main">
               <a:ext uri="{FF2B5EF4-FFF2-40B4-BE49-F238E27FC236}">
-                <a16:creationId xmlns:a16="http://schemas.microsoft.com/office/drawing/2014/main" id="{35F84FD8-D6EC-4835-ABFE-31E0A19E2CCE}"/>
+                <a16:creationId xmlns:a16="http://schemas.microsoft.com/office/drawing/2014/main" id="{C40CD9F4-2579-400F-84EE-36D5C792DED8}"/>
               </a:ext>
             </a:extLst>
           </p:cNvPr>
@@ -3722,7 +5140,7 @@
           <p:cNvPr id="7" name="">
             <a:extLst xmlns:a="http://schemas.openxmlformats.org/drawingml/2006/main">
               <a:ext uri="{FF2B5EF4-FFF2-40B4-BE49-F238E27FC236}">
-                <a16:creationId xmlns:a16="http://schemas.microsoft.com/office/drawing/2014/main" id="{D9157D7E-5F9F-4690-8474-0CB68030FD1D}"/>
+                <a16:creationId xmlns:a16="http://schemas.microsoft.com/office/drawing/2014/main" id="{A4A45AF2-018D-46C4-A940-6D6F8D4A6F77}"/>
               </a:ext>
             </a:extLst>
           </p:cNvPr>
@@ -3772,7 +5190,7 @@
           <p:cNvPr id="8" name="">
             <a:extLst xmlns:a="http://schemas.openxmlformats.org/drawingml/2006/main">
               <a:ext uri="{FF2B5EF4-FFF2-40B4-BE49-F238E27FC236}">
-                <a16:creationId xmlns:a16="http://schemas.microsoft.com/office/drawing/2014/main" id="{8DF015DB-83ED-42E2-AE1C-B257B1A797A2}"/>
+                <a16:creationId xmlns:a16="http://schemas.microsoft.com/office/drawing/2014/main" id="{D0464A8A-D927-4B1F-A72E-4BBF765E6365}"/>
               </a:ext>
             </a:extLst>
           </p:cNvPr>
@@ -3805,7 +5223,7 @@
           <p:cNvPr id="9" name="">
             <a:extLst xmlns:a="http://schemas.openxmlformats.org/drawingml/2006/main">
               <a:ext uri="{FF2B5EF4-FFF2-40B4-BE49-F238E27FC236}">
-                <a16:creationId xmlns:a16="http://schemas.microsoft.com/office/drawing/2014/main" id="{406A66AD-EF29-4324-BB6F-FE96E2FAD2F2}"/>
+                <a16:creationId xmlns:a16="http://schemas.microsoft.com/office/drawing/2014/main" id="{FEED733A-7E43-4E82-B701-F82AF816F3D2}"/>
               </a:ext>
             </a:extLst>
           </p:cNvPr>
@@ -3855,7 +5273,7 @@
           <p:cNvPr id="10" name="">
             <a:extLst xmlns:a="http://schemas.openxmlformats.org/drawingml/2006/main">
               <a:ext uri="{FF2B5EF4-FFF2-40B4-BE49-F238E27FC236}">
-                <a16:creationId xmlns:a16="http://schemas.microsoft.com/office/drawing/2014/main" id="{26C799CC-BE8B-4FB1-AAA4-D07101F4EAEF}"/>
+                <a16:creationId xmlns:a16="http://schemas.microsoft.com/office/drawing/2014/main" id="{499372B2-BAD2-4774-AECE-CB0D5FA33598}"/>
               </a:ext>
             </a:extLst>
           </p:cNvPr>
@@ -3890,7 +5308,7 @@
           <p:cNvPr id="11" name="">
             <a:extLst xmlns:a="http://schemas.openxmlformats.org/drawingml/2006/main">
               <a:ext uri="{FF2B5EF4-FFF2-40B4-BE49-F238E27FC236}">
-                <a16:creationId xmlns:a16="http://schemas.microsoft.com/office/drawing/2014/main" id="{D5DCA926-0F40-4125-83B5-A88CCB5C8C2A}"/>
+                <a16:creationId xmlns:a16="http://schemas.microsoft.com/office/drawing/2014/main" id="{94203E51-15FD-4597-972E-DB399E3599DD}"/>
               </a:ext>
             </a:extLst>
           </p:cNvPr>
@@ -3940,7 +5358,7 @@
           <p:cNvPr id="12" name="">
             <a:extLst xmlns:a="http://schemas.openxmlformats.org/drawingml/2006/main">
               <a:ext uri="{FF2B5EF4-FFF2-40B4-BE49-F238E27FC236}">
-                <a16:creationId xmlns:a16="http://schemas.microsoft.com/office/drawing/2014/main" id="{F4F4A577-D14B-4DEC-8F93-CE47B3E477A5}"/>
+                <a16:creationId xmlns:a16="http://schemas.microsoft.com/office/drawing/2014/main" id="{1FE2035E-0255-48E1-8828-FEAAA5C788B7}"/>
               </a:ext>
             </a:extLst>
           </p:cNvPr>
@@ -3973,7 +5391,7 @@
           <p:cNvPr id="13" name="">
             <a:extLst xmlns:a="http://schemas.openxmlformats.org/drawingml/2006/main">
               <a:ext uri="{FF2B5EF4-FFF2-40B4-BE49-F238E27FC236}">
-                <a16:creationId xmlns:a16="http://schemas.microsoft.com/office/drawing/2014/main" id="{96E4E645-FB56-4B99-B781-B1FE02EB738C}"/>
+                <a16:creationId xmlns:a16="http://schemas.microsoft.com/office/drawing/2014/main" id="{9F6AEE8C-F878-460A-AD4D-6F31BA7C34F9}"/>
               </a:ext>
             </a:extLst>
           </p:cNvPr>
@@ -4023,7 +5441,7 @@
           <p:cNvPr id="14" name="">
             <a:extLst xmlns:a="http://schemas.openxmlformats.org/drawingml/2006/main">
               <a:ext uri="{FF2B5EF4-FFF2-40B4-BE49-F238E27FC236}">
-                <a16:creationId xmlns:a16="http://schemas.microsoft.com/office/drawing/2014/main" id="{8EB5DCF4-22AB-4B9E-81E1-5A37533A8A6D}"/>
+                <a16:creationId xmlns:a16="http://schemas.microsoft.com/office/drawing/2014/main" id="{DDC7E97A-EE85-4140-B1D2-94C294E9EA21}"/>
               </a:ext>
             </a:extLst>
           </p:cNvPr>
@@ -4056,7 +5474,7 @@
           <p:cNvPr id="15" name="">
             <a:extLst xmlns:a="http://schemas.openxmlformats.org/drawingml/2006/main">
               <a:ext uri="{FF2B5EF4-FFF2-40B4-BE49-F238E27FC236}">
-                <a16:creationId xmlns:a16="http://schemas.microsoft.com/office/drawing/2014/main" id="{3D108295-B7FA-497C-ABF1-2CB98F1B1040}"/>
+                <a16:creationId xmlns:a16="http://schemas.microsoft.com/office/drawing/2014/main" id="{C5A6E249-FDD8-425A-BFA0-94934A81AAFA}"/>
               </a:ext>
             </a:extLst>
           </p:cNvPr>
@@ -4106,7 +5524,7 @@
           <p:cNvPr id="16" name="">
             <a:extLst xmlns:a="http://schemas.openxmlformats.org/drawingml/2006/main">
               <a:ext uri="{FF2B5EF4-FFF2-40B4-BE49-F238E27FC236}">
-                <a16:creationId xmlns:a16="http://schemas.microsoft.com/office/drawing/2014/main" id="{0F789405-B06C-4238-865C-5924431E820E}"/>
+                <a16:creationId xmlns:a16="http://schemas.microsoft.com/office/drawing/2014/main" id="{E7B8778C-5DB6-46A8-BE79-ABDB022B8985}"/>
               </a:ext>
             </a:extLst>
           </p:cNvPr>
@@ -4141,7 +5559,7 @@
           <p:cNvPr id="17" name="">
             <a:extLst xmlns:a="http://schemas.openxmlformats.org/drawingml/2006/main">
               <a:ext uri="{FF2B5EF4-FFF2-40B4-BE49-F238E27FC236}">
-                <a16:creationId xmlns:a16="http://schemas.microsoft.com/office/drawing/2014/main" id="{50A72A16-BC96-47E8-A2B7-5D4FF477CFF9}"/>
+                <a16:creationId xmlns:a16="http://schemas.microsoft.com/office/drawing/2014/main" id="{1C09987B-B159-43C4-A868-AB074FF3CC6C}"/>
               </a:ext>
             </a:extLst>
           </p:cNvPr>
@@ -4191,7 +5609,7 @@
           <p:cNvPr id="18" name="">
             <a:extLst xmlns:a="http://schemas.openxmlformats.org/drawingml/2006/main">
               <a:ext uri="{FF2B5EF4-FFF2-40B4-BE49-F238E27FC236}">
-                <a16:creationId xmlns:a16="http://schemas.microsoft.com/office/drawing/2014/main" id="{EAC4E9A5-2659-4614-8EFE-9B9FC0E6BC83}"/>
+                <a16:creationId xmlns:a16="http://schemas.microsoft.com/office/drawing/2014/main" id="{62482839-CAA7-4C5A-9667-435F99EA657A}"/>
               </a:ext>
             </a:extLst>
           </p:cNvPr>
@@ -4224,7 +5642,7 @@
           <p:cNvPr id="19" name="">
             <a:extLst xmlns:a="http://schemas.openxmlformats.org/drawingml/2006/main">
               <a:ext uri="{FF2B5EF4-FFF2-40B4-BE49-F238E27FC236}">
-                <a16:creationId xmlns:a16="http://schemas.microsoft.com/office/drawing/2014/main" id="{864CAF2B-9C39-4DBC-ADB6-D5AC6F97AECE}"/>
+                <a16:creationId xmlns:a16="http://schemas.microsoft.com/office/drawing/2014/main" id="{EEF6B373-9786-42D3-9FBE-ACAEBC8D2C67}"/>
               </a:ext>
             </a:extLst>
           </p:cNvPr>
@@ -4274,7 +5692,7 @@
           <p:cNvPr id="20" name="">
             <a:extLst xmlns:a="http://schemas.openxmlformats.org/drawingml/2006/main">
               <a:ext uri="{FF2B5EF4-FFF2-40B4-BE49-F238E27FC236}">
-                <a16:creationId xmlns:a16="http://schemas.microsoft.com/office/drawing/2014/main" id="{754C0820-90E1-4260-B02F-EE8F1DDCDB58}"/>
+                <a16:creationId xmlns:a16="http://schemas.microsoft.com/office/drawing/2014/main" id="{B57E9952-B270-48CE-8031-B38F14026336}"/>
               </a:ext>
             </a:extLst>
           </p:cNvPr>
@@ -4307,7 +5725,7 @@
           <p:cNvPr id="21" name="">
             <a:extLst xmlns:a="http://schemas.openxmlformats.org/drawingml/2006/main">
               <a:ext uri="{FF2B5EF4-FFF2-40B4-BE49-F238E27FC236}">
-                <a16:creationId xmlns:a16="http://schemas.microsoft.com/office/drawing/2014/main" id="{4372567C-CB73-4FF4-A5BC-2915295FED75}"/>
+                <a16:creationId xmlns:a16="http://schemas.microsoft.com/office/drawing/2014/main" id="{FDE132B4-94A1-4F75-94B6-89D39C66A6C5}"/>
               </a:ext>
             </a:extLst>
           </p:cNvPr>
@@ -4357,7 +5775,7 @@
           <p:cNvPr id="22" name="">
             <a:extLst xmlns:a="http://schemas.openxmlformats.org/drawingml/2006/main">
               <a:ext uri="{FF2B5EF4-FFF2-40B4-BE49-F238E27FC236}">
-                <a16:creationId xmlns:a16="http://schemas.microsoft.com/office/drawing/2014/main" id="{5A30E9B9-848F-4CC0-8037-A5B2107D5FEC}"/>
+                <a16:creationId xmlns:a16="http://schemas.microsoft.com/office/drawing/2014/main" id="{4278D4F5-E15E-422E-AA94-A5892B3EDD5C}"/>
               </a:ext>
             </a:extLst>
           </p:cNvPr>
@@ -4407,7 +5825,7 @@
           <p:cNvPr id="23" name="">
             <a:extLst xmlns:a="http://schemas.openxmlformats.org/drawingml/2006/main">
               <a:ext uri="{FF2B5EF4-FFF2-40B4-BE49-F238E27FC236}">
-                <a16:creationId xmlns:a16="http://schemas.microsoft.com/office/drawing/2014/main" id="{ECF7593F-3421-4C47-9424-7D71B664B8C7}"/>
+                <a16:creationId xmlns:a16="http://schemas.microsoft.com/office/drawing/2014/main" id="{B16F37F9-C9AA-4D04-9F84-CB6B60B51EA5}"/>
               </a:ext>
             </a:extLst>
           </p:cNvPr>
@@ -4457,7 +5875,7 @@
           <p:cNvPr id="24" name="">
             <a:extLst xmlns:a="http://schemas.openxmlformats.org/drawingml/2006/main">
               <a:ext uri="{FF2B5EF4-FFF2-40B4-BE49-F238E27FC236}">
-                <a16:creationId xmlns:a16="http://schemas.microsoft.com/office/drawing/2014/main" id="{4A4EAD46-AA8D-4058-9DA3-043829718630}"/>
+                <a16:creationId xmlns:a16="http://schemas.microsoft.com/office/drawing/2014/main" id="{41ADF85F-36E7-4A89-BBE6-D9AE6A12F267}"/>
               </a:ext>
             </a:extLst>
           </p:cNvPr>
@@ -4505,7 +5923,7 @@
     </p:spTree>
     <p:extLst>
       <p:ext uri="{BB962C8B-B14F-4D97-AF65-F5344CB8AC3E}">
-        <p14:creationId xmlns:p14="http://schemas.microsoft.com/office/powerpoint/2010/main" val="933334391"/>
+        <p14:creationId xmlns:p14="http://schemas.microsoft.com/office/powerpoint/2010/main" val="1780616356"/>
       </p:ext>
     </p:extLst>
   </p:cSld>
@@ -4536,7 +5954,7 @@
           <p:cNvPr id="1" name="">
             <a:extLst xmlns:a="http://schemas.openxmlformats.org/drawingml/2006/main">
               <a:ext uri="{FF2B5EF4-FFF2-40B4-BE49-F238E27FC236}">
-                <a16:creationId xmlns:a16="http://schemas.microsoft.com/office/drawing/2014/main" id="{70EE6576-24A8-43E7-880A-40D8C1F54C2B}"/>
+                <a16:creationId xmlns:a16="http://schemas.microsoft.com/office/drawing/2014/main" id="{2A52E9F9-5BB4-4CC3-AB27-38706A6CB4EC}"/>
               </a:ext>
             </a:extLst>
           </p:cNvPr>
@@ -4586,7 +6004,7 @@
           <p:cNvPr id="2" name="">
             <a:extLst xmlns:a="http://schemas.openxmlformats.org/drawingml/2006/main">
               <a:ext uri="{FF2B5EF4-FFF2-40B4-BE49-F238E27FC236}">
-                <a16:creationId xmlns:a16="http://schemas.microsoft.com/office/drawing/2014/main" id="{125F1403-1685-4180-8F5F-025D580B9B16}"/>
+                <a16:creationId xmlns:a16="http://schemas.microsoft.com/office/drawing/2014/main" id="{91DEDC14-5C31-46E5-ADFC-4E9F510ECB06}"/>
               </a:ext>
             </a:extLst>
           </p:cNvPr>
@@ -4636,7 +6054,7 @@
           <p:cNvPr id="3" name="">
             <a:extLst xmlns:a="http://schemas.openxmlformats.org/drawingml/2006/main">
               <a:ext uri="{FF2B5EF4-FFF2-40B4-BE49-F238E27FC236}">
-                <a16:creationId xmlns:a16="http://schemas.microsoft.com/office/drawing/2014/main" id="{08944938-F010-4B4C-B1C3-8F96D244EA29}"/>
+                <a16:creationId xmlns:a16="http://schemas.microsoft.com/office/drawing/2014/main" id="{27CE941D-17E0-47F3-AFAD-AFCAF6DC00CE}"/>
               </a:ext>
             </a:extLst>
           </p:cNvPr>
@@ -4669,7 +6087,7 @@
           <p:cNvPr id="4" name="">
             <a:extLst xmlns:a="http://schemas.openxmlformats.org/drawingml/2006/main">
               <a:ext uri="{FF2B5EF4-FFF2-40B4-BE49-F238E27FC236}">
-                <a16:creationId xmlns:a16="http://schemas.microsoft.com/office/drawing/2014/main" id="{6DEA6003-D9BD-402E-9BC1-E32E11664EC3}"/>
+                <a16:creationId xmlns:a16="http://schemas.microsoft.com/office/drawing/2014/main" id="{F69E6CAB-1B5D-4D98-9DF5-0D9D68C4C723}"/>
               </a:ext>
             </a:extLst>
           </p:cNvPr>
@@ -4704,7 +6122,7 @@
           <p:cNvPr id="5" name="">
             <a:extLst xmlns:a="http://schemas.openxmlformats.org/drawingml/2006/main">
               <a:ext uri="{FF2B5EF4-FFF2-40B4-BE49-F238E27FC236}">
-                <a16:creationId xmlns:a16="http://schemas.microsoft.com/office/drawing/2014/main" id="{11608A20-56CA-43D7-B687-F5A5DDDDAD51}"/>
+                <a16:creationId xmlns:a16="http://schemas.microsoft.com/office/drawing/2014/main" id="{1AD75307-C200-4058-8A2B-E8C191A92E31}"/>
               </a:ext>
             </a:extLst>
           </p:cNvPr>
@@ -4754,7 +6172,7 @@
           <p:cNvPr id="6" name="">
             <a:extLst xmlns:a="http://schemas.openxmlformats.org/drawingml/2006/main">
               <a:ext uri="{FF2B5EF4-FFF2-40B4-BE49-F238E27FC236}">
-                <a16:creationId xmlns:a16="http://schemas.microsoft.com/office/drawing/2014/main" id="{31577B8E-3795-46B2-AD1C-5066AD31186C}"/>
+                <a16:creationId xmlns:a16="http://schemas.microsoft.com/office/drawing/2014/main" id="{05F556BD-768C-4294-987E-1E0B9CB3F096}"/>
               </a:ext>
             </a:extLst>
           </p:cNvPr>
@@ -4804,7 +6222,7 @@
           <p:cNvPr id="7" name="">
             <a:extLst xmlns:a="http://schemas.openxmlformats.org/drawingml/2006/main">
               <a:ext uri="{FF2B5EF4-FFF2-40B4-BE49-F238E27FC236}">
-                <a16:creationId xmlns:a16="http://schemas.microsoft.com/office/drawing/2014/main" id="{50F212E5-A7DE-47AD-B0FC-DF0E3A05E5E6}"/>
+                <a16:creationId xmlns:a16="http://schemas.microsoft.com/office/drawing/2014/main" id="{3A1B6943-6F21-4DA1-BC8B-D0BD16D08325}"/>
               </a:ext>
             </a:extLst>
           </p:cNvPr>
@@ -4837,7 +6255,7 @@
           <p:cNvPr id="8" name="">
             <a:extLst xmlns:a="http://schemas.openxmlformats.org/drawingml/2006/main">
               <a:ext uri="{FF2B5EF4-FFF2-40B4-BE49-F238E27FC236}">
-                <a16:creationId xmlns:a16="http://schemas.microsoft.com/office/drawing/2014/main" id="{C1602393-CB6E-41DB-9528-BF1A5CCBFBF4}"/>
+                <a16:creationId xmlns:a16="http://schemas.microsoft.com/office/drawing/2014/main" id="{998C0206-F583-40A5-81D3-0614BCBAC6FD}"/>
               </a:ext>
             </a:extLst>
           </p:cNvPr>
@@ -4872,7 +6290,7 @@
           <p:cNvPr id="9" name="">
             <a:extLst xmlns:a="http://schemas.openxmlformats.org/drawingml/2006/main">
               <a:ext uri="{FF2B5EF4-FFF2-40B4-BE49-F238E27FC236}">
-                <a16:creationId xmlns:a16="http://schemas.microsoft.com/office/drawing/2014/main" id="{8D4BAF55-73FC-46F8-B818-28B3233D9954}"/>
+                <a16:creationId xmlns:a16="http://schemas.microsoft.com/office/drawing/2014/main" id="{4BF5796B-F940-4CCC-93F9-553035669276}"/>
               </a:ext>
             </a:extLst>
           </p:cNvPr>
@@ -4922,7 +6340,7 @@
           <p:cNvPr id="10" name="">
             <a:extLst xmlns:a="http://schemas.openxmlformats.org/drawingml/2006/main">
               <a:ext uri="{FF2B5EF4-FFF2-40B4-BE49-F238E27FC236}">
-                <a16:creationId xmlns:a16="http://schemas.microsoft.com/office/drawing/2014/main" id="{89829871-F96E-4038-AD20-2B53DDEDCFC5}"/>
+                <a16:creationId xmlns:a16="http://schemas.microsoft.com/office/drawing/2014/main" id="{58861DBE-0799-443C-84D2-C6CD6327DEC7}"/>
               </a:ext>
             </a:extLst>
           </p:cNvPr>
@@ -4972,7 +6390,7 @@
           <p:cNvPr id="11" name="">
             <a:extLst xmlns:a="http://schemas.openxmlformats.org/drawingml/2006/main">
               <a:ext uri="{FF2B5EF4-FFF2-40B4-BE49-F238E27FC236}">
-                <a16:creationId xmlns:a16="http://schemas.microsoft.com/office/drawing/2014/main" id="{050D4608-A3FC-45F1-9C1D-4B9DAF12F30D}"/>
+                <a16:creationId xmlns:a16="http://schemas.microsoft.com/office/drawing/2014/main" id="{62D25BE0-6529-4E97-B016-E3C32156B026}"/>
               </a:ext>
             </a:extLst>
           </p:cNvPr>
@@ -5005,7 +6423,7 @@
           <p:cNvPr id="12" name="">
             <a:extLst xmlns:a="http://schemas.openxmlformats.org/drawingml/2006/main">
               <a:ext uri="{FF2B5EF4-FFF2-40B4-BE49-F238E27FC236}">
-                <a16:creationId xmlns:a16="http://schemas.microsoft.com/office/drawing/2014/main" id="{437C5811-CB74-4806-83C1-06A4FF0613D0}"/>
+                <a16:creationId xmlns:a16="http://schemas.microsoft.com/office/drawing/2014/main" id="{27B2762C-4427-4801-9E35-8F6EE8D8A3A5}"/>
               </a:ext>
             </a:extLst>
           </p:cNvPr>
@@ -5040,7 +6458,7 @@
           <p:cNvPr id="13" name="">
             <a:extLst xmlns:a="http://schemas.openxmlformats.org/drawingml/2006/main">
               <a:ext uri="{FF2B5EF4-FFF2-40B4-BE49-F238E27FC236}">
-                <a16:creationId xmlns:a16="http://schemas.microsoft.com/office/drawing/2014/main" id="{F683B8DD-1033-4FCE-A2C1-037286B970BD}"/>
+                <a16:creationId xmlns:a16="http://schemas.microsoft.com/office/drawing/2014/main" id="{0FD8003F-068E-4CC6-AC76-2BFE130423CE}"/>
               </a:ext>
             </a:extLst>
           </p:cNvPr>
@@ -5090,7 +6508,7 @@
           <p:cNvPr id="14" name="">
             <a:extLst xmlns:a="http://schemas.openxmlformats.org/drawingml/2006/main">
               <a:ext uri="{FF2B5EF4-FFF2-40B4-BE49-F238E27FC236}">
-                <a16:creationId xmlns:a16="http://schemas.microsoft.com/office/drawing/2014/main" id="{4866B3E4-9F15-479E-8C23-C4CF314E374E}"/>
+                <a16:creationId xmlns:a16="http://schemas.microsoft.com/office/drawing/2014/main" id="{A8393FEB-7B3F-427F-9BD5-305D97529E05}"/>
               </a:ext>
             </a:extLst>
           </p:cNvPr>
@@ -5140,7 +6558,7 @@
           <p:cNvPr id="15" name="">
             <a:extLst xmlns:a="http://schemas.openxmlformats.org/drawingml/2006/main">
               <a:ext uri="{FF2B5EF4-FFF2-40B4-BE49-F238E27FC236}">
-                <a16:creationId xmlns:a16="http://schemas.microsoft.com/office/drawing/2014/main" id="{25B2FAC1-8B36-41D6-B183-E1F4DD464F34}"/>
+                <a16:creationId xmlns:a16="http://schemas.microsoft.com/office/drawing/2014/main" id="{2862636A-EE5F-4F25-BF50-64F7AD6C22CA}"/>
               </a:ext>
             </a:extLst>
           </p:cNvPr>
@@ -5173,7 +6591,7 @@
           <p:cNvPr id="16" name="">
             <a:extLst xmlns:a="http://schemas.openxmlformats.org/drawingml/2006/main">
               <a:ext uri="{FF2B5EF4-FFF2-40B4-BE49-F238E27FC236}">
-                <a16:creationId xmlns:a16="http://schemas.microsoft.com/office/drawing/2014/main" id="{790CBA01-DC15-4B65-B2BA-7ED0EF253242}"/>
+                <a16:creationId xmlns:a16="http://schemas.microsoft.com/office/drawing/2014/main" id="{7A6DF5B8-185F-49FB-BFFB-7734F5708460}"/>
               </a:ext>
             </a:extLst>
           </p:cNvPr>
@@ -5208,7 +6626,7 @@
           <p:cNvPr id="17" name="">
             <a:extLst xmlns:a="http://schemas.openxmlformats.org/drawingml/2006/main">
               <a:ext uri="{FF2B5EF4-FFF2-40B4-BE49-F238E27FC236}">
-                <a16:creationId xmlns:a16="http://schemas.microsoft.com/office/drawing/2014/main" id="{8337A8F2-AEA8-44EA-96C8-E51E15B47EA9}"/>
+                <a16:creationId xmlns:a16="http://schemas.microsoft.com/office/drawing/2014/main" id="{FB26FCFD-AC59-4A7D-91F2-00D0716B420F}"/>
               </a:ext>
             </a:extLst>
           </p:cNvPr>
@@ -5258,7 +6676,7 @@
           <p:cNvPr id="18" name="">
             <a:extLst xmlns:a="http://schemas.openxmlformats.org/drawingml/2006/main">
               <a:ext uri="{FF2B5EF4-FFF2-40B4-BE49-F238E27FC236}">
-                <a16:creationId xmlns:a16="http://schemas.microsoft.com/office/drawing/2014/main" id="{746DF687-1652-4DF4-9962-C28E4952EB1C}"/>
+                <a16:creationId xmlns:a16="http://schemas.microsoft.com/office/drawing/2014/main" id="{75CECA3F-DEDB-49A0-8140-1EE05C48D787}"/>
               </a:ext>
             </a:extLst>
           </p:cNvPr>
@@ -5308,7 +6726,7 @@
           <p:cNvPr id="19" name="">
             <a:extLst xmlns:a="http://schemas.openxmlformats.org/drawingml/2006/main">
               <a:ext uri="{FF2B5EF4-FFF2-40B4-BE49-F238E27FC236}">
-                <a16:creationId xmlns:a16="http://schemas.microsoft.com/office/drawing/2014/main" id="{BC2178CD-9521-4BB8-B475-724DB5F179D9}"/>
+                <a16:creationId xmlns:a16="http://schemas.microsoft.com/office/drawing/2014/main" id="{D783D449-DB76-4F07-9CC7-E58FD5793560}"/>
               </a:ext>
             </a:extLst>
           </p:cNvPr>
@@ -5358,7 +6776,7 @@
           <p:cNvPr id="20" name="">
             <a:extLst xmlns:a="http://schemas.openxmlformats.org/drawingml/2006/main">
               <a:ext uri="{FF2B5EF4-FFF2-40B4-BE49-F238E27FC236}">
-                <a16:creationId xmlns:a16="http://schemas.microsoft.com/office/drawing/2014/main" id="{EB7E46EB-6B9E-4C88-9B4A-47AE7E6FABC0}"/>
+                <a16:creationId xmlns:a16="http://schemas.microsoft.com/office/drawing/2014/main" id="{3277B1C4-9B5E-46B8-8AC3-10F8BA2CCB03}"/>
               </a:ext>
             </a:extLst>
           </p:cNvPr>
@@ -5408,7 +6826,7 @@
           <p:cNvPr id="21" name="">
             <a:extLst xmlns:a="http://schemas.openxmlformats.org/drawingml/2006/main">
               <a:ext uri="{FF2B5EF4-FFF2-40B4-BE49-F238E27FC236}">
-                <a16:creationId xmlns:a16="http://schemas.microsoft.com/office/drawing/2014/main" id="{017A6E69-9369-4C66-84A1-288219A708F4}"/>
+                <a16:creationId xmlns:a16="http://schemas.microsoft.com/office/drawing/2014/main" id="{4F3DA292-FB8E-4958-94D0-96A908F6D990}"/>
               </a:ext>
             </a:extLst>
           </p:cNvPr>
@@ -5456,7 +6874,7 @@
     </p:spTree>
     <p:extLst>
       <p:ext uri="{BB962C8B-B14F-4D97-AF65-F5344CB8AC3E}">
-        <p14:creationId xmlns:p14="http://schemas.microsoft.com/office/powerpoint/2010/main" val="1821122451"/>
+        <p14:creationId xmlns:p14="http://schemas.microsoft.com/office/powerpoint/2010/main" val="80262507"/>
       </p:ext>
     </p:extLst>
   </p:cSld>
@@ -5487,7 +6905,7 @@
           <p:cNvPr id="1" name="">
             <a:extLst xmlns:a="http://schemas.openxmlformats.org/drawingml/2006/main">
               <a:ext uri="{FF2B5EF4-FFF2-40B4-BE49-F238E27FC236}">
-                <a16:creationId xmlns:a16="http://schemas.microsoft.com/office/drawing/2014/main" id="{CF562FF7-EEFB-45CC-A222-07D7C427697E}"/>
+                <a16:creationId xmlns:a16="http://schemas.microsoft.com/office/drawing/2014/main" id="{E626DEB9-29F2-486E-B513-BA0A65C366B7}"/>
               </a:ext>
             </a:extLst>
           </p:cNvPr>
@@ -5537,7 +6955,7 @@
           <p:cNvPr id="2" name="">
             <a:extLst xmlns:a="http://schemas.openxmlformats.org/drawingml/2006/main">
               <a:ext uri="{FF2B5EF4-FFF2-40B4-BE49-F238E27FC236}">
-                <a16:creationId xmlns:a16="http://schemas.microsoft.com/office/drawing/2014/main" id="{37A47949-7738-43B0-8974-A698A9258218}"/>
+                <a16:creationId xmlns:a16="http://schemas.microsoft.com/office/drawing/2014/main" id="{18D56AEC-7EB5-419E-9FA7-859063CC9696}"/>
               </a:ext>
             </a:extLst>
           </p:cNvPr>
@@ -5587,7 +7005,7 @@
           <p:cNvPr id="3" name="">
             <a:extLst xmlns:a="http://schemas.openxmlformats.org/drawingml/2006/main">
               <a:ext uri="{FF2B5EF4-FFF2-40B4-BE49-F238E27FC236}">
-                <a16:creationId xmlns:a16="http://schemas.microsoft.com/office/drawing/2014/main" id="{2A49C55A-A28E-4341-9F2E-1FC250AC69EC}"/>
+                <a16:creationId xmlns:a16="http://schemas.microsoft.com/office/drawing/2014/main" id="{BB517136-82C0-4C26-897B-05677F970E19}"/>
               </a:ext>
             </a:extLst>
           </p:cNvPr>
@@ -5620,7 +7038,7 @@
           <p:cNvPr id="4" name="">
             <a:extLst xmlns:a="http://schemas.openxmlformats.org/drawingml/2006/main">
               <a:ext uri="{FF2B5EF4-FFF2-40B4-BE49-F238E27FC236}">
-                <a16:creationId xmlns:a16="http://schemas.microsoft.com/office/drawing/2014/main" id="{CE942FD2-D8D0-432F-827B-7F4AC42A099C}"/>
+                <a16:creationId xmlns:a16="http://schemas.microsoft.com/office/drawing/2014/main" id="{6C3E4324-FBBF-4E12-89F6-0721A4A46E66}"/>
               </a:ext>
             </a:extLst>
           </p:cNvPr>
@@ -5655,7 +7073,7 @@
           <p:cNvPr id="5" name="">
             <a:extLst xmlns:a="http://schemas.openxmlformats.org/drawingml/2006/main">
               <a:ext uri="{FF2B5EF4-FFF2-40B4-BE49-F238E27FC236}">
-                <a16:creationId xmlns:a16="http://schemas.microsoft.com/office/drawing/2014/main" id="{947B0D14-6323-4C2F-883F-0B1F9EC35BCC}"/>
+                <a16:creationId xmlns:a16="http://schemas.microsoft.com/office/drawing/2014/main" id="{940CD78B-AD63-43CB-83D6-ADE6AE60C3A4}"/>
               </a:ext>
             </a:extLst>
           </p:cNvPr>
@@ -5705,7 +7123,7 @@
           <p:cNvPr id="6" name="">
             <a:extLst xmlns:a="http://schemas.openxmlformats.org/drawingml/2006/main">
               <a:ext uri="{FF2B5EF4-FFF2-40B4-BE49-F238E27FC236}">
-                <a16:creationId xmlns:a16="http://schemas.microsoft.com/office/drawing/2014/main" id="{3C5202CF-0BCB-42FE-BE33-C40FA7AB1C1A}"/>
+                <a16:creationId xmlns:a16="http://schemas.microsoft.com/office/drawing/2014/main" id="{2C085CD7-B6C2-4C33-9CEA-3E36450FC5F7}"/>
               </a:ext>
             </a:extLst>
           </p:cNvPr>
@@ -5755,7 +7173,7 @@
           <p:cNvPr id="7" name="">
             <a:extLst xmlns:a="http://schemas.openxmlformats.org/drawingml/2006/main">
               <a:ext uri="{FF2B5EF4-FFF2-40B4-BE49-F238E27FC236}">
-                <a16:creationId xmlns:a16="http://schemas.microsoft.com/office/drawing/2014/main" id="{FDC1F6EC-440B-4B82-AB16-C2C7F4BDEC03}"/>
+                <a16:creationId xmlns:a16="http://schemas.microsoft.com/office/drawing/2014/main" id="{53C2886E-8448-4AA2-85A6-12B63E0BE227}"/>
               </a:ext>
             </a:extLst>
           </p:cNvPr>
@@ -5805,7 +7223,7 @@
           <p:cNvPr id="8" name="">
             <a:extLst xmlns:a="http://schemas.openxmlformats.org/drawingml/2006/main">
               <a:ext uri="{FF2B5EF4-FFF2-40B4-BE49-F238E27FC236}">
-                <a16:creationId xmlns:a16="http://schemas.microsoft.com/office/drawing/2014/main" id="{705E14E0-3D42-4A61-8C14-787AB70D486C}"/>
+                <a16:creationId xmlns:a16="http://schemas.microsoft.com/office/drawing/2014/main" id="{08315433-737C-4086-B4D7-813CFEF84A16}"/>
               </a:ext>
             </a:extLst>
           </p:cNvPr>
@@ -5840,7 +7258,7 @@
           <p:cNvPr id="9" name="">
             <a:extLst xmlns:a="http://schemas.openxmlformats.org/drawingml/2006/main">
               <a:ext uri="{FF2B5EF4-FFF2-40B4-BE49-F238E27FC236}">
-                <a16:creationId xmlns:a16="http://schemas.microsoft.com/office/drawing/2014/main" id="{4D1523C0-03D2-4CCD-8B15-BCDF2113A275}"/>
+                <a16:creationId xmlns:a16="http://schemas.microsoft.com/office/drawing/2014/main" id="{0A486A86-D96C-41C5-A464-03D957C3FD05}"/>
               </a:ext>
             </a:extLst>
           </p:cNvPr>
@@ -5890,7 +7308,7 @@
           <p:cNvPr id="10" name="">
             <a:extLst xmlns:a="http://schemas.openxmlformats.org/drawingml/2006/main">
               <a:ext uri="{FF2B5EF4-FFF2-40B4-BE49-F238E27FC236}">
-                <a16:creationId xmlns:a16="http://schemas.microsoft.com/office/drawing/2014/main" id="{806D33D4-FA24-4580-9AB6-DDBE19AB655F}"/>
+                <a16:creationId xmlns:a16="http://schemas.microsoft.com/office/drawing/2014/main" id="{4C220452-EA2F-4C0C-B94D-DAB61AFA779F}"/>
               </a:ext>
             </a:extLst>
           </p:cNvPr>
@@ -5940,7 +7358,7 @@
           <p:cNvPr id="11" name="">
             <a:extLst xmlns:a="http://schemas.openxmlformats.org/drawingml/2006/main">
               <a:ext uri="{FF2B5EF4-FFF2-40B4-BE49-F238E27FC236}">
-                <a16:creationId xmlns:a16="http://schemas.microsoft.com/office/drawing/2014/main" id="{7F34DF91-FD29-4B45-BF1D-99C8B61A1CAD}"/>
+                <a16:creationId xmlns:a16="http://schemas.microsoft.com/office/drawing/2014/main" id="{33746B6E-E5A4-42FC-B7F7-EC626E16EC26}"/>
               </a:ext>
             </a:extLst>
           </p:cNvPr>
@@ -5990,7 +7408,7 @@
           <p:cNvPr id="12" name="">
             <a:extLst xmlns:a="http://schemas.openxmlformats.org/drawingml/2006/main">
               <a:ext uri="{FF2B5EF4-FFF2-40B4-BE49-F238E27FC236}">
-                <a16:creationId xmlns:a16="http://schemas.microsoft.com/office/drawing/2014/main" id="{FF8D550F-4B05-4DE4-A335-21DFE3C80516}"/>
+                <a16:creationId xmlns:a16="http://schemas.microsoft.com/office/drawing/2014/main" id="{C6F5A811-A0A4-4D07-9E01-9862F58C0DF7}"/>
               </a:ext>
             </a:extLst>
           </p:cNvPr>
@@ -6025,7 +7443,7 @@
           <p:cNvPr id="13" name="">
             <a:extLst xmlns:a="http://schemas.openxmlformats.org/drawingml/2006/main">
               <a:ext uri="{FF2B5EF4-FFF2-40B4-BE49-F238E27FC236}">
-                <a16:creationId xmlns:a16="http://schemas.microsoft.com/office/drawing/2014/main" id="{1E5AF0DD-3F7B-4CB9-BBB4-79D6C62F521E}"/>
+                <a16:creationId xmlns:a16="http://schemas.microsoft.com/office/drawing/2014/main" id="{EA37A136-7C2B-4772-BFE4-72871B6BC41B}"/>
               </a:ext>
             </a:extLst>
           </p:cNvPr>
@@ -6075,7 +7493,7 @@
           <p:cNvPr id="14" name="">
             <a:extLst xmlns:a="http://schemas.openxmlformats.org/drawingml/2006/main">
               <a:ext uri="{FF2B5EF4-FFF2-40B4-BE49-F238E27FC236}">
-                <a16:creationId xmlns:a16="http://schemas.microsoft.com/office/drawing/2014/main" id="{B9A1830D-6590-4D26-95AF-54D87490EBF2}"/>
+                <a16:creationId xmlns:a16="http://schemas.microsoft.com/office/drawing/2014/main" id="{8C059944-6F8B-4EF3-9A91-6F208D6325BC}"/>
               </a:ext>
             </a:extLst>
           </p:cNvPr>
@@ -6125,7 +7543,7 @@
           <p:cNvPr id="15" name="">
             <a:extLst xmlns:a="http://schemas.openxmlformats.org/drawingml/2006/main">
               <a:ext uri="{FF2B5EF4-FFF2-40B4-BE49-F238E27FC236}">
-                <a16:creationId xmlns:a16="http://schemas.microsoft.com/office/drawing/2014/main" id="{F34F12C0-5A0C-4EE7-999A-D839E0C4C96B}"/>
+                <a16:creationId xmlns:a16="http://schemas.microsoft.com/office/drawing/2014/main" id="{F0B5FB42-B0C8-48DD-BA5F-AB4C26B03A55}"/>
               </a:ext>
             </a:extLst>
           </p:cNvPr>
@@ -6175,7 +7593,7 @@
           <p:cNvPr id="16" name="">
             <a:extLst xmlns:a="http://schemas.openxmlformats.org/drawingml/2006/main">
               <a:ext uri="{FF2B5EF4-FFF2-40B4-BE49-F238E27FC236}">
-                <a16:creationId xmlns:a16="http://schemas.microsoft.com/office/drawing/2014/main" id="{BD1B7071-90E6-4805-8E5A-580D118D7A49}"/>
+                <a16:creationId xmlns:a16="http://schemas.microsoft.com/office/drawing/2014/main" id="{D0B7B6CE-0FD3-4ADF-8216-C24A746B3520}"/>
               </a:ext>
             </a:extLst>
           </p:cNvPr>
@@ -6210,7 +7628,7 @@
           <p:cNvPr id="17" name="">
             <a:extLst xmlns:a="http://schemas.openxmlformats.org/drawingml/2006/main">
               <a:ext uri="{FF2B5EF4-FFF2-40B4-BE49-F238E27FC236}">
-                <a16:creationId xmlns:a16="http://schemas.microsoft.com/office/drawing/2014/main" id="{7BC6F649-DC48-47C7-8D63-6698C8F5E8AD}"/>
+                <a16:creationId xmlns:a16="http://schemas.microsoft.com/office/drawing/2014/main" id="{45C48C84-65C4-4E74-ABC9-5C7C7995605E}"/>
               </a:ext>
             </a:extLst>
           </p:cNvPr>
@@ -6260,7 +7678,7 @@
           <p:cNvPr id="18" name="">
             <a:extLst xmlns:a="http://schemas.openxmlformats.org/drawingml/2006/main">
               <a:ext uri="{FF2B5EF4-FFF2-40B4-BE49-F238E27FC236}">
-                <a16:creationId xmlns:a16="http://schemas.microsoft.com/office/drawing/2014/main" id="{56D28865-36F1-4A3D-A43E-600B3132789C}"/>
+                <a16:creationId xmlns:a16="http://schemas.microsoft.com/office/drawing/2014/main" id="{08CE0C16-17D2-453A-838D-1DF7A2687408}"/>
               </a:ext>
             </a:extLst>
           </p:cNvPr>
@@ -6310,7 +7728,7 @@
           <p:cNvPr id="19" name="">
             <a:extLst xmlns:a="http://schemas.openxmlformats.org/drawingml/2006/main">
               <a:ext uri="{FF2B5EF4-FFF2-40B4-BE49-F238E27FC236}">
-                <a16:creationId xmlns:a16="http://schemas.microsoft.com/office/drawing/2014/main" id="{C5F07C98-9547-47AA-9C64-16FE509C052C}"/>
+                <a16:creationId xmlns:a16="http://schemas.microsoft.com/office/drawing/2014/main" id="{6FE552D7-0167-4A75-BE99-ABB6FA18CF1F}"/>
               </a:ext>
             </a:extLst>
           </p:cNvPr>
@@ -6360,7 +7778,7 @@
           <p:cNvPr id="20" name="">
             <a:extLst xmlns:a="http://schemas.openxmlformats.org/drawingml/2006/main">
               <a:ext uri="{FF2B5EF4-FFF2-40B4-BE49-F238E27FC236}">
-                <a16:creationId xmlns:a16="http://schemas.microsoft.com/office/drawing/2014/main" id="{766C43C5-21EA-4212-ACD7-BF1F93F0657F}"/>
+                <a16:creationId xmlns:a16="http://schemas.microsoft.com/office/drawing/2014/main" id="{40182317-3C48-40A2-80D6-C8771801A58B}"/>
               </a:ext>
             </a:extLst>
           </p:cNvPr>
@@ -6410,7 +7828,7 @@
           <p:cNvPr id="21" name="">
             <a:extLst xmlns:a="http://schemas.openxmlformats.org/drawingml/2006/main">
               <a:ext uri="{FF2B5EF4-FFF2-40B4-BE49-F238E27FC236}">
-                <a16:creationId xmlns:a16="http://schemas.microsoft.com/office/drawing/2014/main" id="{D1945784-7361-4513-95D7-A645FB2F7FC0}"/>
+                <a16:creationId xmlns:a16="http://schemas.microsoft.com/office/drawing/2014/main" id="{FE414FB1-E38D-4DFF-B7B1-381B9A0B2A48}"/>
               </a:ext>
             </a:extLst>
           </p:cNvPr>
@@ -6460,7 +7878,7 @@
           <p:cNvPr id="22" name="">
             <a:extLst xmlns:a="http://schemas.openxmlformats.org/drawingml/2006/main">
               <a:ext uri="{FF2B5EF4-FFF2-40B4-BE49-F238E27FC236}">
-                <a16:creationId xmlns:a16="http://schemas.microsoft.com/office/drawing/2014/main" id="{144A7E43-021C-4744-B814-DA59BFA72BA0}"/>
+                <a16:creationId xmlns:a16="http://schemas.microsoft.com/office/drawing/2014/main" id="{7CBCABF4-A2C1-45FF-90D6-CB1C02DC0B91}"/>
               </a:ext>
             </a:extLst>
           </p:cNvPr>
@@ -6508,7 +7926,7 @@
     </p:spTree>
     <p:extLst>
       <p:ext uri="{BB962C8B-B14F-4D97-AF65-F5344CB8AC3E}">
-        <p14:creationId xmlns:p14="http://schemas.microsoft.com/office/powerpoint/2010/main" val="1244813857"/>
+        <p14:creationId xmlns:p14="http://schemas.microsoft.com/office/powerpoint/2010/main" val="353182199"/>
       </p:ext>
     </p:extLst>
   </p:cSld>
@@ -6539,7 +7957,7 @@
           <p:cNvPr id="1" name="">
             <a:extLst xmlns:a="http://schemas.openxmlformats.org/drawingml/2006/main">
               <a:ext uri="{FF2B5EF4-FFF2-40B4-BE49-F238E27FC236}">
-                <a16:creationId xmlns:a16="http://schemas.microsoft.com/office/drawing/2014/main" id="{4DF58BC8-94E4-49DB-9A59-19BB706E0B6B}"/>
+                <a16:creationId xmlns:a16="http://schemas.microsoft.com/office/drawing/2014/main" id="{F7D23513-3C60-4C34-B614-4B0124F6BCD8}"/>
               </a:ext>
             </a:extLst>
           </p:cNvPr>
@@ -6589,7 +8007,7 @@
           <p:cNvPr id="2" name="">
             <a:extLst xmlns:a="http://schemas.openxmlformats.org/drawingml/2006/main">
               <a:ext uri="{FF2B5EF4-FFF2-40B4-BE49-F238E27FC236}">
-                <a16:creationId xmlns:a16="http://schemas.microsoft.com/office/drawing/2014/main" id="{F847A97F-853D-4465-AE63-ABCB64761D91}"/>
+                <a16:creationId xmlns:a16="http://schemas.microsoft.com/office/drawing/2014/main" id="{1D5FE2C1-3802-4041-9D57-C30C41465E0C}"/>
               </a:ext>
             </a:extLst>
           </p:cNvPr>
@@ -6639,7 +8057,7 @@
           <p:cNvPr id="3" name="">
             <a:extLst xmlns:a="http://schemas.openxmlformats.org/drawingml/2006/main">
               <a:ext uri="{FF2B5EF4-FFF2-40B4-BE49-F238E27FC236}">
-                <a16:creationId xmlns:a16="http://schemas.microsoft.com/office/drawing/2014/main" id="{30E3D155-7974-4BA4-8F25-7599CED49644}"/>
+                <a16:creationId xmlns:a16="http://schemas.microsoft.com/office/drawing/2014/main" id="{D1D2718B-6143-4F63-A884-6153D658DFAB}"/>
               </a:ext>
             </a:extLst>
           </p:cNvPr>
@@ -6672,7 +8090,7 @@
           <p:cNvPr id="4" name="">
             <a:extLst xmlns:a="http://schemas.openxmlformats.org/drawingml/2006/main">
               <a:ext uri="{FF2B5EF4-FFF2-40B4-BE49-F238E27FC236}">
-                <a16:creationId xmlns:a16="http://schemas.microsoft.com/office/drawing/2014/main" id="{EBEDD0D3-CB60-445E-B20C-BD18358CA39F}"/>
+                <a16:creationId xmlns:a16="http://schemas.microsoft.com/office/drawing/2014/main" id="{3599B0DD-86AD-455B-8FD1-220FD518180B}"/>
               </a:ext>
             </a:extLst>
           </p:cNvPr>
@@ -6707,7 +8125,7 @@
           <p:cNvPr id="5" name="">
             <a:extLst xmlns:a="http://schemas.openxmlformats.org/drawingml/2006/main">
               <a:ext uri="{FF2B5EF4-FFF2-40B4-BE49-F238E27FC236}">
-                <a16:creationId xmlns:a16="http://schemas.microsoft.com/office/drawing/2014/main" id="{EFE34A6C-17D0-4523-BFD7-69B5887FF769}"/>
+                <a16:creationId xmlns:a16="http://schemas.microsoft.com/office/drawing/2014/main" id="{83A35B82-344A-4BE4-9328-087EBC7A7F5F}"/>
               </a:ext>
             </a:extLst>
           </p:cNvPr>
@@ -6757,7 +8175,7 @@
           <p:cNvPr id="6" name="">
             <a:extLst xmlns:a="http://schemas.openxmlformats.org/drawingml/2006/main">
               <a:ext uri="{FF2B5EF4-FFF2-40B4-BE49-F238E27FC236}">
-                <a16:creationId xmlns:a16="http://schemas.microsoft.com/office/drawing/2014/main" id="{693FDBF7-7F16-4F35-99B5-5864F055204D}"/>
+                <a16:creationId xmlns:a16="http://schemas.microsoft.com/office/drawing/2014/main" id="{D2FBF6F6-4192-44D1-B8C2-8FF0F8CD8C21}"/>
               </a:ext>
             </a:extLst>
           </p:cNvPr>
@@ -6807,7 +8225,7 @@
           <p:cNvPr id="7" name="">
             <a:extLst xmlns:a="http://schemas.openxmlformats.org/drawingml/2006/main">
               <a:ext uri="{FF2B5EF4-FFF2-40B4-BE49-F238E27FC236}">
-                <a16:creationId xmlns:a16="http://schemas.microsoft.com/office/drawing/2014/main" id="{161D4F92-8105-46C0-9BAF-EDDA7C032A7E}"/>
+                <a16:creationId xmlns:a16="http://schemas.microsoft.com/office/drawing/2014/main" id="{5FF24A28-3D59-4469-98C6-0D0DC5A150B0}"/>
               </a:ext>
             </a:extLst>
           </p:cNvPr>
@@ -6842,7 +8260,7 @@
           <p:cNvPr id="8" name="">
             <a:extLst xmlns:a="http://schemas.openxmlformats.org/drawingml/2006/main">
               <a:ext uri="{FF2B5EF4-FFF2-40B4-BE49-F238E27FC236}">
-                <a16:creationId xmlns:a16="http://schemas.microsoft.com/office/drawing/2014/main" id="{8D6CC93D-02A2-4515-8013-5B76835C3D97}"/>
+                <a16:creationId xmlns:a16="http://schemas.microsoft.com/office/drawing/2014/main" id="{62D78607-F448-40CA-88A6-70D321E5AD51}"/>
               </a:ext>
             </a:extLst>
           </p:cNvPr>
@@ -6892,7 +8310,7 @@
           <p:cNvPr id="9" name="">
             <a:extLst xmlns:a="http://schemas.openxmlformats.org/drawingml/2006/main">
               <a:ext uri="{FF2B5EF4-FFF2-40B4-BE49-F238E27FC236}">
-                <a16:creationId xmlns:a16="http://schemas.microsoft.com/office/drawing/2014/main" id="{BD332C8C-9E28-48DB-B0EA-04449F3A4FB5}"/>
+                <a16:creationId xmlns:a16="http://schemas.microsoft.com/office/drawing/2014/main" id="{2EBD1897-5316-40A7-A98F-608F8A9D5406}"/>
               </a:ext>
             </a:extLst>
           </p:cNvPr>
@@ -6942,7 +8360,7 @@
           <p:cNvPr id="10" name="">
             <a:extLst xmlns:a="http://schemas.openxmlformats.org/drawingml/2006/main">
               <a:ext uri="{FF2B5EF4-FFF2-40B4-BE49-F238E27FC236}">
-                <a16:creationId xmlns:a16="http://schemas.microsoft.com/office/drawing/2014/main" id="{A04FB945-3A25-4120-BA25-4811878F21F7}"/>
+                <a16:creationId xmlns:a16="http://schemas.microsoft.com/office/drawing/2014/main" id="{32DF5D1E-B94E-4C1A-B338-00B4CD0018F6}"/>
               </a:ext>
             </a:extLst>
           </p:cNvPr>
@@ -6977,7 +8395,7 @@
           <p:cNvPr id="11" name="">
             <a:extLst xmlns:a="http://schemas.openxmlformats.org/drawingml/2006/main">
               <a:ext uri="{FF2B5EF4-FFF2-40B4-BE49-F238E27FC236}">
-                <a16:creationId xmlns:a16="http://schemas.microsoft.com/office/drawing/2014/main" id="{205466A6-80CD-4C8A-BAA3-334DF15F1B60}"/>
+                <a16:creationId xmlns:a16="http://schemas.microsoft.com/office/drawing/2014/main" id="{444C0A24-5D12-45D4-B461-7C2C3E0E7432}"/>
               </a:ext>
             </a:extLst>
           </p:cNvPr>
@@ -7027,7 +8445,7 @@
           <p:cNvPr id="12" name="">
             <a:extLst xmlns:a="http://schemas.openxmlformats.org/drawingml/2006/main">
               <a:ext uri="{FF2B5EF4-FFF2-40B4-BE49-F238E27FC236}">
-                <a16:creationId xmlns:a16="http://schemas.microsoft.com/office/drawing/2014/main" id="{2454894B-D74F-4C60-8040-0B5647A157AA}"/>
+                <a16:creationId xmlns:a16="http://schemas.microsoft.com/office/drawing/2014/main" id="{1A15418F-90CD-4A70-B9AA-744B3EBE22F2}"/>
               </a:ext>
             </a:extLst>
           </p:cNvPr>
@@ -7077,7 +8495,7 @@
           <p:cNvPr id="13" name="">
             <a:extLst xmlns:a="http://schemas.openxmlformats.org/drawingml/2006/main">
               <a:ext uri="{FF2B5EF4-FFF2-40B4-BE49-F238E27FC236}">
-                <a16:creationId xmlns:a16="http://schemas.microsoft.com/office/drawing/2014/main" id="{3833B884-3309-4EBF-B322-ED7023823AED}"/>
+                <a16:creationId xmlns:a16="http://schemas.microsoft.com/office/drawing/2014/main" id="{6DCDE387-8162-47CD-B802-E8C6B5A7EB8E}"/>
               </a:ext>
             </a:extLst>
           </p:cNvPr>
@@ -7112,7 +8530,7 @@
           <p:cNvPr id="14" name="">
             <a:extLst xmlns:a="http://schemas.openxmlformats.org/drawingml/2006/main">
               <a:ext uri="{FF2B5EF4-FFF2-40B4-BE49-F238E27FC236}">
-                <a16:creationId xmlns:a16="http://schemas.microsoft.com/office/drawing/2014/main" id="{E684DDDB-E4FD-4E71-84A9-9D446CDA04E5}"/>
+                <a16:creationId xmlns:a16="http://schemas.microsoft.com/office/drawing/2014/main" id="{D45D2599-3531-4E54-BC79-28B325684DA3}"/>
               </a:ext>
             </a:extLst>
           </p:cNvPr>
@@ -7162,7 +8580,7 @@
           <p:cNvPr id="15" name="">
             <a:extLst xmlns:a="http://schemas.openxmlformats.org/drawingml/2006/main">
               <a:ext uri="{FF2B5EF4-FFF2-40B4-BE49-F238E27FC236}">
-                <a16:creationId xmlns:a16="http://schemas.microsoft.com/office/drawing/2014/main" id="{DCA9229E-480F-461E-8D00-0E127404A682}"/>
+                <a16:creationId xmlns:a16="http://schemas.microsoft.com/office/drawing/2014/main" id="{1A54F249-181E-4A0E-9C72-C50F30561A65}"/>
               </a:ext>
             </a:extLst>
           </p:cNvPr>
@@ -7212,7 +8630,7 @@
           <p:cNvPr id="16" name="">
             <a:extLst xmlns:a="http://schemas.openxmlformats.org/drawingml/2006/main">
               <a:ext uri="{FF2B5EF4-FFF2-40B4-BE49-F238E27FC236}">
-                <a16:creationId xmlns:a16="http://schemas.microsoft.com/office/drawing/2014/main" id="{82A5F669-8F87-4794-897E-4A5815FD2E83}"/>
+                <a16:creationId xmlns:a16="http://schemas.microsoft.com/office/drawing/2014/main" id="{714276A4-C408-43B2-9B14-9C66AFC64671}"/>
               </a:ext>
             </a:extLst>
           </p:cNvPr>
@@ -7247,7 +8665,7 @@
           <p:cNvPr id="17" name="">
             <a:extLst xmlns:a="http://schemas.openxmlformats.org/drawingml/2006/main">
               <a:ext uri="{FF2B5EF4-FFF2-40B4-BE49-F238E27FC236}">
-                <a16:creationId xmlns:a16="http://schemas.microsoft.com/office/drawing/2014/main" id="{56F3625B-0D8C-42A0-884D-B388DA17D760}"/>
+                <a16:creationId xmlns:a16="http://schemas.microsoft.com/office/drawing/2014/main" id="{EDC046C3-E75B-47AA-B29A-CFE6704F53EF}"/>
               </a:ext>
             </a:extLst>
           </p:cNvPr>
@@ -7297,7 +8715,7 @@
           <p:cNvPr id="18" name="">
             <a:extLst xmlns:a="http://schemas.openxmlformats.org/drawingml/2006/main">
               <a:ext uri="{FF2B5EF4-FFF2-40B4-BE49-F238E27FC236}">
-                <a16:creationId xmlns:a16="http://schemas.microsoft.com/office/drawing/2014/main" id="{562F0FF3-2C80-4FFF-8117-16771D9A7280}"/>
+                <a16:creationId xmlns:a16="http://schemas.microsoft.com/office/drawing/2014/main" id="{47B4B078-028F-4DAD-8B55-D8C6D39177EE}"/>
               </a:ext>
             </a:extLst>
           </p:cNvPr>
@@ -7347,7 +8765,7 @@
           <p:cNvPr id="19" name="">
             <a:extLst xmlns:a="http://schemas.openxmlformats.org/drawingml/2006/main">
               <a:ext uri="{FF2B5EF4-FFF2-40B4-BE49-F238E27FC236}">
-                <a16:creationId xmlns:a16="http://schemas.microsoft.com/office/drawing/2014/main" id="{984CFE5E-EC42-41CF-BB98-0055C38291FD}"/>
+                <a16:creationId xmlns:a16="http://schemas.microsoft.com/office/drawing/2014/main" id="{BA81EC3A-A093-4BBF-9B7B-5D32C74554B2}"/>
               </a:ext>
             </a:extLst>
           </p:cNvPr>
@@ -7382,7 +8800,7 @@
           <p:cNvPr id="20" name="">
             <a:extLst xmlns:a="http://schemas.openxmlformats.org/drawingml/2006/main">
               <a:ext uri="{FF2B5EF4-FFF2-40B4-BE49-F238E27FC236}">
-                <a16:creationId xmlns:a16="http://schemas.microsoft.com/office/drawing/2014/main" id="{3CE2FE28-1C07-44AF-B488-FFF475CCCDEF}"/>
+                <a16:creationId xmlns:a16="http://schemas.microsoft.com/office/drawing/2014/main" id="{B49621FD-AC47-41AD-9149-1E13E7ECAB48}"/>
               </a:ext>
             </a:extLst>
           </p:cNvPr>
@@ -7432,7 +8850,7 @@
           <p:cNvPr id="21" name="">
             <a:extLst xmlns:a="http://schemas.openxmlformats.org/drawingml/2006/main">
               <a:ext uri="{FF2B5EF4-FFF2-40B4-BE49-F238E27FC236}">
-                <a16:creationId xmlns:a16="http://schemas.microsoft.com/office/drawing/2014/main" id="{D713BE88-8537-49E1-8C96-2DD6C489C5CC}"/>
+                <a16:creationId xmlns:a16="http://schemas.microsoft.com/office/drawing/2014/main" id="{D25447F6-1F6C-44CC-B8D2-1C52317B2DA2}"/>
               </a:ext>
             </a:extLst>
           </p:cNvPr>
@@ -7482,7 +8900,7 @@
           <p:cNvPr id="22" name="">
             <a:extLst xmlns:a="http://schemas.openxmlformats.org/drawingml/2006/main">
               <a:ext uri="{FF2B5EF4-FFF2-40B4-BE49-F238E27FC236}">
-                <a16:creationId xmlns:a16="http://schemas.microsoft.com/office/drawing/2014/main" id="{A55F8702-C47E-4BA3-B12B-5313FA51FD46}"/>
+                <a16:creationId xmlns:a16="http://schemas.microsoft.com/office/drawing/2014/main" id="{11685A41-35E7-4053-AFA0-EFA642080E60}"/>
               </a:ext>
             </a:extLst>
           </p:cNvPr>
@@ -7532,7 +8950,7 @@
           <p:cNvPr id="23" name="">
             <a:extLst xmlns:a="http://schemas.openxmlformats.org/drawingml/2006/main">
               <a:ext uri="{FF2B5EF4-FFF2-40B4-BE49-F238E27FC236}">
-                <a16:creationId xmlns:a16="http://schemas.microsoft.com/office/drawing/2014/main" id="{FE914A06-13F2-4BFC-8585-0949CB6DE0AF}"/>
+                <a16:creationId xmlns:a16="http://schemas.microsoft.com/office/drawing/2014/main" id="{69D574E8-EC2C-4D84-8453-A4DB0BA33EE4}"/>
               </a:ext>
             </a:extLst>
           </p:cNvPr>
@@ -7582,7 +9000,7 @@
           <p:cNvPr id="24" name="">
             <a:extLst xmlns:a="http://schemas.openxmlformats.org/drawingml/2006/main">
               <a:ext uri="{FF2B5EF4-FFF2-40B4-BE49-F238E27FC236}">
-                <a16:creationId xmlns:a16="http://schemas.microsoft.com/office/drawing/2014/main" id="{A7B210F9-A0A9-4417-BC45-338719BFD5DA}"/>
+                <a16:creationId xmlns:a16="http://schemas.microsoft.com/office/drawing/2014/main" id="{5A04C0B1-B991-4798-964D-09CDCD1C0B62}"/>
               </a:ext>
             </a:extLst>
           </p:cNvPr>
@@ -7630,7 +9048,7 @@
     </p:spTree>
     <p:extLst>
       <p:ext uri="{BB962C8B-B14F-4D97-AF65-F5344CB8AC3E}">
-        <p14:creationId xmlns:p14="http://schemas.microsoft.com/office/powerpoint/2010/main" val="454233723"/>
+        <p14:creationId xmlns:p14="http://schemas.microsoft.com/office/powerpoint/2010/main" val="1667044324"/>
       </p:ext>
     </p:extLst>
   </p:cSld>
@@ -7661,7 +9079,7 @@
           <p:cNvPr id="1" name="">
             <a:extLst xmlns:a="http://schemas.openxmlformats.org/drawingml/2006/main">
               <a:ext uri="{FF2B5EF4-FFF2-40B4-BE49-F238E27FC236}">
-                <a16:creationId xmlns:a16="http://schemas.microsoft.com/office/drawing/2014/main" id="{68B6A0F9-4482-482E-87A4-7E2B93246CE4}"/>
+                <a16:creationId xmlns:a16="http://schemas.microsoft.com/office/drawing/2014/main" id="{86627CA7-AC40-47D9-8356-A71D98C0136A}"/>
               </a:ext>
             </a:extLst>
           </p:cNvPr>
@@ -7711,7 +9129,7 @@
           <p:cNvPr id="2" name="">
             <a:extLst xmlns:a="http://schemas.openxmlformats.org/drawingml/2006/main">
               <a:ext uri="{FF2B5EF4-FFF2-40B4-BE49-F238E27FC236}">
-                <a16:creationId xmlns:a16="http://schemas.microsoft.com/office/drawing/2014/main" id="{ED0A864A-7801-489E-A9D0-7ECBF9A2DB05}"/>
+                <a16:creationId xmlns:a16="http://schemas.microsoft.com/office/drawing/2014/main" id="{798D3D75-FAD7-4CEE-8378-1A3A4A45EC13}"/>
               </a:ext>
             </a:extLst>
           </p:cNvPr>
@@ -7761,7 +9179,7 @@
           <p:cNvPr id="3" name="">
             <a:extLst xmlns:a="http://schemas.openxmlformats.org/drawingml/2006/main">
               <a:ext uri="{FF2B5EF4-FFF2-40B4-BE49-F238E27FC236}">
-                <a16:creationId xmlns:a16="http://schemas.microsoft.com/office/drawing/2014/main" id="{F3004A8D-28B1-47F0-86D9-29DA6D375F5F}"/>
+                <a16:creationId xmlns:a16="http://schemas.microsoft.com/office/drawing/2014/main" id="{A943DCC2-9EF7-4B48-BCC7-B61C7035D269}"/>
               </a:ext>
             </a:extLst>
           </p:cNvPr>
@@ -7794,7 +9212,7 @@
           <p:cNvPr id="4" name="">
             <a:extLst xmlns:a="http://schemas.openxmlformats.org/drawingml/2006/main">
               <a:ext uri="{FF2B5EF4-FFF2-40B4-BE49-F238E27FC236}">
-                <a16:creationId xmlns:a16="http://schemas.microsoft.com/office/drawing/2014/main" id="{E2D1BB5D-D156-4D11-A64E-D9E87F6D19ED}"/>
+                <a16:creationId xmlns:a16="http://schemas.microsoft.com/office/drawing/2014/main" id="{660E15A7-6439-47E1-A1FA-ACC31841ABFB}"/>
               </a:ext>
             </a:extLst>
           </p:cNvPr>
@@ -7829,7 +9247,7 @@
           <p:cNvPr id="5" name="">
             <a:extLst xmlns:a="http://schemas.openxmlformats.org/drawingml/2006/main">
               <a:ext uri="{FF2B5EF4-FFF2-40B4-BE49-F238E27FC236}">
-                <a16:creationId xmlns:a16="http://schemas.microsoft.com/office/drawing/2014/main" id="{2A7148A6-3CB5-4A56-AD64-2A5CA4D5FF88}"/>
+                <a16:creationId xmlns:a16="http://schemas.microsoft.com/office/drawing/2014/main" id="{B6CA6450-F161-4A87-BD26-472F91F26304}"/>
               </a:ext>
             </a:extLst>
           </p:cNvPr>
@@ -7879,7 +9297,7 @@
           <p:cNvPr id="6" name="">
             <a:extLst xmlns:a="http://schemas.openxmlformats.org/drawingml/2006/main">
               <a:ext uri="{FF2B5EF4-FFF2-40B4-BE49-F238E27FC236}">
-                <a16:creationId xmlns:a16="http://schemas.microsoft.com/office/drawing/2014/main" id="{46EB1313-4358-465B-AF2E-E59FE5708967}"/>
+                <a16:creationId xmlns:a16="http://schemas.microsoft.com/office/drawing/2014/main" id="{03A0FF92-5FC8-419E-A810-4A40D082005A}"/>
               </a:ext>
             </a:extLst>
           </p:cNvPr>
@@ -7929,7 +9347,7 @@
           <p:cNvPr id="7" name="">
             <a:extLst xmlns:a="http://schemas.openxmlformats.org/drawingml/2006/main">
               <a:ext uri="{FF2B5EF4-FFF2-40B4-BE49-F238E27FC236}">
-                <a16:creationId xmlns:a16="http://schemas.microsoft.com/office/drawing/2014/main" id="{2FED692D-84BD-4792-B139-C1590800A5B8}"/>
+                <a16:creationId xmlns:a16="http://schemas.microsoft.com/office/drawing/2014/main" id="{78B7DD3A-42A4-4084-95E1-C03B273456AE}"/>
               </a:ext>
             </a:extLst>
           </p:cNvPr>
@@ -7962,7 +9380,7 @@
           <p:cNvPr id="8" name="">
             <a:extLst xmlns:a="http://schemas.openxmlformats.org/drawingml/2006/main">
               <a:ext uri="{FF2B5EF4-FFF2-40B4-BE49-F238E27FC236}">
-                <a16:creationId xmlns:a16="http://schemas.microsoft.com/office/drawing/2014/main" id="{FDBDE1C2-6F2F-4C7D-A66C-D176A39F1CD1}"/>
+                <a16:creationId xmlns:a16="http://schemas.microsoft.com/office/drawing/2014/main" id="{C2DB0154-BDEA-4F0A-8941-773DBFF2D0BE}"/>
               </a:ext>
             </a:extLst>
           </p:cNvPr>
@@ -7997,7 +9415,7 @@
           <p:cNvPr id="9" name="">
             <a:extLst xmlns:a="http://schemas.openxmlformats.org/drawingml/2006/main">
               <a:ext uri="{FF2B5EF4-FFF2-40B4-BE49-F238E27FC236}">
-                <a16:creationId xmlns:a16="http://schemas.microsoft.com/office/drawing/2014/main" id="{86058488-8B31-4386-9A0D-C25C45169D03}"/>
+                <a16:creationId xmlns:a16="http://schemas.microsoft.com/office/drawing/2014/main" id="{01CDB4FF-5FCD-483C-A2E3-00B2E3A1E167}"/>
               </a:ext>
             </a:extLst>
           </p:cNvPr>
@@ -8047,7 +9465,7 @@
           <p:cNvPr id="10" name="">
             <a:extLst xmlns:a="http://schemas.openxmlformats.org/drawingml/2006/main">
               <a:ext uri="{FF2B5EF4-FFF2-40B4-BE49-F238E27FC236}">
-                <a16:creationId xmlns:a16="http://schemas.microsoft.com/office/drawing/2014/main" id="{D77C0A99-91DB-4A02-B167-A8C4F695E6D1}"/>
+                <a16:creationId xmlns:a16="http://schemas.microsoft.com/office/drawing/2014/main" id="{6ACB86FF-B229-4282-8858-AFF297BEBEB9}"/>
               </a:ext>
             </a:extLst>
           </p:cNvPr>
@@ -8097,7 +9515,7 @@
           <p:cNvPr id="11" name="">
             <a:extLst xmlns:a="http://schemas.openxmlformats.org/drawingml/2006/main">
               <a:ext uri="{FF2B5EF4-FFF2-40B4-BE49-F238E27FC236}">
-                <a16:creationId xmlns:a16="http://schemas.microsoft.com/office/drawing/2014/main" id="{AC73C8BE-CB10-42F1-B861-C4D7619CDD60}"/>
+                <a16:creationId xmlns:a16="http://schemas.microsoft.com/office/drawing/2014/main" id="{4DBDF8B6-B33F-45E6-8C78-E498426E8F51}"/>
               </a:ext>
             </a:extLst>
           </p:cNvPr>
@@ -8130,7 +9548,7 @@
           <p:cNvPr id="12" name="">
             <a:extLst xmlns:a="http://schemas.openxmlformats.org/drawingml/2006/main">
               <a:ext uri="{FF2B5EF4-FFF2-40B4-BE49-F238E27FC236}">
-                <a16:creationId xmlns:a16="http://schemas.microsoft.com/office/drawing/2014/main" id="{7A8E719A-D322-4D22-8810-F35407527CCC}"/>
+                <a16:creationId xmlns:a16="http://schemas.microsoft.com/office/drawing/2014/main" id="{74AF94FB-E0D6-4FD0-A3C7-FFF5E29A304C}"/>
               </a:ext>
             </a:extLst>
           </p:cNvPr>
@@ -8165,7 +9583,7 @@
           <p:cNvPr id="13" name="">
             <a:extLst xmlns:a="http://schemas.openxmlformats.org/drawingml/2006/main">
               <a:ext uri="{FF2B5EF4-FFF2-40B4-BE49-F238E27FC236}">
-                <a16:creationId xmlns:a16="http://schemas.microsoft.com/office/drawing/2014/main" id="{7090C560-A382-4475-98FF-D85A91434429}"/>
+                <a16:creationId xmlns:a16="http://schemas.microsoft.com/office/drawing/2014/main" id="{2444AED1-A68F-485E-879F-AD0981521F8B}"/>
               </a:ext>
             </a:extLst>
           </p:cNvPr>
@@ -8215,7 +9633,7 @@
           <p:cNvPr id="14" name="">
             <a:extLst xmlns:a="http://schemas.openxmlformats.org/drawingml/2006/main">
               <a:ext uri="{FF2B5EF4-FFF2-40B4-BE49-F238E27FC236}">
-                <a16:creationId xmlns:a16="http://schemas.microsoft.com/office/drawing/2014/main" id="{968F1AF6-0625-4CF3-ADCF-412B24C3E735}"/>
+                <a16:creationId xmlns:a16="http://schemas.microsoft.com/office/drawing/2014/main" id="{14ECC992-BBCC-4B8B-8888-4AE015B54C81}"/>
               </a:ext>
             </a:extLst>
           </p:cNvPr>
@@ -8265,7 +9683,7 @@
           <p:cNvPr id="15" name="">
             <a:extLst xmlns:a="http://schemas.openxmlformats.org/drawingml/2006/main">
               <a:ext uri="{FF2B5EF4-FFF2-40B4-BE49-F238E27FC236}">
-                <a16:creationId xmlns:a16="http://schemas.microsoft.com/office/drawing/2014/main" id="{7BFB3EA4-E349-4737-A24E-5D990DFDF85D}"/>
+                <a16:creationId xmlns:a16="http://schemas.microsoft.com/office/drawing/2014/main" id="{3492C950-B0FF-4E09-A996-0C619062A76A}"/>
               </a:ext>
             </a:extLst>
           </p:cNvPr>
@@ -8298,7 +9716,7 @@
           <p:cNvPr id="16" name="">
             <a:extLst xmlns:a="http://schemas.openxmlformats.org/drawingml/2006/main">
               <a:ext uri="{FF2B5EF4-FFF2-40B4-BE49-F238E27FC236}">
-                <a16:creationId xmlns:a16="http://schemas.microsoft.com/office/drawing/2014/main" id="{C6CBE7E0-18E0-4F48-85C2-870058C6F368}"/>
+                <a16:creationId xmlns:a16="http://schemas.microsoft.com/office/drawing/2014/main" id="{0204B0EB-B2AC-4CF5-842D-4A6D46C76091}"/>
               </a:ext>
             </a:extLst>
           </p:cNvPr>
@@ -8333,7 +9751,7 @@
           <p:cNvPr id="17" name="">
             <a:extLst xmlns:a="http://schemas.openxmlformats.org/drawingml/2006/main">
               <a:ext uri="{FF2B5EF4-FFF2-40B4-BE49-F238E27FC236}">
-                <a16:creationId xmlns:a16="http://schemas.microsoft.com/office/drawing/2014/main" id="{B9EB1F1A-CC0F-470D-9467-A4CE8799B822}"/>
+                <a16:creationId xmlns:a16="http://schemas.microsoft.com/office/drawing/2014/main" id="{84C77E17-A6AF-4B8D-9238-A5CA9B79F558}"/>
               </a:ext>
             </a:extLst>
           </p:cNvPr>
@@ -8383,7 +9801,7 @@
           <p:cNvPr id="18" name="">
             <a:extLst xmlns:a="http://schemas.openxmlformats.org/drawingml/2006/main">
               <a:ext uri="{FF2B5EF4-FFF2-40B4-BE49-F238E27FC236}">
-                <a16:creationId xmlns:a16="http://schemas.microsoft.com/office/drawing/2014/main" id="{1ED5A473-2D0F-406D-B301-7334D6B6C704}"/>
+                <a16:creationId xmlns:a16="http://schemas.microsoft.com/office/drawing/2014/main" id="{26D784BF-4CD6-43F3-AE2F-8AD3445A81FD}"/>
               </a:ext>
             </a:extLst>
           </p:cNvPr>
@@ -8433,7 +9851,7 @@
           <p:cNvPr id="19" name="">
             <a:extLst xmlns:a="http://schemas.openxmlformats.org/drawingml/2006/main">
               <a:ext uri="{FF2B5EF4-FFF2-40B4-BE49-F238E27FC236}">
-                <a16:creationId xmlns:a16="http://schemas.microsoft.com/office/drawing/2014/main" id="{9DE41972-432C-4C04-A7BA-C01E8DBCC1B8}"/>
+                <a16:creationId xmlns:a16="http://schemas.microsoft.com/office/drawing/2014/main" id="{E241BD28-554A-4D83-B7D6-9DB606B1CED7}"/>
               </a:ext>
             </a:extLst>
           </p:cNvPr>
@@ -8466,7 +9884,7 @@
           <p:cNvPr id="20" name="">
             <a:extLst xmlns:a="http://schemas.openxmlformats.org/drawingml/2006/main">
               <a:ext uri="{FF2B5EF4-FFF2-40B4-BE49-F238E27FC236}">
-                <a16:creationId xmlns:a16="http://schemas.microsoft.com/office/drawing/2014/main" id="{B517450C-BBCB-4011-A309-1F6445297CBD}"/>
+                <a16:creationId xmlns:a16="http://schemas.microsoft.com/office/drawing/2014/main" id="{8641CEC7-2D85-479A-B880-0A3891C9CFF7}"/>
               </a:ext>
             </a:extLst>
           </p:cNvPr>
@@ -8501,7 +9919,7 @@
           <p:cNvPr id="21" name="">
             <a:extLst xmlns:a="http://schemas.openxmlformats.org/drawingml/2006/main">
               <a:ext uri="{FF2B5EF4-FFF2-40B4-BE49-F238E27FC236}">
-                <a16:creationId xmlns:a16="http://schemas.microsoft.com/office/drawing/2014/main" id="{5F5D3BC7-1A70-42FD-96E6-3D860F8DAEF8}"/>
+                <a16:creationId xmlns:a16="http://schemas.microsoft.com/office/drawing/2014/main" id="{76308A8D-ED55-4925-9FBC-D9848F576060}"/>
               </a:ext>
             </a:extLst>
           </p:cNvPr>
@@ -8551,7 +9969,7 @@
           <p:cNvPr id="22" name="">
             <a:extLst xmlns:a="http://schemas.openxmlformats.org/drawingml/2006/main">
               <a:ext uri="{FF2B5EF4-FFF2-40B4-BE49-F238E27FC236}">
-                <a16:creationId xmlns:a16="http://schemas.microsoft.com/office/drawing/2014/main" id="{E8134094-BCF7-4960-91B5-74745AE705D4}"/>
+                <a16:creationId xmlns:a16="http://schemas.microsoft.com/office/drawing/2014/main" id="{F3F371D2-2D1E-4A25-8C76-92A7CEF345CB}"/>
               </a:ext>
             </a:extLst>
           </p:cNvPr>
@@ -8601,7 +10019,7 @@
           <p:cNvPr id="23" name="">
             <a:extLst xmlns:a="http://schemas.openxmlformats.org/drawingml/2006/main">
               <a:ext uri="{FF2B5EF4-FFF2-40B4-BE49-F238E27FC236}">
-                <a16:creationId xmlns:a16="http://schemas.microsoft.com/office/drawing/2014/main" id="{8643B0F4-9BB4-4352-9D3A-00D8011844E2}"/>
+                <a16:creationId xmlns:a16="http://schemas.microsoft.com/office/drawing/2014/main" id="{9407E5D3-171F-4029-A4E5-EDDAF6DB68DA}"/>
               </a:ext>
             </a:extLst>
           </p:cNvPr>
@@ -8651,7 +10069,7 @@
           <p:cNvPr id="24" name="">
             <a:extLst xmlns:a="http://schemas.openxmlformats.org/drawingml/2006/main">
               <a:ext uri="{FF2B5EF4-FFF2-40B4-BE49-F238E27FC236}">
-                <a16:creationId xmlns:a16="http://schemas.microsoft.com/office/drawing/2014/main" id="{7CFC9E08-2581-488A-8949-EA0C432CE245}"/>
+                <a16:creationId xmlns:a16="http://schemas.microsoft.com/office/drawing/2014/main" id="{722EABDE-C1BD-4121-899C-A541DFFA2BC0}"/>
               </a:ext>
             </a:extLst>
           </p:cNvPr>
@@ -8699,7 +10117,7 @@
     </p:spTree>
     <p:extLst>
       <p:ext uri="{BB962C8B-B14F-4D97-AF65-F5344CB8AC3E}">
-        <p14:creationId xmlns:p14="http://schemas.microsoft.com/office/powerpoint/2010/main" val="1397641988"/>
+        <p14:creationId xmlns:p14="http://schemas.microsoft.com/office/powerpoint/2010/main" val="1967235845"/>
       </p:ext>
     </p:extLst>
   </p:cSld>
@@ -8730,7 +10148,7 @@
           <p:cNvPr id="1" name="">
             <a:extLst xmlns:a="http://schemas.openxmlformats.org/drawingml/2006/main">
               <a:ext uri="{FF2B5EF4-FFF2-40B4-BE49-F238E27FC236}">
-                <a16:creationId xmlns:a16="http://schemas.microsoft.com/office/drawing/2014/main" id="{6DA17DCB-F9F2-4DED-860F-5A7C9149430C}"/>
+                <a16:creationId xmlns:a16="http://schemas.microsoft.com/office/drawing/2014/main" id="{C3FBEDB8-C823-4480-837A-D7035D42A6DA}"/>
               </a:ext>
             </a:extLst>
           </p:cNvPr>
@@ -8780,7 +10198,7 @@
           <p:cNvPr id="2" name="">
             <a:extLst xmlns:a="http://schemas.openxmlformats.org/drawingml/2006/main">
               <a:ext uri="{FF2B5EF4-FFF2-40B4-BE49-F238E27FC236}">
-                <a16:creationId xmlns:a16="http://schemas.microsoft.com/office/drawing/2014/main" id="{F773CB00-E0F0-4DC4-8E3C-9EB1EC64F634}"/>
+                <a16:creationId xmlns:a16="http://schemas.microsoft.com/office/drawing/2014/main" id="{1224C4BC-4F72-4424-B1CD-7CECF3887337}"/>
               </a:ext>
             </a:extLst>
           </p:cNvPr>
@@ -8830,7 +10248,7 @@
           <p:cNvPr id="3" name="">
             <a:extLst xmlns:a="http://schemas.openxmlformats.org/drawingml/2006/main">
               <a:ext uri="{FF2B5EF4-FFF2-40B4-BE49-F238E27FC236}">
-                <a16:creationId xmlns:a16="http://schemas.microsoft.com/office/drawing/2014/main" id="{FB4FBBE6-B314-4052-8ED4-ECFCF7161328}"/>
+                <a16:creationId xmlns:a16="http://schemas.microsoft.com/office/drawing/2014/main" id="{1330EBFA-35CD-4540-A001-2464D1122785}"/>
               </a:ext>
             </a:extLst>
           </p:cNvPr>
@@ -8863,7 +10281,7 @@
           <p:cNvPr id="4" name="">
             <a:extLst xmlns:a="http://schemas.openxmlformats.org/drawingml/2006/main">
               <a:ext uri="{FF2B5EF4-FFF2-40B4-BE49-F238E27FC236}">
-                <a16:creationId xmlns:a16="http://schemas.microsoft.com/office/drawing/2014/main" id="{CDB40279-1DBD-4790-981C-EF8DA37EE70A}"/>
+                <a16:creationId xmlns:a16="http://schemas.microsoft.com/office/drawing/2014/main" id="{170B4394-1CB9-42A7-A7AF-83146474F816}"/>
               </a:ext>
             </a:extLst>
           </p:cNvPr>
@@ -8913,7 +10331,7 @@
           <p:cNvPr id="5" name="">
             <a:extLst xmlns:a="http://schemas.openxmlformats.org/drawingml/2006/main">
               <a:ext uri="{FF2B5EF4-FFF2-40B4-BE49-F238E27FC236}">
-                <a16:creationId xmlns:a16="http://schemas.microsoft.com/office/drawing/2014/main" id="{83383E0D-DFA5-4AC2-8A8D-E27DB7FE6EF7}"/>
+                <a16:creationId xmlns:a16="http://schemas.microsoft.com/office/drawing/2014/main" id="{8F4749AF-BB6D-4B8E-8246-0A9ACB65877F}"/>
               </a:ext>
             </a:extLst>
           </p:cNvPr>
@@ -8963,7 +10381,7 @@
           <p:cNvPr id="6" name="">
             <a:extLst xmlns:a="http://schemas.openxmlformats.org/drawingml/2006/main">
               <a:ext uri="{FF2B5EF4-FFF2-40B4-BE49-F238E27FC236}">
-                <a16:creationId xmlns:a16="http://schemas.microsoft.com/office/drawing/2014/main" id="{C471E646-77F8-452C-80B9-6D3E4F5D4543}"/>
+                <a16:creationId xmlns:a16="http://schemas.microsoft.com/office/drawing/2014/main" id="{F8CDF79E-F129-45FF-B0DA-7B1E62EC68B1}"/>
               </a:ext>
             </a:extLst>
           </p:cNvPr>
@@ -8998,7 +10416,7 @@
           <p:cNvPr id="7" name="">
             <a:extLst xmlns:a="http://schemas.openxmlformats.org/drawingml/2006/main">
               <a:ext uri="{FF2B5EF4-FFF2-40B4-BE49-F238E27FC236}">
-                <a16:creationId xmlns:a16="http://schemas.microsoft.com/office/drawing/2014/main" id="{DABD1091-E711-4527-B586-75200F15CA0C}"/>
+                <a16:creationId xmlns:a16="http://schemas.microsoft.com/office/drawing/2014/main" id="{978EDDAA-978C-4E48-850A-59CE0A0DCE05}"/>
               </a:ext>
             </a:extLst>
           </p:cNvPr>
@@ -9048,7 +10466,7 @@
           <p:cNvPr id="8" name="">
             <a:extLst xmlns:a="http://schemas.openxmlformats.org/drawingml/2006/main">
               <a:ext uri="{FF2B5EF4-FFF2-40B4-BE49-F238E27FC236}">
-                <a16:creationId xmlns:a16="http://schemas.microsoft.com/office/drawing/2014/main" id="{BF14C1EE-7CA8-4AF4-AD51-9E9D2E0EAD43}"/>
+                <a16:creationId xmlns:a16="http://schemas.microsoft.com/office/drawing/2014/main" id="{FE63753C-9866-46A5-9143-D2283B9572B5}"/>
               </a:ext>
             </a:extLst>
           </p:cNvPr>
@@ -9098,7 +10516,7 @@
           <p:cNvPr id="9" name="">
             <a:extLst xmlns:a="http://schemas.openxmlformats.org/drawingml/2006/main">
               <a:ext uri="{FF2B5EF4-FFF2-40B4-BE49-F238E27FC236}">
-                <a16:creationId xmlns:a16="http://schemas.microsoft.com/office/drawing/2014/main" id="{BD477F1E-7538-4423-917D-86B5F1BEE324}"/>
+                <a16:creationId xmlns:a16="http://schemas.microsoft.com/office/drawing/2014/main" id="{4192C6D2-695B-4428-957C-3045C01BD1A0}"/>
               </a:ext>
             </a:extLst>
           </p:cNvPr>
@@ -9148,7 +10566,7 @@
           <p:cNvPr id="10" name="">
             <a:extLst xmlns:a="http://schemas.openxmlformats.org/drawingml/2006/main">
               <a:ext uri="{FF2B5EF4-FFF2-40B4-BE49-F238E27FC236}">
-                <a16:creationId xmlns:a16="http://schemas.microsoft.com/office/drawing/2014/main" id="{A3B073B7-6A83-4758-AF98-3ECE77D75B75}"/>
+                <a16:creationId xmlns:a16="http://schemas.microsoft.com/office/drawing/2014/main" id="{58E9DE28-ED8A-4AF4-B7CC-88908814A6A8}"/>
               </a:ext>
             </a:extLst>
           </p:cNvPr>
@@ -9183,7 +10601,7 @@
           <p:cNvPr id="11" name="">
             <a:extLst xmlns:a="http://schemas.openxmlformats.org/drawingml/2006/main">
               <a:ext uri="{FF2B5EF4-FFF2-40B4-BE49-F238E27FC236}">
-                <a16:creationId xmlns:a16="http://schemas.microsoft.com/office/drawing/2014/main" id="{7ADE3CA1-3216-4F67-860F-91C11FFDE954}"/>
+                <a16:creationId xmlns:a16="http://schemas.microsoft.com/office/drawing/2014/main" id="{8B80D7AA-310F-47D6-A5E3-8100D505AE43}"/>
               </a:ext>
             </a:extLst>
           </p:cNvPr>
@@ -9233,7 +10651,7 @@
           <p:cNvPr id="12" name="">
             <a:extLst xmlns:a="http://schemas.openxmlformats.org/drawingml/2006/main">
               <a:ext uri="{FF2B5EF4-FFF2-40B4-BE49-F238E27FC236}">
-                <a16:creationId xmlns:a16="http://schemas.microsoft.com/office/drawing/2014/main" id="{0C3179A8-2965-4C98-ABCF-5F0FC1FCFAC6}"/>
+                <a16:creationId xmlns:a16="http://schemas.microsoft.com/office/drawing/2014/main" id="{BC146584-6DC4-4FF1-BF8E-E6153D82A251}"/>
               </a:ext>
             </a:extLst>
           </p:cNvPr>
@@ -9283,7 +10701,7 @@
           <p:cNvPr id="13" name="">
             <a:extLst xmlns:a="http://schemas.openxmlformats.org/drawingml/2006/main">
               <a:ext uri="{FF2B5EF4-FFF2-40B4-BE49-F238E27FC236}">
-                <a16:creationId xmlns:a16="http://schemas.microsoft.com/office/drawing/2014/main" id="{236780AF-1FA6-40E4-99ED-6EB45989EC6E}"/>
+                <a16:creationId xmlns:a16="http://schemas.microsoft.com/office/drawing/2014/main" id="{A0AFAF59-262A-4FFD-896A-60D2AB727E9A}"/>
               </a:ext>
             </a:extLst>
           </p:cNvPr>
@@ -9333,7 +10751,7 @@
           <p:cNvPr id="14" name="">
             <a:extLst xmlns:a="http://schemas.openxmlformats.org/drawingml/2006/main">
               <a:ext uri="{FF2B5EF4-FFF2-40B4-BE49-F238E27FC236}">
-                <a16:creationId xmlns:a16="http://schemas.microsoft.com/office/drawing/2014/main" id="{A3D89CAF-2C7B-41F2-B92B-4DCBC81C6197}"/>
+                <a16:creationId xmlns:a16="http://schemas.microsoft.com/office/drawing/2014/main" id="{62DAD4C1-A4ED-48FF-821B-E532D078638E}"/>
               </a:ext>
             </a:extLst>
           </p:cNvPr>
@@ -9368,7 +10786,7 @@
           <p:cNvPr id="15" name="">
             <a:extLst xmlns:a="http://schemas.openxmlformats.org/drawingml/2006/main">
               <a:ext uri="{FF2B5EF4-FFF2-40B4-BE49-F238E27FC236}">
-                <a16:creationId xmlns:a16="http://schemas.microsoft.com/office/drawing/2014/main" id="{A2F4A94D-37E3-40B6-82B2-F2B92C5CAE34}"/>
+                <a16:creationId xmlns:a16="http://schemas.microsoft.com/office/drawing/2014/main" id="{7654DEAD-94CF-46C3-8B96-1229EE6AFE9B}"/>
               </a:ext>
             </a:extLst>
           </p:cNvPr>
@@ -9418,7 +10836,7 @@
           <p:cNvPr id="16" name="">
             <a:extLst xmlns:a="http://schemas.openxmlformats.org/drawingml/2006/main">
               <a:ext uri="{FF2B5EF4-FFF2-40B4-BE49-F238E27FC236}">
-                <a16:creationId xmlns:a16="http://schemas.microsoft.com/office/drawing/2014/main" id="{508663C3-7787-4D85-AD17-EB5DE06D0583}"/>
+                <a16:creationId xmlns:a16="http://schemas.microsoft.com/office/drawing/2014/main" id="{FF773853-D3AB-4C3F-B1A6-1C07AEF4DA15}"/>
               </a:ext>
             </a:extLst>
           </p:cNvPr>
@@ -9468,7 +10886,7 @@
           <p:cNvPr id="17" name="">
             <a:extLst xmlns:a="http://schemas.openxmlformats.org/drawingml/2006/main">
               <a:ext uri="{FF2B5EF4-FFF2-40B4-BE49-F238E27FC236}">
-                <a16:creationId xmlns:a16="http://schemas.microsoft.com/office/drawing/2014/main" id="{53FDB18E-C0E5-44C7-8F8A-6D919D982B9B}"/>
+                <a16:creationId xmlns:a16="http://schemas.microsoft.com/office/drawing/2014/main" id="{6C967627-40EC-414D-971B-D9B91A6BE658}"/>
               </a:ext>
             </a:extLst>
           </p:cNvPr>
@@ -9518,7 +10936,7 @@
           <p:cNvPr id="18" name="">
             <a:extLst xmlns:a="http://schemas.openxmlformats.org/drawingml/2006/main">
               <a:ext uri="{FF2B5EF4-FFF2-40B4-BE49-F238E27FC236}">
-                <a16:creationId xmlns:a16="http://schemas.microsoft.com/office/drawing/2014/main" id="{93A18BEF-62A4-4D87-B0B0-206891F7756F}"/>
+                <a16:creationId xmlns:a16="http://schemas.microsoft.com/office/drawing/2014/main" id="{5F93921F-46B8-4172-B7A4-B3D536DF67AC}"/>
               </a:ext>
             </a:extLst>
           </p:cNvPr>
@@ -9553,7 +10971,7 @@
           <p:cNvPr id="19" name="">
             <a:extLst xmlns:a="http://schemas.openxmlformats.org/drawingml/2006/main">
               <a:ext uri="{FF2B5EF4-FFF2-40B4-BE49-F238E27FC236}">
-                <a16:creationId xmlns:a16="http://schemas.microsoft.com/office/drawing/2014/main" id="{0C85A450-883F-461C-9328-AAD80ABD76CC}"/>
+                <a16:creationId xmlns:a16="http://schemas.microsoft.com/office/drawing/2014/main" id="{C36EF2E3-B1D5-4507-9F2F-EF932097635F}"/>
               </a:ext>
             </a:extLst>
           </p:cNvPr>
@@ -9603,7 +11021,7 @@
           <p:cNvPr id="20" name="">
             <a:extLst xmlns:a="http://schemas.openxmlformats.org/drawingml/2006/main">
               <a:ext uri="{FF2B5EF4-FFF2-40B4-BE49-F238E27FC236}">
-                <a16:creationId xmlns:a16="http://schemas.microsoft.com/office/drawing/2014/main" id="{AF45D67F-B266-4B52-8134-C2AFC982F64E}"/>
+                <a16:creationId xmlns:a16="http://schemas.microsoft.com/office/drawing/2014/main" id="{E43FA295-5782-41B4-828A-881C0D11506A}"/>
               </a:ext>
             </a:extLst>
           </p:cNvPr>
@@ -9653,7 +11071,7 @@
           <p:cNvPr id="21" name="">
             <a:extLst xmlns:a="http://schemas.openxmlformats.org/drawingml/2006/main">
               <a:ext uri="{FF2B5EF4-FFF2-40B4-BE49-F238E27FC236}">
-                <a16:creationId xmlns:a16="http://schemas.microsoft.com/office/drawing/2014/main" id="{D453CA7D-FF49-4F9D-B172-1C07DBB74DA1}"/>
+                <a16:creationId xmlns:a16="http://schemas.microsoft.com/office/drawing/2014/main" id="{D21A76D4-68D0-4DFA-A56F-B83A27658C3E}"/>
               </a:ext>
             </a:extLst>
           </p:cNvPr>
@@ -9703,7 +11121,7 @@
           <p:cNvPr id="22" name="">
             <a:extLst xmlns:a="http://schemas.openxmlformats.org/drawingml/2006/main">
               <a:ext uri="{FF2B5EF4-FFF2-40B4-BE49-F238E27FC236}">
-                <a16:creationId xmlns:a16="http://schemas.microsoft.com/office/drawing/2014/main" id="{D7F44C28-3288-422B-BE33-95860C147A62}"/>
+                <a16:creationId xmlns:a16="http://schemas.microsoft.com/office/drawing/2014/main" id="{A1AC5672-2237-4017-815F-BFF553F81CFB}"/>
               </a:ext>
             </a:extLst>
           </p:cNvPr>
@@ -9738,7 +11156,7 @@
           <p:cNvPr id="23" name="">
             <a:extLst xmlns:a="http://schemas.openxmlformats.org/drawingml/2006/main">
               <a:ext uri="{FF2B5EF4-FFF2-40B4-BE49-F238E27FC236}">
-                <a16:creationId xmlns:a16="http://schemas.microsoft.com/office/drawing/2014/main" id="{A6CBB8AA-F625-4B31-BC3B-D6526C915BBB}"/>
+                <a16:creationId xmlns:a16="http://schemas.microsoft.com/office/drawing/2014/main" id="{17392225-AA93-4635-AFB3-9011BB79DFFB}"/>
               </a:ext>
             </a:extLst>
           </p:cNvPr>
@@ -9788,7 +11206,7 @@
           <p:cNvPr id="24" name="">
             <a:extLst xmlns:a="http://schemas.openxmlformats.org/drawingml/2006/main">
               <a:ext uri="{FF2B5EF4-FFF2-40B4-BE49-F238E27FC236}">
-                <a16:creationId xmlns:a16="http://schemas.microsoft.com/office/drawing/2014/main" id="{FA790A87-EFDD-44F4-A574-F85EE148D29D}"/>
+                <a16:creationId xmlns:a16="http://schemas.microsoft.com/office/drawing/2014/main" id="{918DBEDA-A6A1-41A8-A7D6-35A95294BDA3}"/>
               </a:ext>
             </a:extLst>
           </p:cNvPr>
@@ -9838,7 +11256,7 @@
           <p:cNvPr id="25" name="">
             <a:extLst xmlns:a="http://schemas.openxmlformats.org/drawingml/2006/main">
               <a:ext uri="{FF2B5EF4-FFF2-40B4-BE49-F238E27FC236}">
-                <a16:creationId xmlns:a16="http://schemas.microsoft.com/office/drawing/2014/main" id="{AA275473-773F-4634-BD9B-56E97CC2514C}"/>
+                <a16:creationId xmlns:a16="http://schemas.microsoft.com/office/drawing/2014/main" id="{09BC28D8-F2D1-4F64-9A50-56D3F5E55F8F}"/>
               </a:ext>
             </a:extLst>
           </p:cNvPr>
@@ -9886,7 +11304,7 @@
     </p:spTree>
     <p:extLst>
       <p:ext uri="{BB962C8B-B14F-4D97-AF65-F5344CB8AC3E}">
-        <p14:creationId xmlns:p14="http://schemas.microsoft.com/office/powerpoint/2010/main" val="1115469075"/>
+        <p14:creationId xmlns:p14="http://schemas.microsoft.com/office/powerpoint/2010/main" val="13194797"/>
       </p:ext>
     </p:extLst>
   </p:cSld>
@@ -9917,7 +11335,7 @@
           <p:cNvPr id="1" name="">
             <a:extLst xmlns:a="http://schemas.openxmlformats.org/drawingml/2006/main">
               <a:ext uri="{FF2B5EF4-FFF2-40B4-BE49-F238E27FC236}">
-                <a16:creationId xmlns:a16="http://schemas.microsoft.com/office/drawing/2014/main" id="{E73ACE99-1F7C-448B-AC5D-A905B3AA1E40}"/>
+                <a16:creationId xmlns:a16="http://schemas.microsoft.com/office/drawing/2014/main" id="{F609547B-3523-4EE7-9695-960A6CBDCA2D}"/>
               </a:ext>
             </a:extLst>
           </p:cNvPr>
@@ -9967,7 +11385,7 @@
           <p:cNvPr id="2" name="">
             <a:extLst xmlns:a="http://schemas.openxmlformats.org/drawingml/2006/main">
               <a:ext uri="{FF2B5EF4-FFF2-40B4-BE49-F238E27FC236}">
-                <a16:creationId xmlns:a16="http://schemas.microsoft.com/office/drawing/2014/main" id="{EE5F863D-543E-4E1C-86E2-109462B7F461}"/>
+                <a16:creationId xmlns:a16="http://schemas.microsoft.com/office/drawing/2014/main" id="{D3A24E4B-8769-46B6-9FB1-AD288DF84ABB}"/>
               </a:ext>
             </a:extLst>
           </p:cNvPr>
@@ -10017,7 +11435,7 @@
           <p:cNvPr id="3" name="">
             <a:extLst xmlns:a="http://schemas.openxmlformats.org/drawingml/2006/main">
               <a:ext uri="{FF2B5EF4-FFF2-40B4-BE49-F238E27FC236}">
-                <a16:creationId xmlns:a16="http://schemas.microsoft.com/office/drawing/2014/main" id="{FEFABAE3-5CC2-49D8-8118-90DF36B3F376}"/>
+                <a16:creationId xmlns:a16="http://schemas.microsoft.com/office/drawing/2014/main" id="{951503B6-78E9-4704-B4FB-E379DF7EDCE4}"/>
               </a:ext>
             </a:extLst>
           </p:cNvPr>
@@ -10050,7 +11468,7 @@
           <p:cNvPr id="4" name="">
             <a:extLst xmlns:a="http://schemas.openxmlformats.org/drawingml/2006/main">
               <a:ext uri="{FF2B5EF4-FFF2-40B4-BE49-F238E27FC236}">
-                <a16:creationId xmlns:a16="http://schemas.microsoft.com/office/drawing/2014/main" id="{A7F37AFA-574D-4318-96D4-EC0B123C2643}"/>
+                <a16:creationId xmlns:a16="http://schemas.microsoft.com/office/drawing/2014/main" id="{EF2AB2ED-BBA0-4287-88F2-CC567D0161A7}"/>
               </a:ext>
             </a:extLst>
           </p:cNvPr>
@@ -10085,7 +11503,7 @@
           <p:cNvPr id="5" name="">
             <a:extLst xmlns:a="http://schemas.openxmlformats.org/drawingml/2006/main">
               <a:ext uri="{FF2B5EF4-FFF2-40B4-BE49-F238E27FC236}">
-                <a16:creationId xmlns:a16="http://schemas.microsoft.com/office/drawing/2014/main" id="{8F295B8F-CA98-43BA-A87D-F1945BCC5778}"/>
+                <a16:creationId xmlns:a16="http://schemas.microsoft.com/office/drawing/2014/main" id="{82057237-1E8F-446B-95CA-32278A35428D}"/>
               </a:ext>
             </a:extLst>
           </p:cNvPr>
@@ -10120,7 +11538,7 @@
           <p:cNvPr id="6" name="">
             <a:extLst xmlns:a="http://schemas.openxmlformats.org/drawingml/2006/main">
               <a:ext uri="{FF2B5EF4-FFF2-40B4-BE49-F238E27FC236}">
-                <a16:creationId xmlns:a16="http://schemas.microsoft.com/office/drawing/2014/main" id="{ADED659C-4626-4770-93A3-3D3B7E646196}"/>
+                <a16:creationId xmlns:a16="http://schemas.microsoft.com/office/drawing/2014/main" id="{6DE1E060-BC24-4E22-807B-94C01BFBDCD4}"/>
               </a:ext>
             </a:extLst>
           </p:cNvPr>
@@ -10170,7 +11588,7 @@
           <p:cNvPr id="7" name="">
             <a:extLst xmlns:a="http://schemas.openxmlformats.org/drawingml/2006/main">
               <a:ext uri="{FF2B5EF4-FFF2-40B4-BE49-F238E27FC236}">
-                <a16:creationId xmlns:a16="http://schemas.microsoft.com/office/drawing/2014/main" id="{E3202913-FC6B-4880-A350-6D0A44B364F7}"/>
+                <a16:creationId xmlns:a16="http://schemas.microsoft.com/office/drawing/2014/main" id="{E52C8A71-6BEC-4D08-B753-63152563C7FE}"/>
               </a:ext>
             </a:extLst>
           </p:cNvPr>
@@ -10203,7 +11621,7 @@
           <p:cNvPr id="8" name="">
             <a:extLst xmlns:a="http://schemas.openxmlformats.org/drawingml/2006/main">
               <a:ext uri="{FF2B5EF4-FFF2-40B4-BE49-F238E27FC236}">
-                <a16:creationId xmlns:a16="http://schemas.microsoft.com/office/drawing/2014/main" id="{168EF0DD-EF4C-485C-81EB-463B6A2C99FE}"/>
+                <a16:creationId xmlns:a16="http://schemas.microsoft.com/office/drawing/2014/main" id="{5CA8BB13-6E4D-4C01-BAE5-DAB403633C60}"/>
               </a:ext>
             </a:extLst>
           </p:cNvPr>
@@ -10253,7 +11671,7 @@
           <p:cNvPr id="9" name="">
             <a:extLst xmlns:a="http://schemas.openxmlformats.org/drawingml/2006/main">
               <a:ext uri="{FF2B5EF4-FFF2-40B4-BE49-F238E27FC236}">
-                <a16:creationId xmlns:a16="http://schemas.microsoft.com/office/drawing/2014/main" id="{51107BAE-7676-41A6-880A-0C8190E5E3A3}"/>
+                <a16:creationId xmlns:a16="http://schemas.microsoft.com/office/drawing/2014/main" id="{C6EB1F36-BF41-494F-B197-F61B35B04F5B}"/>
               </a:ext>
             </a:extLst>
           </p:cNvPr>
@@ -10286,7 +11704,7 @@
           <p:cNvPr id="10" name="">
             <a:extLst xmlns:a="http://schemas.openxmlformats.org/drawingml/2006/main">
               <a:ext uri="{FF2B5EF4-FFF2-40B4-BE49-F238E27FC236}">
-                <a16:creationId xmlns:a16="http://schemas.microsoft.com/office/drawing/2014/main" id="{F4B7477C-A8E8-4909-89F7-31EC197F7041}"/>
+                <a16:creationId xmlns:a16="http://schemas.microsoft.com/office/drawing/2014/main" id="{AD36CC33-FD94-42B3-B8A5-B1AEB7F31BC6}"/>
               </a:ext>
             </a:extLst>
           </p:cNvPr>
@@ -10336,7 +11754,7 @@
           <p:cNvPr id="11" name="">
             <a:extLst xmlns:a="http://schemas.openxmlformats.org/drawingml/2006/main">
               <a:ext uri="{FF2B5EF4-FFF2-40B4-BE49-F238E27FC236}">
-                <a16:creationId xmlns:a16="http://schemas.microsoft.com/office/drawing/2014/main" id="{2AC35FB1-2DF3-42C2-8F23-C0BB97F96572}"/>
+                <a16:creationId xmlns:a16="http://schemas.microsoft.com/office/drawing/2014/main" id="{07CE6153-350B-497F-BA40-71DDD306235D}"/>
               </a:ext>
             </a:extLst>
           </p:cNvPr>
@@ -10369,7 +11787,7 @@
           <p:cNvPr id="12" name="">
             <a:extLst xmlns:a="http://schemas.openxmlformats.org/drawingml/2006/main">
               <a:ext uri="{FF2B5EF4-FFF2-40B4-BE49-F238E27FC236}">
-                <a16:creationId xmlns:a16="http://schemas.microsoft.com/office/drawing/2014/main" id="{D8C22268-A33D-4CC4-87A8-5AF1DD5FA2AB}"/>
+                <a16:creationId xmlns:a16="http://schemas.microsoft.com/office/drawing/2014/main" id="{D1A34664-84D2-43E9-99F1-59E2EBF45C5A}"/>
               </a:ext>
             </a:extLst>
           </p:cNvPr>
@@ -10419,7 +11837,7 @@
           <p:cNvPr id="13" name="">
             <a:extLst xmlns:a="http://schemas.openxmlformats.org/drawingml/2006/main">
               <a:ext uri="{FF2B5EF4-FFF2-40B4-BE49-F238E27FC236}">
-                <a16:creationId xmlns:a16="http://schemas.microsoft.com/office/drawing/2014/main" id="{40963C1D-21E4-4C5C-87ED-A81C71E0B046}"/>
+                <a16:creationId xmlns:a16="http://schemas.microsoft.com/office/drawing/2014/main" id="{56836A09-7C27-4EBF-91DD-673F5D8C04BC}"/>
               </a:ext>
             </a:extLst>
           </p:cNvPr>
@@ -10452,7 +11870,7 @@
           <p:cNvPr id="14" name="">
             <a:extLst xmlns:a="http://schemas.openxmlformats.org/drawingml/2006/main">
               <a:ext uri="{FF2B5EF4-FFF2-40B4-BE49-F238E27FC236}">
-                <a16:creationId xmlns:a16="http://schemas.microsoft.com/office/drawing/2014/main" id="{62A9B67F-E9E9-4BBA-B7A9-031DA9D6F51C}"/>
+                <a16:creationId xmlns:a16="http://schemas.microsoft.com/office/drawing/2014/main" id="{040C67C9-34E3-4050-9865-D4EAA7B68C7E}"/>
               </a:ext>
             </a:extLst>
           </p:cNvPr>
@@ -10502,7 +11920,7 @@
           <p:cNvPr id="15" name="">
             <a:extLst xmlns:a="http://schemas.openxmlformats.org/drawingml/2006/main">
               <a:ext uri="{FF2B5EF4-FFF2-40B4-BE49-F238E27FC236}">
-                <a16:creationId xmlns:a16="http://schemas.microsoft.com/office/drawing/2014/main" id="{13695B75-E4BD-4D92-B9F1-A77A00AAB7E3}"/>
+                <a16:creationId xmlns:a16="http://schemas.microsoft.com/office/drawing/2014/main" id="{8078A2B4-6B62-46FC-848B-FF2261C89204}"/>
               </a:ext>
             </a:extLst>
           </p:cNvPr>
@@ -10552,7 +11970,7 @@
           <p:cNvPr id="16" name="">
             <a:extLst xmlns:a="http://schemas.openxmlformats.org/drawingml/2006/main">
               <a:ext uri="{FF2B5EF4-FFF2-40B4-BE49-F238E27FC236}">
-                <a16:creationId xmlns:a16="http://schemas.microsoft.com/office/drawing/2014/main" id="{91FF046F-90C7-42BA-9474-30C49383019E}"/>
+                <a16:creationId xmlns:a16="http://schemas.microsoft.com/office/drawing/2014/main" id="{01461CE4-53E3-48B9-90CE-F43F16778D88}"/>
               </a:ext>
             </a:extLst>
           </p:cNvPr>
@@ -10585,7 +12003,7 @@
           <p:cNvPr id="17" name="">
             <a:extLst xmlns:a="http://schemas.openxmlformats.org/drawingml/2006/main">
               <a:ext uri="{FF2B5EF4-FFF2-40B4-BE49-F238E27FC236}">
-                <a16:creationId xmlns:a16="http://schemas.microsoft.com/office/drawing/2014/main" id="{5FC493D2-C9F2-42BA-B641-FC49C0C5D6BA}"/>
+                <a16:creationId xmlns:a16="http://schemas.microsoft.com/office/drawing/2014/main" id="{6AADD1E0-C458-447A-B502-45B1180CAA7F}"/>
               </a:ext>
             </a:extLst>
           </p:cNvPr>
@@ -10635,7 +12053,7 @@
           <p:cNvPr id="18" name="">
             <a:extLst xmlns:a="http://schemas.openxmlformats.org/drawingml/2006/main">
               <a:ext uri="{FF2B5EF4-FFF2-40B4-BE49-F238E27FC236}">
-                <a16:creationId xmlns:a16="http://schemas.microsoft.com/office/drawing/2014/main" id="{48AA8ED3-2384-4469-8CB9-AE2FEC826400}"/>
+                <a16:creationId xmlns:a16="http://schemas.microsoft.com/office/drawing/2014/main" id="{E072D7CB-81AE-4126-AEA0-1B337CD6C795}"/>
               </a:ext>
             </a:extLst>
           </p:cNvPr>
@@ -10668,7 +12086,7 @@
           <p:cNvPr id="19" name="">
             <a:extLst xmlns:a="http://schemas.openxmlformats.org/drawingml/2006/main">
               <a:ext uri="{FF2B5EF4-FFF2-40B4-BE49-F238E27FC236}">
-                <a16:creationId xmlns:a16="http://schemas.microsoft.com/office/drawing/2014/main" id="{DC3CC34D-2F79-40BD-A617-C620B68DF7E5}"/>
+                <a16:creationId xmlns:a16="http://schemas.microsoft.com/office/drawing/2014/main" id="{73B4B5E4-7BF0-4DDE-8C31-A07D927375EC}"/>
               </a:ext>
             </a:extLst>
           </p:cNvPr>
@@ -10718,7 +12136,7 @@
           <p:cNvPr id="20" name="">
             <a:extLst xmlns:a="http://schemas.openxmlformats.org/drawingml/2006/main">
               <a:ext uri="{FF2B5EF4-FFF2-40B4-BE49-F238E27FC236}">
-                <a16:creationId xmlns:a16="http://schemas.microsoft.com/office/drawing/2014/main" id="{04086C31-7B3C-4D7B-9A79-A0355E0050D1}"/>
+                <a16:creationId xmlns:a16="http://schemas.microsoft.com/office/drawing/2014/main" id="{9FE7BB75-24F1-4126-9C52-E844260E8C9E}"/>
               </a:ext>
             </a:extLst>
           </p:cNvPr>
@@ -10751,7 +12169,7 @@
           <p:cNvPr id="21" name="">
             <a:extLst xmlns:a="http://schemas.openxmlformats.org/drawingml/2006/main">
               <a:ext uri="{FF2B5EF4-FFF2-40B4-BE49-F238E27FC236}">
-                <a16:creationId xmlns:a16="http://schemas.microsoft.com/office/drawing/2014/main" id="{3AA6AA9A-1539-48F0-885D-B1445FA5F9E0}"/>
+                <a16:creationId xmlns:a16="http://schemas.microsoft.com/office/drawing/2014/main" id="{CB0BE69A-6660-4977-82B7-08AE1C2A88BF}"/>
               </a:ext>
             </a:extLst>
           </p:cNvPr>
@@ -10801,7 +12219,7 @@
           <p:cNvPr id="22" name="">
             <a:extLst xmlns:a="http://schemas.openxmlformats.org/drawingml/2006/main">
               <a:ext uri="{FF2B5EF4-FFF2-40B4-BE49-F238E27FC236}">
-                <a16:creationId xmlns:a16="http://schemas.microsoft.com/office/drawing/2014/main" id="{DBF2615C-5DE0-4D6A-B28C-BD32964AF6CB}"/>
+                <a16:creationId xmlns:a16="http://schemas.microsoft.com/office/drawing/2014/main" id="{2E1648A8-63F3-4BA6-8FF8-65B0B04921A7}"/>
               </a:ext>
             </a:extLst>
           </p:cNvPr>
@@ -10834,7 +12252,7 @@
           <p:cNvPr id="23" name="">
             <a:extLst xmlns:a="http://schemas.openxmlformats.org/drawingml/2006/main">
               <a:ext uri="{FF2B5EF4-FFF2-40B4-BE49-F238E27FC236}">
-                <a16:creationId xmlns:a16="http://schemas.microsoft.com/office/drawing/2014/main" id="{B9ADE4BC-6212-4B39-A796-4B5994F4B514}"/>
+                <a16:creationId xmlns:a16="http://schemas.microsoft.com/office/drawing/2014/main" id="{9E4A5FA7-B70B-4C55-970D-A344222D9349}"/>
               </a:ext>
             </a:extLst>
           </p:cNvPr>
@@ -10884,7 +12302,7 @@
           <p:cNvPr id="24" name="">
             <a:extLst xmlns:a="http://schemas.openxmlformats.org/drawingml/2006/main">
               <a:ext uri="{FF2B5EF4-FFF2-40B4-BE49-F238E27FC236}">
-                <a16:creationId xmlns:a16="http://schemas.microsoft.com/office/drawing/2014/main" id="{1BAD517F-A257-42CB-BEB6-9FD22A4FC824}"/>
+                <a16:creationId xmlns:a16="http://schemas.microsoft.com/office/drawing/2014/main" id="{8F8B72D7-FC7E-41C6-9898-361F52293CD7}"/>
               </a:ext>
             </a:extLst>
           </p:cNvPr>
@@ -10934,7 +12352,7 @@
           <p:cNvPr id="25" name="">
             <a:extLst xmlns:a="http://schemas.openxmlformats.org/drawingml/2006/main">
               <a:ext uri="{FF2B5EF4-FFF2-40B4-BE49-F238E27FC236}">
-                <a16:creationId xmlns:a16="http://schemas.microsoft.com/office/drawing/2014/main" id="{A304430F-ECE6-468C-812C-220EA7D6C39F}"/>
+                <a16:creationId xmlns:a16="http://schemas.microsoft.com/office/drawing/2014/main" id="{8A6A66D4-9061-42C1-9B8F-D85A0C228A6F}"/>
               </a:ext>
             </a:extLst>
           </p:cNvPr>
@@ -10982,7 +12400,7 @@
     </p:spTree>
     <p:extLst>
       <p:ext uri="{BB962C8B-B14F-4D97-AF65-F5344CB8AC3E}">
-        <p14:creationId xmlns:p14="http://schemas.microsoft.com/office/powerpoint/2010/main" val="1867267580"/>
+        <p14:creationId xmlns:p14="http://schemas.microsoft.com/office/powerpoint/2010/main" val="1740912931"/>
       </p:ext>
     </p:extLst>
   </p:cSld>
@@ -11013,7 +12431,7 @@
           <p:cNvPr id="1" name="">
             <a:extLst xmlns:a="http://schemas.openxmlformats.org/drawingml/2006/main">
               <a:ext uri="{FF2B5EF4-FFF2-40B4-BE49-F238E27FC236}">
-                <a16:creationId xmlns:a16="http://schemas.microsoft.com/office/drawing/2014/main" id="{788589F9-F171-4677-B219-03CD69311B67}"/>
+                <a16:creationId xmlns:a16="http://schemas.microsoft.com/office/drawing/2014/main" id="{DB01A4E2-87B4-4274-B239-6339A0A15481}"/>
               </a:ext>
             </a:extLst>
           </p:cNvPr>
@@ -11063,7 +12481,7 @@
           <p:cNvPr id="2" name="">
             <a:extLst xmlns:a="http://schemas.openxmlformats.org/drawingml/2006/main">
               <a:ext uri="{FF2B5EF4-FFF2-40B4-BE49-F238E27FC236}">
-                <a16:creationId xmlns:a16="http://schemas.microsoft.com/office/drawing/2014/main" id="{C0CAF648-2A5B-4BA9-B6DB-4DFC7F377A83}"/>
+                <a16:creationId xmlns:a16="http://schemas.microsoft.com/office/drawing/2014/main" id="{2B227CF0-955C-4342-9120-07DA302187FD}"/>
               </a:ext>
             </a:extLst>
           </p:cNvPr>
@@ -11113,7 +12531,7 @@
           <p:cNvPr id="3" name="">
             <a:extLst xmlns:a="http://schemas.openxmlformats.org/drawingml/2006/main">
               <a:ext uri="{FF2B5EF4-FFF2-40B4-BE49-F238E27FC236}">
-                <a16:creationId xmlns:a16="http://schemas.microsoft.com/office/drawing/2014/main" id="{DB752222-8596-437B-BD5D-AEBFCD0272F1}"/>
+                <a16:creationId xmlns:a16="http://schemas.microsoft.com/office/drawing/2014/main" id="{E55BEADB-5CEA-4292-8FDC-A8B7CD574386}"/>
               </a:ext>
             </a:extLst>
           </p:cNvPr>
@@ -11146,7 +12564,7 @@
           <p:cNvPr id="4" name="">
             <a:extLst xmlns:a="http://schemas.openxmlformats.org/drawingml/2006/main">
               <a:ext uri="{FF2B5EF4-FFF2-40B4-BE49-F238E27FC236}">
-                <a16:creationId xmlns:a16="http://schemas.microsoft.com/office/drawing/2014/main" id="{67692990-4C04-432A-820F-BB1B0C6A1BAB}"/>
+                <a16:creationId xmlns:a16="http://schemas.microsoft.com/office/drawing/2014/main" id="{A1214154-7411-4D8E-B61C-44B1464C8C58}"/>
               </a:ext>
             </a:extLst>
           </p:cNvPr>
@@ -11181,7 +12599,7 @@
           <p:cNvPr id="5" name="">
             <a:extLst xmlns:a="http://schemas.openxmlformats.org/drawingml/2006/main">
               <a:ext uri="{FF2B5EF4-FFF2-40B4-BE49-F238E27FC236}">
-                <a16:creationId xmlns:a16="http://schemas.microsoft.com/office/drawing/2014/main" id="{1A15CB48-5CA7-425C-AFC4-1A9A5FC0C958}"/>
+                <a16:creationId xmlns:a16="http://schemas.microsoft.com/office/drawing/2014/main" id="{53D6D3CD-40C9-4BED-8DD6-566E730C33F7}"/>
               </a:ext>
             </a:extLst>
           </p:cNvPr>
@@ -11231,7 +12649,7 @@
           <p:cNvPr id="6" name="">
             <a:extLst xmlns:a="http://schemas.openxmlformats.org/drawingml/2006/main">
               <a:ext uri="{FF2B5EF4-FFF2-40B4-BE49-F238E27FC236}">
-                <a16:creationId xmlns:a16="http://schemas.microsoft.com/office/drawing/2014/main" id="{7038DEE0-1E2C-4EB6-86B7-43BFAA82E1B5}"/>
+                <a16:creationId xmlns:a16="http://schemas.microsoft.com/office/drawing/2014/main" id="{DC50041B-390E-4862-9D6A-C06DE31EF8AB}"/>
               </a:ext>
             </a:extLst>
           </p:cNvPr>
@@ -11281,7 +12699,7 @@
           <p:cNvPr id="7" name="">
             <a:extLst xmlns:a="http://schemas.openxmlformats.org/drawingml/2006/main">
               <a:ext uri="{FF2B5EF4-FFF2-40B4-BE49-F238E27FC236}">
-                <a16:creationId xmlns:a16="http://schemas.microsoft.com/office/drawing/2014/main" id="{6A0CC0EB-498B-4528-8F61-9B30A88DEF89}"/>
+                <a16:creationId xmlns:a16="http://schemas.microsoft.com/office/drawing/2014/main" id="{4B5FB042-BBD3-4D86-8F66-DC2EDA3AE9F5}"/>
               </a:ext>
             </a:extLst>
           </p:cNvPr>
@@ -11316,7 +12734,7 @@
           <p:cNvPr id="8" name="">
             <a:extLst xmlns:a="http://schemas.openxmlformats.org/drawingml/2006/main">
               <a:ext uri="{FF2B5EF4-FFF2-40B4-BE49-F238E27FC236}">
-                <a16:creationId xmlns:a16="http://schemas.microsoft.com/office/drawing/2014/main" id="{4B099623-7577-4619-B434-1DDD3EFE25F1}"/>
+                <a16:creationId xmlns:a16="http://schemas.microsoft.com/office/drawing/2014/main" id="{D22B9F67-D87A-4DA7-85FD-95CCF63FA66C}"/>
               </a:ext>
             </a:extLst>
           </p:cNvPr>
@@ -11366,7 +12784,7 @@
           <p:cNvPr id="9" name="">
             <a:extLst xmlns:a="http://schemas.openxmlformats.org/drawingml/2006/main">
               <a:ext uri="{FF2B5EF4-FFF2-40B4-BE49-F238E27FC236}">
-                <a16:creationId xmlns:a16="http://schemas.microsoft.com/office/drawing/2014/main" id="{FCD66766-8220-4634-A5FC-F9FB59BB68FB}"/>
+                <a16:creationId xmlns:a16="http://schemas.microsoft.com/office/drawing/2014/main" id="{685592C8-5EF5-4B27-AFEE-9987BB789FA0}"/>
               </a:ext>
             </a:extLst>
           </p:cNvPr>
@@ -11416,7 +12834,7 @@
           <p:cNvPr id="10" name="">
             <a:extLst xmlns:a="http://schemas.openxmlformats.org/drawingml/2006/main">
               <a:ext uri="{FF2B5EF4-FFF2-40B4-BE49-F238E27FC236}">
-                <a16:creationId xmlns:a16="http://schemas.microsoft.com/office/drawing/2014/main" id="{DCD0B807-B1C8-4B8C-983F-839688FF8179}"/>
+                <a16:creationId xmlns:a16="http://schemas.microsoft.com/office/drawing/2014/main" id="{1612F09C-B6CE-4AAF-B33E-2E40E45105F8}"/>
               </a:ext>
             </a:extLst>
           </p:cNvPr>
@@ -11451,7 +12869,7 @@
           <p:cNvPr id="11" name="">
             <a:extLst xmlns:a="http://schemas.openxmlformats.org/drawingml/2006/main">
               <a:ext uri="{FF2B5EF4-FFF2-40B4-BE49-F238E27FC236}">
-                <a16:creationId xmlns:a16="http://schemas.microsoft.com/office/drawing/2014/main" id="{8485F039-CBDF-458F-9774-3FCDFC56DBAB}"/>
+                <a16:creationId xmlns:a16="http://schemas.microsoft.com/office/drawing/2014/main" id="{556C8818-2F0A-4B58-B14F-CCF69B9685F9}"/>
               </a:ext>
             </a:extLst>
           </p:cNvPr>
@@ -11501,7 +12919,7 @@
           <p:cNvPr id="12" name="">
             <a:extLst xmlns:a="http://schemas.openxmlformats.org/drawingml/2006/main">
               <a:ext uri="{FF2B5EF4-FFF2-40B4-BE49-F238E27FC236}">
-                <a16:creationId xmlns:a16="http://schemas.microsoft.com/office/drawing/2014/main" id="{9271D0AA-A8A1-4A08-8498-476670DC7056}"/>
+                <a16:creationId xmlns:a16="http://schemas.microsoft.com/office/drawing/2014/main" id="{4FBB9CF9-B99B-41A5-B0C1-3111F45369D7}"/>
               </a:ext>
             </a:extLst>
           </p:cNvPr>
@@ -11551,7 +12969,7 @@
           <p:cNvPr id="13" name="">
             <a:extLst xmlns:a="http://schemas.openxmlformats.org/drawingml/2006/main">
               <a:ext uri="{FF2B5EF4-FFF2-40B4-BE49-F238E27FC236}">
-                <a16:creationId xmlns:a16="http://schemas.microsoft.com/office/drawing/2014/main" id="{77843572-DCBB-4C4C-BA60-EA4E865A315A}"/>
+                <a16:creationId xmlns:a16="http://schemas.microsoft.com/office/drawing/2014/main" id="{CC16C2E5-0FB1-43C7-8EF4-26F0E345E95A}"/>
               </a:ext>
             </a:extLst>
           </p:cNvPr>
@@ -11586,7 +13004,7 @@
           <p:cNvPr id="14" name="">
             <a:extLst xmlns:a="http://schemas.openxmlformats.org/drawingml/2006/main">
               <a:ext uri="{FF2B5EF4-FFF2-40B4-BE49-F238E27FC236}">
-                <a16:creationId xmlns:a16="http://schemas.microsoft.com/office/drawing/2014/main" id="{E70C9F15-11E3-45ED-8351-B9DF27BEC085}"/>
+                <a16:creationId xmlns:a16="http://schemas.microsoft.com/office/drawing/2014/main" id="{FF7586A7-7686-4B17-A966-7B39726D41A0}"/>
               </a:ext>
             </a:extLst>
           </p:cNvPr>
@@ -11636,7 +13054,7 @@
           <p:cNvPr id="15" name="">
             <a:extLst xmlns:a="http://schemas.openxmlformats.org/drawingml/2006/main">
               <a:ext uri="{FF2B5EF4-FFF2-40B4-BE49-F238E27FC236}">
-                <a16:creationId xmlns:a16="http://schemas.microsoft.com/office/drawing/2014/main" id="{B06E77BB-B37A-49E1-851C-2AFCF6CB5C00}"/>
+                <a16:creationId xmlns:a16="http://schemas.microsoft.com/office/drawing/2014/main" id="{25CD1286-B3A9-4AA6-A461-A594236A071B}"/>
               </a:ext>
             </a:extLst>
           </p:cNvPr>
@@ -11686,7 +13104,7 @@
           <p:cNvPr id="16" name="">
             <a:extLst xmlns:a="http://schemas.openxmlformats.org/drawingml/2006/main">
               <a:ext uri="{FF2B5EF4-FFF2-40B4-BE49-F238E27FC236}">
-                <a16:creationId xmlns:a16="http://schemas.microsoft.com/office/drawing/2014/main" id="{181AE147-4488-4C69-936D-55A4958CC913}"/>
+                <a16:creationId xmlns:a16="http://schemas.microsoft.com/office/drawing/2014/main" id="{FE4AA170-55D1-4A58-8544-7B65115A6B85}"/>
               </a:ext>
             </a:extLst>
           </p:cNvPr>
@@ -11736,7 +13154,7 @@
           <p:cNvPr id="17" name="">
             <a:extLst xmlns:a="http://schemas.openxmlformats.org/drawingml/2006/main">
               <a:ext uri="{FF2B5EF4-FFF2-40B4-BE49-F238E27FC236}">
-                <a16:creationId xmlns:a16="http://schemas.microsoft.com/office/drawing/2014/main" id="{C086AA8B-5527-4676-9562-A749D6E86961}"/>
+                <a16:creationId xmlns:a16="http://schemas.microsoft.com/office/drawing/2014/main" id="{FE34566A-26CE-4BCF-B062-7B3B15C9697A}"/>
               </a:ext>
             </a:extLst>
           </p:cNvPr>
@@ -11786,7 +13204,7 @@
           <p:cNvPr id="18" name="">
             <a:extLst xmlns:a="http://schemas.openxmlformats.org/drawingml/2006/main">
               <a:ext uri="{FF2B5EF4-FFF2-40B4-BE49-F238E27FC236}">
-                <a16:creationId xmlns:a16="http://schemas.microsoft.com/office/drawing/2014/main" id="{3BC58E26-912B-435A-B476-89A4367EFA53}"/>
+                <a16:creationId xmlns:a16="http://schemas.microsoft.com/office/drawing/2014/main" id="{A83F6096-4012-4B9A-B088-351B50B445BC}"/>
               </a:ext>
             </a:extLst>
           </p:cNvPr>
@@ -11834,7 +13252,7 @@
     </p:spTree>
     <p:extLst>
       <p:ext uri="{BB962C8B-B14F-4D97-AF65-F5344CB8AC3E}">
-        <p14:creationId xmlns:p14="http://schemas.microsoft.com/office/powerpoint/2010/main" val="960429095"/>
+        <p14:creationId xmlns:p14="http://schemas.microsoft.com/office/powerpoint/2010/main" val="2024039742"/>
       </p:ext>
     </p:extLst>
   </p:cSld>

--- a/docs/submission-preselection/deck/anker-SenseLoop-答辩材料.pptx
+++ b/docs/submission-preselection/deck/anker-SenseLoop-答辩材料.pptx
@@ -2,23 +2,23 @@
 <file path=ppt/presentation.xml><?xml version="1.0" encoding="utf-8"?>
 <p:presentation xmlns:p="http://schemas.openxmlformats.org/presentationml/2006/main">
   <p:sldMasterIdLst>
-    <p:sldMasterId xmlns:r="http://schemas.openxmlformats.org/officeDocument/2006/relationships" id="2147483648" r:id="Rb02c8cf5a020433f"/>
+    <p:sldMasterId xmlns:r="http://schemas.openxmlformats.org/officeDocument/2006/relationships" id="2147483648" r:id="R6cff8652562844fb"/>
   </p:sldMasterIdLst>
   <p:notesMasterIdLst>
-    <p:notesMasterId xmlns:r="http://schemas.openxmlformats.org/officeDocument/2006/relationships" r:id="Rda829d647a4a4446"/>
+    <p:notesMasterId xmlns:r="http://schemas.openxmlformats.org/officeDocument/2006/relationships" r:id="R6a637c19e213479c"/>
   </p:notesMasterIdLst>
   <p:sldIdLst>
-    <p:sldId xmlns:r="http://schemas.openxmlformats.org/officeDocument/2006/relationships" id="256" r:id="R9d45c6c9b89647d0"/>
-    <p:sldId xmlns:r="http://schemas.openxmlformats.org/officeDocument/2006/relationships" id="257" r:id="R3c5e23acc2264d4a"/>
-    <p:sldId xmlns:r="http://schemas.openxmlformats.org/officeDocument/2006/relationships" id="258" r:id="R623c78e1b1ea4f3d"/>
-    <p:sldId xmlns:r="http://schemas.openxmlformats.org/officeDocument/2006/relationships" id="259" r:id="Rb698886224a24735"/>
-    <p:sldId xmlns:r="http://schemas.openxmlformats.org/officeDocument/2006/relationships" id="260" r:id="R00d49fa5667849cb"/>
-    <p:sldId xmlns:r="http://schemas.openxmlformats.org/officeDocument/2006/relationships" id="261" r:id="R0647c08a0dd7444c"/>
-    <p:sldId xmlns:r="http://schemas.openxmlformats.org/officeDocument/2006/relationships" id="262" r:id="R72a06317dd68454e"/>
-    <p:sldId xmlns:r="http://schemas.openxmlformats.org/officeDocument/2006/relationships" id="263" r:id="Rb9c9971b019b4869"/>
-    <p:sldId xmlns:r="http://schemas.openxmlformats.org/officeDocument/2006/relationships" id="264" r:id="Ra8c217be0c39456e"/>
-    <p:sldId xmlns:r="http://schemas.openxmlformats.org/officeDocument/2006/relationships" id="265" r:id="R81e7cc299dd64043"/>
-    <p:sldId xmlns:r="http://schemas.openxmlformats.org/officeDocument/2006/relationships" id="266" r:id="R0413fd1ebb0c4736"/>
+    <p:sldId xmlns:r="http://schemas.openxmlformats.org/officeDocument/2006/relationships" id="256" r:id="R3cd007141546429f"/>
+    <p:sldId xmlns:r="http://schemas.openxmlformats.org/officeDocument/2006/relationships" id="257" r:id="Ra863cf5605e84545"/>
+    <p:sldId xmlns:r="http://schemas.openxmlformats.org/officeDocument/2006/relationships" id="258" r:id="Ra20bf9733be94eb0"/>
+    <p:sldId xmlns:r="http://schemas.openxmlformats.org/officeDocument/2006/relationships" id="259" r:id="R82e9ec04fd7143bd"/>
+    <p:sldId xmlns:r="http://schemas.openxmlformats.org/officeDocument/2006/relationships" id="260" r:id="Rf29c17cd20184b75"/>
+    <p:sldId xmlns:r="http://schemas.openxmlformats.org/officeDocument/2006/relationships" id="261" r:id="Readf5660832e4838"/>
+    <p:sldId xmlns:r="http://schemas.openxmlformats.org/officeDocument/2006/relationships" id="262" r:id="R169f9bc358a54c6f"/>
+    <p:sldId xmlns:r="http://schemas.openxmlformats.org/officeDocument/2006/relationships" id="263" r:id="R4491cb23d0554496"/>
+    <p:sldId xmlns:r="http://schemas.openxmlformats.org/officeDocument/2006/relationships" id="264" r:id="Re940ee2e8d944a7d"/>
+    <p:sldId xmlns:r="http://schemas.openxmlformats.org/officeDocument/2006/relationships" id="265" r:id="Re2fe1844f1774b44"/>
+    <p:sldId xmlns:r="http://schemas.openxmlformats.org/officeDocument/2006/relationships" id="266" r:id="R1ea2abb30183493e"/>
   </p:sldIdLst>
   <p:sldSz cx="12192000" cy="6858000"/>
   <p:notesSz cx="6858000" cy="9144000"/>
@@ -1271,7 +1271,7 @@
   </p:cSld>
   <p:clrMap bg1="lt1" tx1="dk1" bg2="lt2" tx2="dk2" accent1="accent1" accent2="accent2" accent3="accent3" accent4="accent4" accent5="accent5" accent6="accent6" hlink="hlink" folHlink="folHlink"/>
   <p:sldLayoutIdLst>
-    <p:sldLayoutId xmlns:r="http://schemas.openxmlformats.org/officeDocument/2006/relationships" id="2147483649" r:id="R384fe94b3e0d4778"/>
+    <p:sldLayoutId xmlns:r="http://schemas.openxmlformats.org/officeDocument/2006/relationships" id="2147483649" r:id="Refd9841d2ce6426a"/>
   </p:sldLayoutIdLst>
   <p:txStyles>
     <p:titleStyle>
@@ -1819,14 +1819,14 @@
       </p:grpSpPr>
       <p:pic>
         <p:nvPicPr>
-          <p:cNvPr id="20" name=""/>
+          <p:cNvPr id="21" name=""/>
           <p:cNvPicPr>
             <a:picLocks xmlns:a="http://schemas.openxmlformats.org/drawingml/2006/main" noChangeAspect="1"/>
           </p:cNvPicPr>
           <p:nvPr/>
         </p:nvPicPr>
         <p:blipFill>
-          <a:blip xmlns:r="http://schemas.openxmlformats.org/officeDocument/2006/relationships" xmlns:a="http://schemas.openxmlformats.org/drawingml/2006/main" r:embed="R831d9d5a225a4a3d"/>
+          <a:blip xmlns:r="http://schemas.openxmlformats.org/officeDocument/2006/relationships" xmlns:a="http://schemas.openxmlformats.org/drawingml/2006/main" r:embed="R504571c7f0244824"/>
           <a:stretch xmlns:a="http://schemas.openxmlformats.org/drawingml/2006/main"/>
         </p:blipFill>
         <p:spPr>
@@ -1872,6 +1872,7 @@
           <a:lstStyle xmlns:a="http://schemas.openxmlformats.org/drawingml/2006/main"/>
           <a:p xmlns:a="http://schemas.openxmlformats.org/drawingml/2006/main">
             <a:pPr algn="l">
+              <a:buNone/>
               <a:defRPr sz="4050" b="1">
                 <a:solidFill>
                   <a:srgbClr val="10201A"/>
@@ -1922,6 +1923,7 @@
           <a:lstStyle xmlns:a="http://schemas.openxmlformats.org/drawingml/2006/main"/>
           <a:p xmlns:a="http://schemas.openxmlformats.org/drawingml/2006/main">
             <a:pPr algn="l">
+              <a:buNone/>
               <a:defRPr sz="2100" b="0">
                 <a:solidFill>
                   <a:srgbClr val="587068"/>
@@ -2007,6 +2009,7 @@
           <a:lstStyle xmlns:a="http://schemas.openxmlformats.org/drawingml/2006/main"/>
           <a:p xmlns:a="http://schemas.openxmlformats.org/drawingml/2006/main">
             <a:pPr algn="ctr">
+              <a:buNone/>
               <a:defRPr sz="1125" b="1">
                 <a:solidFill>
                   <a:srgbClr val="10201A"/>
@@ -2092,6 +2095,7 @@
           <a:lstStyle xmlns:a="http://schemas.openxmlformats.org/drawingml/2006/main"/>
           <a:p xmlns:a="http://schemas.openxmlformats.org/drawingml/2006/main">
             <a:pPr algn="ctr">
+              <a:buNone/>
               <a:defRPr sz="1125" b="1">
                 <a:solidFill>
                   <a:srgbClr val="10201A"/>
@@ -2247,6 +2251,7 @@
           <a:lstStyle xmlns:a="http://schemas.openxmlformats.org/drawingml/2006/main"/>
           <a:p xmlns:a="http://schemas.openxmlformats.org/drawingml/2006/main">
             <a:pPr algn="l">
+              <a:buNone/>
               <a:defRPr sz="2025" b="1">
                 <a:solidFill>
                   <a:srgbClr val="38A169"/>
@@ -2297,6 +2302,7 @@
           <a:lstStyle xmlns:a="http://schemas.openxmlformats.org/drawingml/2006/main"/>
           <a:p xmlns:a="http://schemas.openxmlformats.org/drawingml/2006/main">
             <a:pPr algn="l">
+              <a:buNone/>
               <a:defRPr sz="1350" b="0">
                 <a:solidFill>
                   <a:srgbClr val="587068"/>
@@ -2347,6 +2353,7 @@
           <a:lstStyle xmlns:a="http://schemas.openxmlformats.org/drawingml/2006/main"/>
           <a:p xmlns:a="http://schemas.openxmlformats.org/drawingml/2006/main">
             <a:pPr algn="l">
+              <a:buNone/>
               <a:defRPr sz="2025" b="1">
                 <a:solidFill>
                   <a:srgbClr val="3B82F6"/>
@@ -2397,6 +2404,7 @@
           <a:lstStyle xmlns:a="http://schemas.openxmlformats.org/drawingml/2006/main"/>
           <a:p xmlns:a="http://schemas.openxmlformats.org/drawingml/2006/main">
             <a:pPr algn="l">
+              <a:buNone/>
               <a:defRPr sz="1350" b="0">
                 <a:solidFill>
                   <a:srgbClr val="587068"/>
@@ -2447,6 +2455,7 @@
           <a:lstStyle xmlns:a="http://schemas.openxmlformats.org/drawingml/2006/main"/>
           <a:p xmlns:a="http://schemas.openxmlformats.org/drawingml/2006/main">
             <a:pPr algn="l">
+              <a:buNone/>
               <a:defRPr sz="2025" b="1">
                 <a:solidFill>
                   <a:srgbClr val="C87918"/>
@@ -2497,6 +2506,7 @@
           <a:lstStyle xmlns:a="http://schemas.openxmlformats.org/drawingml/2006/main"/>
           <a:p xmlns:a="http://schemas.openxmlformats.org/drawingml/2006/main">
             <a:pPr algn="l">
+              <a:buNone/>
               <a:defRPr sz="1350" b="0">
                 <a:solidFill>
                   <a:srgbClr val="587068"/>
@@ -2613,6 +2623,7 @@
           <a:lstStyle xmlns:a="http://schemas.openxmlformats.org/drawingml/2006/main"/>
           <a:p xmlns:a="http://schemas.openxmlformats.org/drawingml/2006/main">
             <a:pPr algn="l">
+              <a:buNone/>
               <a:defRPr sz="1350" b="0">
                 <a:solidFill>
                   <a:srgbClr val="587068"/>
@@ -2692,6 +2703,7 @@
           <a:lstStyle xmlns:a="http://schemas.openxmlformats.org/drawingml/2006/main"/>
           <a:p xmlns:a="http://schemas.openxmlformats.org/drawingml/2006/main">
             <a:pPr algn="l">
+              <a:buNone/>
               <a:defRPr sz="2850" b="1">
                 <a:solidFill>
                   <a:srgbClr val="10201A"/>
@@ -2742,6 +2754,7 @@
           <a:lstStyle xmlns:a="http://schemas.openxmlformats.org/drawingml/2006/main"/>
           <a:p xmlns:a="http://schemas.openxmlformats.org/drawingml/2006/main">
             <a:pPr algn="l">
+              <a:buNone/>
               <a:defRPr sz="1350" b="0">
                 <a:solidFill>
                   <a:srgbClr val="587068"/>
@@ -2860,6 +2873,7 @@
           <a:lstStyle xmlns:a="http://schemas.openxmlformats.org/drawingml/2006/main"/>
           <a:p xmlns:a="http://schemas.openxmlformats.org/drawingml/2006/main">
             <a:pPr algn="l">
+              <a:buNone/>
               <a:defRPr sz="1875" b="1">
                 <a:solidFill>
                   <a:srgbClr val="38A169"/>
@@ -2910,6 +2924,7 @@
           <a:lstStyle xmlns:a="http://schemas.openxmlformats.org/drawingml/2006/main"/>
           <a:p xmlns:a="http://schemas.openxmlformats.org/drawingml/2006/main">
             <a:pPr algn="l">
+              <a:buNone/>
               <a:defRPr sz="1875" b="1">
                 <a:solidFill>
                   <a:srgbClr val="10201A"/>
@@ -2960,6 +2975,7 @@
           <a:lstStyle xmlns:a="http://schemas.openxmlformats.org/drawingml/2006/main"/>
           <a:p xmlns:a="http://schemas.openxmlformats.org/drawingml/2006/main">
             <a:pPr algn="l">
+              <a:buNone/>
               <a:defRPr sz="1350" b="0">
                 <a:solidFill>
                   <a:srgbClr val="587068"/>
@@ -3010,6 +3026,7 @@
           <a:lstStyle xmlns:a="http://schemas.openxmlformats.org/drawingml/2006/main"/>
           <a:p xmlns:a="http://schemas.openxmlformats.org/drawingml/2006/main">
             <a:pPr algn="l">
+              <a:buNone/>
               <a:defRPr sz="1275" b="0">
                 <a:solidFill>
                   <a:srgbClr val="10201A"/>
@@ -3128,6 +3145,7 @@
           <a:lstStyle xmlns:a="http://schemas.openxmlformats.org/drawingml/2006/main"/>
           <a:p xmlns:a="http://schemas.openxmlformats.org/drawingml/2006/main">
             <a:pPr algn="l">
+              <a:buNone/>
               <a:defRPr sz="1875" b="1">
                 <a:solidFill>
                   <a:srgbClr val="38A169"/>
@@ -3178,6 +3196,7 @@
           <a:lstStyle xmlns:a="http://schemas.openxmlformats.org/drawingml/2006/main"/>
           <a:p xmlns:a="http://schemas.openxmlformats.org/drawingml/2006/main">
             <a:pPr algn="l">
+              <a:buNone/>
               <a:defRPr sz="1875" b="1">
                 <a:solidFill>
                   <a:srgbClr val="10201A"/>
@@ -3228,6 +3247,7 @@
           <a:lstStyle xmlns:a="http://schemas.openxmlformats.org/drawingml/2006/main"/>
           <a:p xmlns:a="http://schemas.openxmlformats.org/drawingml/2006/main">
             <a:pPr algn="l">
+              <a:buNone/>
               <a:defRPr sz="1350" b="0">
                 <a:solidFill>
                   <a:srgbClr val="587068"/>
@@ -3278,6 +3298,7 @@
           <a:lstStyle xmlns:a="http://schemas.openxmlformats.org/drawingml/2006/main"/>
           <a:p xmlns:a="http://schemas.openxmlformats.org/drawingml/2006/main">
             <a:pPr algn="l">
+              <a:buNone/>
               <a:defRPr sz="1275" b="0">
                 <a:solidFill>
                   <a:srgbClr val="10201A"/>
@@ -3396,6 +3417,7 @@
           <a:lstStyle xmlns:a="http://schemas.openxmlformats.org/drawingml/2006/main"/>
           <a:p xmlns:a="http://schemas.openxmlformats.org/drawingml/2006/main">
             <a:pPr algn="l">
+              <a:buNone/>
               <a:defRPr sz="1875" b="1">
                 <a:solidFill>
                   <a:srgbClr val="38A169"/>
@@ -3446,6 +3468,7 @@
           <a:lstStyle xmlns:a="http://schemas.openxmlformats.org/drawingml/2006/main"/>
           <a:p xmlns:a="http://schemas.openxmlformats.org/drawingml/2006/main">
             <a:pPr algn="l">
+              <a:buNone/>
               <a:defRPr sz="1875" b="1">
                 <a:solidFill>
                   <a:srgbClr val="10201A"/>
@@ -3496,6 +3519,7 @@
           <a:lstStyle xmlns:a="http://schemas.openxmlformats.org/drawingml/2006/main"/>
           <a:p xmlns:a="http://schemas.openxmlformats.org/drawingml/2006/main">
             <a:pPr algn="l">
+              <a:buNone/>
               <a:defRPr sz="1350" b="0">
                 <a:solidFill>
                   <a:srgbClr val="587068"/>
@@ -3546,6 +3570,7 @@
           <a:lstStyle xmlns:a="http://schemas.openxmlformats.org/drawingml/2006/main"/>
           <a:p xmlns:a="http://schemas.openxmlformats.org/drawingml/2006/main">
             <a:pPr algn="l">
+              <a:buNone/>
               <a:defRPr sz="1275" b="0">
                 <a:solidFill>
                   <a:srgbClr val="10201A"/>
@@ -3664,6 +3689,7 @@
           <a:lstStyle xmlns:a="http://schemas.openxmlformats.org/drawingml/2006/main"/>
           <a:p xmlns:a="http://schemas.openxmlformats.org/drawingml/2006/main">
             <a:pPr algn="l">
+              <a:buNone/>
               <a:defRPr sz="1875" b="1">
                 <a:solidFill>
                   <a:srgbClr val="38A169"/>
@@ -3714,6 +3740,7 @@
           <a:lstStyle xmlns:a="http://schemas.openxmlformats.org/drawingml/2006/main"/>
           <a:p xmlns:a="http://schemas.openxmlformats.org/drawingml/2006/main">
             <a:pPr algn="l">
+              <a:buNone/>
               <a:defRPr sz="1875" b="1">
                 <a:solidFill>
                   <a:srgbClr val="10201A"/>
@@ -3764,6 +3791,7 @@
           <a:lstStyle xmlns:a="http://schemas.openxmlformats.org/drawingml/2006/main"/>
           <a:p xmlns:a="http://schemas.openxmlformats.org/drawingml/2006/main">
             <a:pPr algn="l">
+              <a:buNone/>
               <a:defRPr sz="1350" b="0">
                 <a:solidFill>
                   <a:srgbClr val="587068"/>
@@ -3814,6 +3842,7 @@
           <a:lstStyle xmlns:a="http://schemas.openxmlformats.org/drawingml/2006/main"/>
           <a:p xmlns:a="http://schemas.openxmlformats.org/drawingml/2006/main">
             <a:pPr algn="l">
+              <a:buNone/>
               <a:defRPr sz="1275" b="0">
                 <a:solidFill>
                   <a:srgbClr val="10201A"/>
@@ -3864,6 +3893,7 @@
           <a:lstStyle xmlns:a="http://schemas.openxmlformats.org/drawingml/2006/main"/>
           <a:p xmlns:a="http://schemas.openxmlformats.org/drawingml/2006/main">
             <a:pPr algn="ctr">
+              <a:buNone/>
               <a:defRPr sz="2025" b="1">
                 <a:solidFill>
                   <a:srgbClr val="38A169"/>
@@ -3914,6 +3944,7 @@
           <a:lstStyle xmlns:a="http://schemas.openxmlformats.org/drawingml/2006/main"/>
           <a:p xmlns:a="http://schemas.openxmlformats.org/drawingml/2006/main">
             <a:pPr algn="l">
+              <a:buNone/>
               <a:defRPr sz="975" b="0">
                 <a:solidFill>
                   <a:srgbClr val="587068"/>
@@ -3964,6 +3995,7 @@
           <a:lstStyle xmlns:a="http://schemas.openxmlformats.org/drawingml/2006/main"/>
           <a:p xmlns:a="http://schemas.openxmlformats.org/drawingml/2006/main">
             <a:pPr algn="r">
+              <a:buNone/>
               <a:defRPr sz="975" b="0">
                 <a:solidFill>
                   <a:srgbClr val="587068"/>
@@ -4043,6 +4075,7 @@
           <a:lstStyle xmlns:a="http://schemas.openxmlformats.org/drawingml/2006/main"/>
           <a:p xmlns:a="http://schemas.openxmlformats.org/drawingml/2006/main">
             <a:pPr algn="l">
+              <a:buNone/>
               <a:defRPr sz="2850" b="1">
                 <a:solidFill>
                   <a:srgbClr val="10201A"/>
@@ -4093,6 +4126,7 @@
           <a:lstStyle xmlns:a="http://schemas.openxmlformats.org/drawingml/2006/main"/>
           <a:p xmlns:a="http://schemas.openxmlformats.org/drawingml/2006/main">
             <a:pPr algn="l">
+              <a:buNone/>
               <a:defRPr sz="1350" b="0">
                 <a:solidFill>
                   <a:srgbClr val="587068"/>
@@ -4211,6 +4245,7 @@
           <a:lstStyle xmlns:a="http://schemas.openxmlformats.org/drawingml/2006/main"/>
           <a:p xmlns:a="http://schemas.openxmlformats.org/drawingml/2006/main">
             <a:pPr algn="l">
+              <a:buNone/>
               <a:defRPr sz="1800" b="1">
                 <a:solidFill>
                   <a:srgbClr val="38A169"/>
@@ -4261,6 +4296,7 @@
           <a:lstStyle xmlns:a="http://schemas.openxmlformats.org/drawingml/2006/main"/>
           <a:p xmlns:a="http://schemas.openxmlformats.org/drawingml/2006/main">
             <a:pPr algn="l">
+              <a:buNone/>
               <a:defRPr sz="1500" b="0">
                 <a:solidFill>
                   <a:srgbClr val="587068"/>
@@ -4346,6 +4382,7 @@
           <a:lstStyle xmlns:a="http://schemas.openxmlformats.org/drawingml/2006/main"/>
           <a:p xmlns:a="http://schemas.openxmlformats.org/drawingml/2006/main">
             <a:pPr algn="l">
+              <a:buNone/>
               <a:defRPr sz="1800" b="1">
                 <a:solidFill>
                   <a:srgbClr val="38A169"/>
@@ -4396,6 +4433,7 @@
           <a:lstStyle xmlns:a="http://schemas.openxmlformats.org/drawingml/2006/main"/>
           <a:p xmlns:a="http://schemas.openxmlformats.org/drawingml/2006/main">
             <a:pPr algn="l">
+              <a:buNone/>
               <a:defRPr sz="1500" b="0">
                 <a:solidFill>
                   <a:srgbClr val="587068"/>
@@ -4481,6 +4519,7 @@
           <a:lstStyle xmlns:a="http://schemas.openxmlformats.org/drawingml/2006/main"/>
           <a:p xmlns:a="http://schemas.openxmlformats.org/drawingml/2006/main">
             <a:pPr algn="l">
+              <a:buNone/>
               <a:defRPr sz="1800" b="1">
                 <a:solidFill>
                   <a:srgbClr val="38A169"/>
@@ -4531,6 +4570,7 @@
           <a:lstStyle xmlns:a="http://schemas.openxmlformats.org/drawingml/2006/main"/>
           <a:p xmlns:a="http://schemas.openxmlformats.org/drawingml/2006/main">
             <a:pPr algn="l">
+              <a:buNone/>
               <a:defRPr sz="1500" b="0">
                 <a:solidFill>
                   <a:srgbClr val="587068"/>
@@ -4585,14 +4625,14 @@
       </p:sp>
       <p:pic>
         <p:nvPicPr>
-          <p:cNvPr id="33" name=""/>
+          <p:cNvPr id="34" name=""/>
           <p:cNvPicPr>
             <a:picLocks xmlns:a="http://schemas.openxmlformats.org/drawingml/2006/main" noChangeAspect="1"/>
           </p:cNvPicPr>
           <p:nvPr/>
         </p:nvPicPr>
         <p:blipFill>
-          <a:blip xmlns:r="http://schemas.openxmlformats.org/officeDocument/2006/relationships" xmlns:a="http://schemas.openxmlformats.org/drawingml/2006/main" r:embed="R8f1c52235fba44ee"/>
+          <a:blip xmlns:r="http://schemas.openxmlformats.org/officeDocument/2006/relationships" xmlns:a="http://schemas.openxmlformats.org/drawingml/2006/main" r:embed="R99b322356d434c80"/>
           <a:stretch xmlns:a="http://schemas.openxmlformats.org/drawingml/2006/main"/>
         </p:blipFill>
         <p:spPr>
@@ -4638,6 +4678,7 @@
           <a:lstStyle xmlns:a="http://schemas.openxmlformats.org/drawingml/2006/main"/>
           <a:p xmlns:a="http://schemas.openxmlformats.org/drawingml/2006/main">
             <a:pPr algn="ctr">
+              <a:buNone/>
               <a:defRPr sz="1650" b="1">
                 <a:solidFill>
                   <a:srgbClr val="10201A"/>
@@ -4688,6 +4729,7 @@
           <a:lstStyle xmlns:a="http://schemas.openxmlformats.org/drawingml/2006/main"/>
           <a:p xmlns:a="http://schemas.openxmlformats.org/drawingml/2006/main">
             <a:pPr algn="ctr">
+              <a:buNone/>
               <a:defRPr sz="1125" b="0">
                 <a:solidFill>
                   <a:srgbClr val="587068"/>
@@ -4738,6 +4780,7 @@
           <a:lstStyle xmlns:a="http://schemas.openxmlformats.org/drawingml/2006/main"/>
           <a:p xmlns:a="http://schemas.openxmlformats.org/drawingml/2006/main">
             <a:pPr algn="ctr">
+              <a:buNone/>
               <a:defRPr sz="1800" b="1">
                 <a:solidFill>
                   <a:srgbClr val="10201A"/>
@@ -4788,6 +4831,7 @@
           <a:lstStyle xmlns:a="http://schemas.openxmlformats.org/drawingml/2006/main"/>
           <a:p xmlns:a="http://schemas.openxmlformats.org/drawingml/2006/main">
             <a:pPr algn="l">
+              <a:buNone/>
               <a:defRPr sz="975" b="0">
                 <a:solidFill>
                   <a:srgbClr val="587068"/>
@@ -4838,6 +4882,7 @@
           <a:lstStyle xmlns:a="http://schemas.openxmlformats.org/drawingml/2006/main"/>
           <a:p xmlns:a="http://schemas.openxmlformats.org/drawingml/2006/main">
             <a:pPr algn="r">
+              <a:buNone/>
               <a:defRPr sz="975" b="0">
                 <a:solidFill>
                   <a:srgbClr val="587068"/>
@@ -4917,6 +4962,7 @@
           <a:lstStyle xmlns:a="http://schemas.openxmlformats.org/drawingml/2006/main"/>
           <a:p xmlns:a="http://schemas.openxmlformats.org/drawingml/2006/main">
             <a:pPr algn="l">
+              <a:buNone/>
               <a:defRPr sz="2850" b="1">
                 <a:solidFill>
                   <a:srgbClr val="10201A"/>
@@ -4967,6 +5013,7 @@
           <a:lstStyle xmlns:a="http://schemas.openxmlformats.org/drawingml/2006/main"/>
           <a:p xmlns:a="http://schemas.openxmlformats.org/drawingml/2006/main">
             <a:pPr algn="l">
+              <a:buNone/>
               <a:defRPr sz="1350" b="0">
                 <a:solidFill>
                   <a:srgbClr val="587068"/>
@@ -5085,6 +5132,7 @@
           <a:lstStyle xmlns:a="http://schemas.openxmlformats.org/drawingml/2006/main"/>
           <a:p xmlns:a="http://schemas.openxmlformats.org/drawingml/2006/main">
             <a:pPr algn="l">
+              <a:buNone/>
               <a:defRPr sz="1875" b="1">
                 <a:solidFill>
                   <a:srgbClr val="10201A"/>
@@ -5168,6 +5216,7 @@
           <a:lstStyle xmlns:a="http://schemas.openxmlformats.org/drawingml/2006/main"/>
           <a:p xmlns:a="http://schemas.openxmlformats.org/drawingml/2006/main">
             <a:pPr algn="l">
+              <a:buNone/>
               <a:defRPr sz="1425" b="0">
                 <a:solidFill>
                   <a:srgbClr val="587068"/>
@@ -5251,6 +5300,7 @@
           <a:lstStyle xmlns:a="http://schemas.openxmlformats.org/drawingml/2006/main"/>
           <a:p xmlns:a="http://schemas.openxmlformats.org/drawingml/2006/main">
             <a:pPr algn="l">
+              <a:buNone/>
               <a:defRPr sz="1425" b="0">
                 <a:solidFill>
                   <a:srgbClr val="587068"/>
@@ -5336,6 +5386,7 @@
           <a:lstStyle xmlns:a="http://schemas.openxmlformats.org/drawingml/2006/main"/>
           <a:p xmlns:a="http://schemas.openxmlformats.org/drawingml/2006/main">
             <a:pPr algn="l">
+              <a:buNone/>
               <a:defRPr sz="1875" b="1">
                 <a:solidFill>
                   <a:srgbClr val="10201A"/>
@@ -5419,6 +5470,7 @@
           <a:lstStyle xmlns:a="http://schemas.openxmlformats.org/drawingml/2006/main"/>
           <a:p xmlns:a="http://schemas.openxmlformats.org/drawingml/2006/main">
             <a:pPr algn="l">
+              <a:buNone/>
               <a:defRPr sz="1425" b="0">
                 <a:solidFill>
                   <a:srgbClr val="587068"/>
@@ -5502,6 +5554,7 @@
           <a:lstStyle xmlns:a="http://schemas.openxmlformats.org/drawingml/2006/main"/>
           <a:p xmlns:a="http://schemas.openxmlformats.org/drawingml/2006/main">
             <a:pPr algn="l">
+              <a:buNone/>
               <a:defRPr sz="1425" b="0">
                 <a:solidFill>
                   <a:srgbClr val="587068"/>
@@ -5587,6 +5640,7 @@
           <a:lstStyle xmlns:a="http://schemas.openxmlformats.org/drawingml/2006/main"/>
           <a:p xmlns:a="http://schemas.openxmlformats.org/drawingml/2006/main">
             <a:pPr algn="l">
+              <a:buNone/>
               <a:defRPr sz="1875" b="1">
                 <a:solidFill>
                   <a:srgbClr val="10201A"/>
@@ -5670,6 +5724,7 @@
           <a:lstStyle xmlns:a="http://schemas.openxmlformats.org/drawingml/2006/main"/>
           <a:p xmlns:a="http://schemas.openxmlformats.org/drawingml/2006/main">
             <a:pPr algn="l">
+              <a:buNone/>
               <a:defRPr sz="1425" b="0">
                 <a:solidFill>
                   <a:srgbClr val="587068"/>
@@ -5753,6 +5808,7 @@
           <a:lstStyle xmlns:a="http://schemas.openxmlformats.org/drawingml/2006/main"/>
           <a:p xmlns:a="http://schemas.openxmlformats.org/drawingml/2006/main">
             <a:pPr algn="l">
+              <a:buNone/>
               <a:defRPr sz="1425" b="0">
                 <a:solidFill>
                   <a:srgbClr val="587068"/>
@@ -5803,6 +5859,7 @@
           <a:lstStyle xmlns:a="http://schemas.openxmlformats.org/drawingml/2006/main"/>
           <a:p xmlns:a="http://schemas.openxmlformats.org/drawingml/2006/main">
             <a:pPr algn="ctr">
+              <a:buNone/>
               <a:defRPr sz="1800" b="1">
                 <a:solidFill>
                   <a:srgbClr val="38A169"/>
@@ -5853,6 +5910,7 @@
           <a:lstStyle xmlns:a="http://schemas.openxmlformats.org/drawingml/2006/main"/>
           <a:p xmlns:a="http://schemas.openxmlformats.org/drawingml/2006/main">
             <a:pPr algn="l">
+              <a:buNone/>
               <a:defRPr sz="975" b="0">
                 <a:solidFill>
                   <a:srgbClr val="587068"/>
@@ -5903,6 +5961,7 @@
           <a:lstStyle xmlns:a="http://schemas.openxmlformats.org/drawingml/2006/main"/>
           <a:p xmlns:a="http://schemas.openxmlformats.org/drawingml/2006/main">
             <a:pPr algn="r">
+              <a:buNone/>
               <a:defRPr sz="975" b="0">
                 <a:solidFill>
                   <a:srgbClr val="587068"/>
@@ -5982,6 +6041,7 @@
           <a:lstStyle xmlns:a="http://schemas.openxmlformats.org/drawingml/2006/main"/>
           <a:p xmlns:a="http://schemas.openxmlformats.org/drawingml/2006/main">
             <a:pPr algn="l">
+              <a:buNone/>
               <a:defRPr sz="2850" b="1">
                 <a:solidFill>
                   <a:srgbClr val="10201A"/>
@@ -6032,6 +6092,7 @@
           <a:lstStyle xmlns:a="http://schemas.openxmlformats.org/drawingml/2006/main"/>
           <a:p xmlns:a="http://schemas.openxmlformats.org/drawingml/2006/main">
             <a:pPr algn="l">
+              <a:buNone/>
               <a:defRPr sz="1350" b="0">
                 <a:solidFill>
                   <a:srgbClr val="587068"/>
@@ -6150,6 +6211,7 @@
           <a:lstStyle xmlns:a="http://schemas.openxmlformats.org/drawingml/2006/main"/>
           <a:p xmlns:a="http://schemas.openxmlformats.org/drawingml/2006/main">
             <a:pPr algn="ctr">
+              <a:buNone/>
               <a:defRPr sz="1725" b="1">
                 <a:solidFill>
                   <a:srgbClr val="10201A"/>
@@ -6200,6 +6262,7 @@
           <a:lstStyle xmlns:a="http://schemas.openxmlformats.org/drawingml/2006/main"/>
           <a:p xmlns:a="http://schemas.openxmlformats.org/drawingml/2006/main">
             <a:pPr algn="ctr">
+              <a:buNone/>
               <a:defRPr sz="1350" b="0">
                 <a:solidFill>
                   <a:srgbClr val="587068"/>
@@ -6318,6 +6381,7 @@
           <a:lstStyle xmlns:a="http://schemas.openxmlformats.org/drawingml/2006/main"/>
           <a:p xmlns:a="http://schemas.openxmlformats.org/drawingml/2006/main">
             <a:pPr algn="ctr">
+              <a:buNone/>
               <a:defRPr sz="1725" b="1">
                 <a:solidFill>
                   <a:srgbClr val="10201A"/>
@@ -6368,6 +6432,7 @@
           <a:lstStyle xmlns:a="http://schemas.openxmlformats.org/drawingml/2006/main"/>
           <a:p xmlns:a="http://schemas.openxmlformats.org/drawingml/2006/main">
             <a:pPr algn="ctr">
+              <a:buNone/>
               <a:defRPr sz="1350" b="0">
                 <a:solidFill>
                   <a:srgbClr val="587068"/>
@@ -6486,6 +6551,7 @@
           <a:lstStyle xmlns:a="http://schemas.openxmlformats.org/drawingml/2006/main"/>
           <a:p xmlns:a="http://schemas.openxmlformats.org/drawingml/2006/main">
             <a:pPr algn="ctr">
+              <a:buNone/>
               <a:defRPr sz="1725" b="1">
                 <a:solidFill>
                   <a:srgbClr val="10201A"/>
@@ -6536,6 +6602,7 @@
           <a:lstStyle xmlns:a="http://schemas.openxmlformats.org/drawingml/2006/main"/>
           <a:p xmlns:a="http://schemas.openxmlformats.org/drawingml/2006/main">
             <a:pPr algn="ctr">
+              <a:buNone/>
               <a:defRPr sz="1350" b="0">
                 <a:solidFill>
                   <a:srgbClr val="587068"/>
@@ -6654,6 +6721,7 @@
           <a:lstStyle xmlns:a="http://schemas.openxmlformats.org/drawingml/2006/main"/>
           <a:p xmlns:a="http://schemas.openxmlformats.org/drawingml/2006/main">
             <a:pPr algn="ctr">
+              <a:buNone/>
               <a:defRPr sz="1725" b="1">
                 <a:solidFill>
                   <a:srgbClr val="10201A"/>
@@ -6704,6 +6772,7 @@
           <a:lstStyle xmlns:a="http://schemas.openxmlformats.org/drawingml/2006/main"/>
           <a:p xmlns:a="http://schemas.openxmlformats.org/drawingml/2006/main">
             <a:pPr algn="ctr">
+              <a:buNone/>
               <a:defRPr sz="1350" b="0">
                 <a:solidFill>
                   <a:srgbClr val="587068"/>
@@ -6754,6 +6823,7 @@
           <a:lstStyle xmlns:a="http://schemas.openxmlformats.org/drawingml/2006/main"/>
           <a:p xmlns:a="http://schemas.openxmlformats.org/drawingml/2006/main">
             <a:pPr algn="ctr">
+              <a:buNone/>
               <a:defRPr sz="2025" b="1">
                 <a:solidFill>
                   <a:srgbClr val="10201A"/>
@@ -6804,6 +6874,7 @@
           <a:lstStyle xmlns:a="http://schemas.openxmlformats.org/drawingml/2006/main"/>
           <a:p xmlns:a="http://schemas.openxmlformats.org/drawingml/2006/main">
             <a:pPr algn="l">
+              <a:buNone/>
               <a:defRPr sz="975" b="0">
                 <a:solidFill>
                   <a:srgbClr val="587068"/>
@@ -6854,6 +6925,7 @@
           <a:lstStyle xmlns:a="http://schemas.openxmlformats.org/drawingml/2006/main"/>
           <a:p xmlns:a="http://schemas.openxmlformats.org/drawingml/2006/main">
             <a:pPr algn="r">
+              <a:buNone/>
               <a:defRPr sz="975" b="0">
                 <a:solidFill>
                   <a:srgbClr val="587068"/>
@@ -6933,6 +7005,7 @@
           <a:lstStyle xmlns:a="http://schemas.openxmlformats.org/drawingml/2006/main"/>
           <a:p xmlns:a="http://schemas.openxmlformats.org/drawingml/2006/main">
             <a:pPr algn="l">
+              <a:buNone/>
               <a:defRPr sz="2850" b="1">
                 <a:solidFill>
                   <a:srgbClr val="10201A"/>
@@ -6983,6 +7056,7 @@
           <a:lstStyle xmlns:a="http://schemas.openxmlformats.org/drawingml/2006/main"/>
           <a:p xmlns:a="http://schemas.openxmlformats.org/drawingml/2006/main">
             <a:pPr algn="l">
+              <a:buNone/>
               <a:defRPr sz="1350" b="0">
                 <a:solidFill>
                   <a:srgbClr val="587068"/>
@@ -7101,6 +7175,7 @@
           <a:lstStyle xmlns:a="http://schemas.openxmlformats.org/drawingml/2006/main"/>
           <a:p xmlns:a="http://schemas.openxmlformats.org/drawingml/2006/main">
             <a:pPr algn="ctr">
+              <a:buNone/>
               <a:defRPr sz="2550" b="1">
                 <a:solidFill>
                   <a:srgbClr val="10201A"/>
@@ -7151,6 +7226,7 @@
           <a:lstStyle xmlns:a="http://schemas.openxmlformats.org/drawingml/2006/main"/>
           <a:p xmlns:a="http://schemas.openxmlformats.org/drawingml/2006/main">
             <a:pPr algn="l">
+              <a:buNone/>
               <a:defRPr sz="1650" b="1">
                 <a:solidFill>
                   <a:srgbClr val="10201A"/>
@@ -7201,6 +7277,7 @@
           <a:lstStyle xmlns:a="http://schemas.openxmlformats.org/drawingml/2006/main"/>
           <a:p xmlns:a="http://schemas.openxmlformats.org/drawingml/2006/main">
             <a:pPr algn="l">
+              <a:buNone/>
               <a:defRPr sz="1575" b="0">
                 <a:solidFill>
                   <a:srgbClr val="587068"/>
@@ -7286,6 +7363,7 @@
           <a:lstStyle xmlns:a="http://schemas.openxmlformats.org/drawingml/2006/main"/>
           <a:p xmlns:a="http://schemas.openxmlformats.org/drawingml/2006/main">
             <a:pPr algn="ctr">
+              <a:buNone/>
               <a:defRPr sz="2550" b="1">
                 <a:solidFill>
                   <a:srgbClr val="10201A"/>
@@ -7336,6 +7414,7 @@
           <a:lstStyle xmlns:a="http://schemas.openxmlformats.org/drawingml/2006/main"/>
           <a:p xmlns:a="http://schemas.openxmlformats.org/drawingml/2006/main">
             <a:pPr algn="l">
+              <a:buNone/>
               <a:defRPr sz="1650" b="1">
                 <a:solidFill>
                   <a:srgbClr val="10201A"/>
@@ -7386,6 +7465,7 @@
           <a:lstStyle xmlns:a="http://schemas.openxmlformats.org/drawingml/2006/main"/>
           <a:p xmlns:a="http://schemas.openxmlformats.org/drawingml/2006/main">
             <a:pPr algn="l">
+              <a:buNone/>
               <a:defRPr sz="1575" b="0">
                 <a:solidFill>
                   <a:srgbClr val="587068"/>
@@ -7471,6 +7551,7 @@
           <a:lstStyle xmlns:a="http://schemas.openxmlformats.org/drawingml/2006/main"/>
           <a:p xmlns:a="http://schemas.openxmlformats.org/drawingml/2006/main">
             <a:pPr algn="ctr">
+              <a:buNone/>
               <a:defRPr sz="2550" b="1">
                 <a:solidFill>
                   <a:srgbClr val="10201A"/>
@@ -7521,6 +7602,7 @@
           <a:lstStyle xmlns:a="http://schemas.openxmlformats.org/drawingml/2006/main"/>
           <a:p xmlns:a="http://schemas.openxmlformats.org/drawingml/2006/main">
             <a:pPr algn="l">
+              <a:buNone/>
               <a:defRPr sz="1650" b="1">
                 <a:solidFill>
                   <a:srgbClr val="10201A"/>
@@ -7571,6 +7653,7 @@
           <a:lstStyle xmlns:a="http://schemas.openxmlformats.org/drawingml/2006/main"/>
           <a:p xmlns:a="http://schemas.openxmlformats.org/drawingml/2006/main">
             <a:pPr algn="l">
+              <a:buNone/>
               <a:defRPr sz="1575" b="0">
                 <a:solidFill>
                   <a:srgbClr val="587068"/>
@@ -7656,6 +7739,7 @@
           <a:lstStyle xmlns:a="http://schemas.openxmlformats.org/drawingml/2006/main"/>
           <a:p xmlns:a="http://schemas.openxmlformats.org/drawingml/2006/main">
             <a:pPr algn="ctr">
+              <a:buNone/>
               <a:defRPr sz="2550" b="1">
                 <a:solidFill>
                   <a:srgbClr val="10201A"/>
@@ -7706,6 +7790,7 @@
           <a:lstStyle xmlns:a="http://schemas.openxmlformats.org/drawingml/2006/main"/>
           <a:p xmlns:a="http://schemas.openxmlformats.org/drawingml/2006/main">
             <a:pPr algn="l">
+              <a:buNone/>
               <a:defRPr sz="1650" b="1">
                 <a:solidFill>
                   <a:srgbClr val="10201A"/>
@@ -7756,6 +7841,7 @@
           <a:lstStyle xmlns:a="http://schemas.openxmlformats.org/drawingml/2006/main"/>
           <a:p xmlns:a="http://schemas.openxmlformats.org/drawingml/2006/main">
             <a:pPr algn="l">
+              <a:buNone/>
               <a:defRPr sz="1575" b="0">
                 <a:solidFill>
                   <a:srgbClr val="587068"/>
@@ -7806,6 +7892,7 @@
           <a:lstStyle xmlns:a="http://schemas.openxmlformats.org/drawingml/2006/main"/>
           <a:p xmlns:a="http://schemas.openxmlformats.org/drawingml/2006/main">
             <a:pPr algn="ctr">
+              <a:buNone/>
               <a:defRPr sz="1650" b="1">
                 <a:solidFill>
                   <a:srgbClr val="10201A"/>
@@ -7856,6 +7943,7 @@
           <a:lstStyle xmlns:a="http://schemas.openxmlformats.org/drawingml/2006/main"/>
           <a:p xmlns:a="http://schemas.openxmlformats.org/drawingml/2006/main">
             <a:pPr algn="l">
+              <a:buNone/>
               <a:defRPr sz="975" b="0">
                 <a:solidFill>
                   <a:srgbClr val="587068"/>
@@ -7906,6 +7994,7 @@
           <a:lstStyle xmlns:a="http://schemas.openxmlformats.org/drawingml/2006/main"/>
           <a:p xmlns:a="http://schemas.openxmlformats.org/drawingml/2006/main">
             <a:pPr algn="r">
+              <a:buNone/>
               <a:defRPr sz="975" b="0">
                 <a:solidFill>
                   <a:srgbClr val="587068"/>
@@ -7985,6 +8074,7 @@
           <a:lstStyle xmlns:a="http://schemas.openxmlformats.org/drawingml/2006/main"/>
           <a:p xmlns:a="http://schemas.openxmlformats.org/drawingml/2006/main">
             <a:pPr algn="l">
+              <a:buNone/>
               <a:defRPr sz="2850" b="1">
                 <a:solidFill>
                   <a:srgbClr val="10201A"/>
@@ -8035,6 +8125,7 @@
           <a:lstStyle xmlns:a="http://schemas.openxmlformats.org/drawingml/2006/main"/>
           <a:p xmlns:a="http://schemas.openxmlformats.org/drawingml/2006/main">
             <a:pPr algn="l">
+              <a:buNone/>
               <a:defRPr sz="1350" b="0">
                 <a:solidFill>
                   <a:srgbClr val="587068"/>
@@ -8153,6 +8244,7 @@
           <a:lstStyle xmlns:a="http://schemas.openxmlformats.org/drawingml/2006/main"/>
           <a:p xmlns:a="http://schemas.openxmlformats.org/drawingml/2006/main">
             <a:pPr algn="l">
+              <a:buNone/>
               <a:defRPr sz="1875" b="1">
                 <a:solidFill>
                   <a:srgbClr val="38A169"/>
@@ -8203,6 +8295,7 @@
           <a:lstStyle xmlns:a="http://schemas.openxmlformats.org/drawingml/2006/main"/>
           <a:p xmlns:a="http://schemas.openxmlformats.org/drawingml/2006/main">
             <a:pPr algn="l">
+              <a:buNone/>
               <a:defRPr sz="1350" b="0">
                 <a:solidFill>
                   <a:srgbClr val="587068"/>
@@ -8288,6 +8381,7 @@
           <a:lstStyle xmlns:a="http://schemas.openxmlformats.org/drawingml/2006/main"/>
           <a:p xmlns:a="http://schemas.openxmlformats.org/drawingml/2006/main">
             <a:pPr algn="l">
+              <a:buNone/>
               <a:defRPr sz="1875" b="1">
                 <a:solidFill>
                   <a:srgbClr val="38A169"/>
@@ -8338,6 +8432,7 @@
           <a:lstStyle xmlns:a="http://schemas.openxmlformats.org/drawingml/2006/main"/>
           <a:p xmlns:a="http://schemas.openxmlformats.org/drawingml/2006/main">
             <a:pPr algn="l">
+              <a:buNone/>
               <a:defRPr sz="1350" b="0">
                 <a:solidFill>
                   <a:srgbClr val="587068"/>
@@ -8423,6 +8518,7 @@
           <a:lstStyle xmlns:a="http://schemas.openxmlformats.org/drawingml/2006/main"/>
           <a:p xmlns:a="http://schemas.openxmlformats.org/drawingml/2006/main">
             <a:pPr algn="l">
+              <a:buNone/>
               <a:defRPr sz="1875" b="1">
                 <a:solidFill>
                   <a:srgbClr val="38A169"/>
@@ -8473,6 +8569,7 @@
           <a:lstStyle xmlns:a="http://schemas.openxmlformats.org/drawingml/2006/main"/>
           <a:p xmlns:a="http://schemas.openxmlformats.org/drawingml/2006/main">
             <a:pPr algn="l">
+              <a:buNone/>
               <a:defRPr sz="1350" b="0">
                 <a:solidFill>
                   <a:srgbClr val="587068"/>
@@ -8558,6 +8655,7 @@
           <a:lstStyle xmlns:a="http://schemas.openxmlformats.org/drawingml/2006/main"/>
           <a:p xmlns:a="http://schemas.openxmlformats.org/drawingml/2006/main">
             <a:pPr algn="l">
+              <a:buNone/>
               <a:defRPr sz="1875" b="1">
                 <a:solidFill>
                   <a:srgbClr val="38A169"/>
@@ -8608,6 +8706,7 @@
           <a:lstStyle xmlns:a="http://schemas.openxmlformats.org/drawingml/2006/main"/>
           <a:p xmlns:a="http://schemas.openxmlformats.org/drawingml/2006/main">
             <a:pPr algn="l">
+              <a:buNone/>
               <a:defRPr sz="1350" b="0">
                 <a:solidFill>
                   <a:srgbClr val="587068"/>
@@ -8693,6 +8792,7 @@
           <a:lstStyle xmlns:a="http://schemas.openxmlformats.org/drawingml/2006/main"/>
           <a:p xmlns:a="http://schemas.openxmlformats.org/drawingml/2006/main">
             <a:pPr algn="l">
+              <a:buNone/>
               <a:defRPr sz="1875" b="1">
                 <a:solidFill>
                   <a:srgbClr val="38A169"/>
@@ -8743,6 +8843,7 @@
           <a:lstStyle xmlns:a="http://schemas.openxmlformats.org/drawingml/2006/main"/>
           <a:p xmlns:a="http://schemas.openxmlformats.org/drawingml/2006/main">
             <a:pPr algn="l">
+              <a:buNone/>
               <a:defRPr sz="1350" b="0">
                 <a:solidFill>
                   <a:srgbClr val="587068"/>
@@ -8828,6 +8929,7 @@
           <a:lstStyle xmlns:a="http://schemas.openxmlformats.org/drawingml/2006/main"/>
           <a:p xmlns:a="http://schemas.openxmlformats.org/drawingml/2006/main">
             <a:pPr algn="l">
+              <a:buNone/>
               <a:defRPr sz="1875" b="1">
                 <a:solidFill>
                   <a:srgbClr val="38A169"/>
@@ -8878,6 +8980,7 @@
           <a:lstStyle xmlns:a="http://schemas.openxmlformats.org/drawingml/2006/main"/>
           <a:p xmlns:a="http://schemas.openxmlformats.org/drawingml/2006/main">
             <a:pPr algn="l">
+              <a:buNone/>
               <a:defRPr sz="1350" b="0">
                 <a:solidFill>
                   <a:srgbClr val="587068"/>
@@ -8928,6 +9031,7 @@
           <a:lstStyle xmlns:a="http://schemas.openxmlformats.org/drawingml/2006/main"/>
           <a:p xmlns:a="http://schemas.openxmlformats.org/drawingml/2006/main">
             <a:pPr algn="l">
+              <a:buNone/>
               <a:defRPr sz="1425" b="0">
                 <a:solidFill>
                   <a:srgbClr val="587068"/>
@@ -8978,6 +9082,7 @@
           <a:lstStyle xmlns:a="http://schemas.openxmlformats.org/drawingml/2006/main"/>
           <a:p xmlns:a="http://schemas.openxmlformats.org/drawingml/2006/main">
             <a:pPr algn="l">
+              <a:buNone/>
               <a:defRPr sz="975" b="0">
                 <a:solidFill>
                   <a:srgbClr val="587068"/>
@@ -9028,6 +9133,7 @@
           <a:lstStyle xmlns:a="http://schemas.openxmlformats.org/drawingml/2006/main"/>
           <a:p xmlns:a="http://schemas.openxmlformats.org/drawingml/2006/main">
             <a:pPr algn="r">
+              <a:buNone/>
               <a:defRPr sz="975" b="0">
                 <a:solidFill>
                   <a:srgbClr val="587068"/>
@@ -9107,6 +9213,7 @@
           <a:lstStyle xmlns:a="http://schemas.openxmlformats.org/drawingml/2006/main"/>
           <a:p xmlns:a="http://schemas.openxmlformats.org/drawingml/2006/main">
             <a:pPr algn="l">
+              <a:buNone/>
               <a:defRPr sz="2850" b="1">
                 <a:solidFill>
                   <a:srgbClr val="10201A"/>
@@ -9157,6 +9264,7 @@
           <a:lstStyle xmlns:a="http://schemas.openxmlformats.org/drawingml/2006/main"/>
           <a:p xmlns:a="http://schemas.openxmlformats.org/drawingml/2006/main">
             <a:pPr algn="l">
+              <a:buNone/>
               <a:defRPr sz="1350" b="0">
                 <a:solidFill>
                   <a:srgbClr val="587068"/>
@@ -9275,6 +9383,7 @@
           <a:lstStyle xmlns:a="http://schemas.openxmlformats.org/drawingml/2006/main"/>
           <a:p xmlns:a="http://schemas.openxmlformats.org/drawingml/2006/main">
             <a:pPr algn="l">
+              <a:buNone/>
               <a:defRPr sz="1575" b="1">
                 <a:solidFill>
                   <a:srgbClr val="10201A"/>
@@ -9325,6 +9434,7 @@
           <a:lstStyle xmlns:a="http://schemas.openxmlformats.org/drawingml/2006/main"/>
           <a:p xmlns:a="http://schemas.openxmlformats.org/drawingml/2006/main">
             <a:pPr algn="l">
+              <a:buNone/>
               <a:defRPr sz="1500" b="0">
                 <a:solidFill>
                   <a:srgbClr val="587068"/>
@@ -9443,6 +9553,7 @@
           <a:lstStyle xmlns:a="http://schemas.openxmlformats.org/drawingml/2006/main"/>
           <a:p xmlns:a="http://schemas.openxmlformats.org/drawingml/2006/main">
             <a:pPr algn="l">
+              <a:buNone/>
               <a:defRPr sz="1575" b="1">
                 <a:solidFill>
                   <a:srgbClr val="10201A"/>
@@ -9493,6 +9604,7 @@
           <a:lstStyle xmlns:a="http://schemas.openxmlformats.org/drawingml/2006/main"/>
           <a:p xmlns:a="http://schemas.openxmlformats.org/drawingml/2006/main">
             <a:pPr algn="l">
+              <a:buNone/>
               <a:defRPr sz="1500" b="0">
                 <a:solidFill>
                   <a:srgbClr val="587068"/>
@@ -9611,6 +9723,7 @@
           <a:lstStyle xmlns:a="http://schemas.openxmlformats.org/drawingml/2006/main"/>
           <a:p xmlns:a="http://schemas.openxmlformats.org/drawingml/2006/main">
             <a:pPr algn="l">
+              <a:buNone/>
               <a:defRPr sz="1575" b="1">
                 <a:solidFill>
                   <a:srgbClr val="10201A"/>
@@ -9661,6 +9774,7 @@
           <a:lstStyle xmlns:a="http://schemas.openxmlformats.org/drawingml/2006/main"/>
           <a:p xmlns:a="http://schemas.openxmlformats.org/drawingml/2006/main">
             <a:pPr algn="l">
+              <a:buNone/>
               <a:defRPr sz="1500" b="0">
                 <a:solidFill>
                   <a:srgbClr val="587068"/>
@@ -9779,6 +9893,7 @@
           <a:lstStyle xmlns:a="http://schemas.openxmlformats.org/drawingml/2006/main"/>
           <a:p xmlns:a="http://schemas.openxmlformats.org/drawingml/2006/main">
             <a:pPr algn="l">
+              <a:buNone/>
               <a:defRPr sz="1575" b="1">
                 <a:solidFill>
                   <a:srgbClr val="10201A"/>
@@ -9829,6 +9944,7 @@
           <a:lstStyle xmlns:a="http://schemas.openxmlformats.org/drawingml/2006/main"/>
           <a:p xmlns:a="http://schemas.openxmlformats.org/drawingml/2006/main">
             <a:pPr algn="l">
+              <a:buNone/>
               <a:defRPr sz="1500" b="0">
                 <a:solidFill>
                   <a:srgbClr val="587068"/>
@@ -9947,6 +10063,7 @@
           <a:lstStyle xmlns:a="http://schemas.openxmlformats.org/drawingml/2006/main"/>
           <a:p xmlns:a="http://schemas.openxmlformats.org/drawingml/2006/main">
             <a:pPr algn="l">
+              <a:buNone/>
               <a:defRPr sz="1575" b="1">
                 <a:solidFill>
                   <a:srgbClr val="10201A"/>
@@ -9997,6 +10114,7 @@
           <a:lstStyle xmlns:a="http://schemas.openxmlformats.org/drawingml/2006/main"/>
           <a:p xmlns:a="http://schemas.openxmlformats.org/drawingml/2006/main">
             <a:pPr algn="l">
+              <a:buNone/>
               <a:defRPr sz="1500" b="0">
                 <a:solidFill>
                   <a:srgbClr val="587068"/>
@@ -10047,6 +10165,7 @@
           <a:lstStyle xmlns:a="http://schemas.openxmlformats.org/drawingml/2006/main"/>
           <a:p xmlns:a="http://schemas.openxmlformats.org/drawingml/2006/main">
             <a:pPr algn="l">
+              <a:buNone/>
               <a:defRPr sz="975" b="0">
                 <a:solidFill>
                   <a:srgbClr val="587068"/>
@@ -10097,6 +10216,7 @@
           <a:lstStyle xmlns:a="http://schemas.openxmlformats.org/drawingml/2006/main"/>
           <a:p xmlns:a="http://schemas.openxmlformats.org/drawingml/2006/main">
             <a:pPr algn="r">
+              <a:buNone/>
               <a:defRPr sz="975" b="0">
                 <a:solidFill>
                   <a:srgbClr val="587068"/>
@@ -10176,6 +10296,7 @@
           <a:lstStyle xmlns:a="http://schemas.openxmlformats.org/drawingml/2006/main"/>
           <a:p xmlns:a="http://schemas.openxmlformats.org/drawingml/2006/main">
             <a:pPr algn="l">
+              <a:buNone/>
               <a:defRPr sz="2850" b="1">
                 <a:solidFill>
                   <a:srgbClr val="10201A"/>
@@ -10226,6 +10347,7 @@
           <a:lstStyle xmlns:a="http://schemas.openxmlformats.org/drawingml/2006/main"/>
           <a:p xmlns:a="http://schemas.openxmlformats.org/drawingml/2006/main">
             <a:pPr algn="l">
+              <a:buNone/>
               <a:defRPr sz="1350" b="0">
                 <a:solidFill>
                   <a:srgbClr val="587068"/>
@@ -10309,6 +10431,7 @@
           <a:lstStyle xmlns:a="http://schemas.openxmlformats.org/drawingml/2006/main"/>
           <a:p xmlns:a="http://schemas.openxmlformats.org/drawingml/2006/main">
             <a:pPr algn="l">
+              <a:buNone/>
               <a:defRPr sz="1650" b="1">
                 <a:solidFill>
                   <a:srgbClr val="38A169"/>
@@ -10359,6 +10482,7 @@
           <a:lstStyle xmlns:a="http://schemas.openxmlformats.org/drawingml/2006/main"/>
           <a:p xmlns:a="http://schemas.openxmlformats.org/drawingml/2006/main">
             <a:pPr algn="l">
+              <a:buNone/>
               <a:defRPr sz="1350" b="0">
                 <a:solidFill>
                   <a:srgbClr val="587068"/>
@@ -10444,6 +10568,7 @@
           <a:lstStyle xmlns:a="http://schemas.openxmlformats.org/drawingml/2006/main"/>
           <a:p xmlns:a="http://schemas.openxmlformats.org/drawingml/2006/main">
             <a:pPr algn="l">
+              <a:buNone/>
               <a:defRPr sz="1500" b="1">
                 <a:solidFill>
                   <a:srgbClr val="10201A"/>
@@ -10494,6 +10619,7 @@
           <a:lstStyle xmlns:a="http://schemas.openxmlformats.org/drawingml/2006/main"/>
           <a:p xmlns:a="http://schemas.openxmlformats.org/drawingml/2006/main">
             <a:pPr algn="l">
+              <a:buNone/>
               <a:defRPr sz="1650" b="1">
                 <a:solidFill>
                   <a:srgbClr val="38A169"/>
@@ -10544,6 +10670,7 @@
           <a:lstStyle xmlns:a="http://schemas.openxmlformats.org/drawingml/2006/main"/>
           <a:p xmlns:a="http://schemas.openxmlformats.org/drawingml/2006/main">
             <a:pPr algn="l">
+              <a:buNone/>
               <a:defRPr sz="1350" b="0">
                 <a:solidFill>
                   <a:srgbClr val="587068"/>
@@ -10629,6 +10756,7 @@
           <a:lstStyle xmlns:a="http://schemas.openxmlformats.org/drawingml/2006/main"/>
           <a:p xmlns:a="http://schemas.openxmlformats.org/drawingml/2006/main">
             <a:pPr algn="l">
+              <a:buNone/>
               <a:defRPr sz="1500" b="1">
                 <a:solidFill>
                   <a:srgbClr val="10201A"/>
@@ -10679,6 +10807,7 @@
           <a:lstStyle xmlns:a="http://schemas.openxmlformats.org/drawingml/2006/main"/>
           <a:p xmlns:a="http://schemas.openxmlformats.org/drawingml/2006/main">
             <a:pPr algn="l">
+              <a:buNone/>
               <a:defRPr sz="1650" b="1">
                 <a:solidFill>
                   <a:srgbClr val="38A169"/>
@@ -10729,6 +10858,7 @@
           <a:lstStyle xmlns:a="http://schemas.openxmlformats.org/drawingml/2006/main"/>
           <a:p xmlns:a="http://schemas.openxmlformats.org/drawingml/2006/main">
             <a:pPr algn="l">
+              <a:buNone/>
               <a:defRPr sz="1350" b="0">
                 <a:solidFill>
                   <a:srgbClr val="587068"/>
@@ -10814,6 +10944,7 @@
           <a:lstStyle xmlns:a="http://schemas.openxmlformats.org/drawingml/2006/main"/>
           <a:p xmlns:a="http://schemas.openxmlformats.org/drawingml/2006/main">
             <a:pPr algn="l">
+              <a:buNone/>
               <a:defRPr sz="1500" b="1">
                 <a:solidFill>
                   <a:srgbClr val="10201A"/>
@@ -10864,6 +10995,7 @@
           <a:lstStyle xmlns:a="http://schemas.openxmlformats.org/drawingml/2006/main"/>
           <a:p xmlns:a="http://schemas.openxmlformats.org/drawingml/2006/main">
             <a:pPr algn="l">
+              <a:buNone/>
               <a:defRPr sz="1650" b="1">
                 <a:solidFill>
                   <a:srgbClr val="38A169"/>
@@ -10914,6 +11046,7 @@
           <a:lstStyle xmlns:a="http://schemas.openxmlformats.org/drawingml/2006/main"/>
           <a:p xmlns:a="http://schemas.openxmlformats.org/drawingml/2006/main">
             <a:pPr algn="l">
+              <a:buNone/>
               <a:defRPr sz="1350" b="0">
                 <a:solidFill>
                   <a:srgbClr val="587068"/>
@@ -10999,6 +11132,7 @@
           <a:lstStyle xmlns:a="http://schemas.openxmlformats.org/drawingml/2006/main"/>
           <a:p xmlns:a="http://schemas.openxmlformats.org/drawingml/2006/main">
             <a:pPr algn="l">
+              <a:buNone/>
               <a:defRPr sz="1500" b="1">
                 <a:solidFill>
                   <a:srgbClr val="10201A"/>
@@ -11049,6 +11183,7 @@
           <a:lstStyle xmlns:a="http://schemas.openxmlformats.org/drawingml/2006/main"/>
           <a:p xmlns:a="http://schemas.openxmlformats.org/drawingml/2006/main">
             <a:pPr algn="l">
+              <a:buNone/>
               <a:defRPr sz="1650" b="1">
                 <a:solidFill>
                   <a:srgbClr val="38A169"/>
@@ -11099,6 +11234,7 @@
           <a:lstStyle xmlns:a="http://schemas.openxmlformats.org/drawingml/2006/main"/>
           <a:p xmlns:a="http://schemas.openxmlformats.org/drawingml/2006/main">
             <a:pPr algn="l">
+              <a:buNone/>
               <a:defRPr sz="1350" b="0">
                 <a:solidFill>
                   <a:srgbClr val="587068"/>
@@ -11184,6 +11320,7 @@
           <a:lstStyle xmlns:a="http://schemas.openxmlformats.org/drawingml/2006/main"/>
           <a:p xmlns:a="http://schemas.openxmlformats.org/drawingml/2006/main">
             <a:pPr algn="l">
+              <a:buNone/>
               <a:defRPr sz="1500" b="1">
                 <a:solidFill>
                   <a:srgbClr val="10201A"/>
@@ -11234,6 +11371,7 @@
           <a:lstStyle xmlns:a="http://schemas.openxmlformats.org/drawingml/2006/main"/>
           <a:p xmlns:a="http://schemas.openxmlformats.org/drawingml/2006/main">
             <a:pPr algn="l">
+              <a:buNone/>
               <a:defRPr sz="975" b="0">
                 <a:solidFill>
                   <a:srgbClr val="587068"/>
@@ -11284,6 +11422,7 @@
           <a:lstStyle xmlns:a="http://schemas.openxmlformats.org/drawingml/2006/main"/>
           <a:p xmlns:a="http://schemas.openxmlformats.org/drawingml/2006/main">
             <a:pPr algn="r">
+              <a:buNone/>
               <a:defRPr sz="975" b="0">
                 <a:solidFill>
                   <a:srgbClr val="587068"/>
@@ -11363,6 +11502,7 @@
           <a:lstStyle xmlns:a="http://schemas.openxmlformats.org/drawingml/2006/main"/>
           <a:p xmlns:a="http://schemas.openxmlformats.org/drawingml/2006/main">
             <a:pPr algn="l">
+              <a:buNone/>
               <a:defRPr sz="2850" b="1">
                 <a:solidFill>
                   <a:srgbClr val="10201A"/>
@@ -11413,6 +11553,7 @@
           <a:lstStyle xmlns:a="http://schemas.openxmlformats.org/drawingml/2006/main"/>
           <a:p xmlns:a="http://schemas.openxmlformats.org/drawingml/2006/main">
             <a:pPr algn="l">
+              <a:buNone/>
               <a:defRPr sz="1350" b="0">
                 <a:solidFill>
                   <a:srgbClr val="587068"/>
@@ -11566,6 +11707,7 @@
           <a:lstStyle xmlns:a="http://schemas.openxmlformats.org/drawingml/2006/main"/>
           <a:p xmlns:a="http://schemas.openxmlformats.org/drawingml/2006/main">
             <a:pPr algn="l">
+              <a:buNone/>
               <a:defRPr sz="2025" b="1">
                 <a:solidFill>
                   <a:srgbClr val="10201A"/>
@@ -11649,6 +11791,7 @@
           <a:lstStyle xmlns:a="http://schemas.openxmlformats.org/drawingml/2006/main"/>
           <a:p xmlns:a="http://schemas.openxmlformats.org/drawingml/2006/main">
             <a:pPr algn="l">
+              <a:buNone/>
               <a:defRPr sz="1425" b="0">
                 <a:solidFill>
                   <a:srgbClr val="587068"/>
@@ -11732,6 +11875,7 @@
           <a:lstStyle xmlns:a="http://schemas.openxmlformats.org/drawingml/2006/main"/>
           <a:p xmlns:a="http://schemas.openxmlformats.org/drawingml/2006/main">
             <a:pPr algn="l">
+              <a:buNone/>
               <a:defRPr sz="1425" b="0">
                 <a:solidFill>
                   <a:srgbClr val="587068"/>
@@ -11815,6 +11959,7 @@
           <a:lstStyle xmlns:a="http://schemas.openxmlformats.org/drawingml/2006/main"/>
           <a:p xmlns:a="http://schemas.openxmlformats.org/drawingml/2006/main">
             <a:pPr algn="l">
+              <a:buNone/>
               <a:defRPr sz="1425" b="0">
                 <a:solidFill>
                   <a:srgbClr val="587068"/>
@@ -11898,6 +12043,7 @@
           <a:lstStyle xmlns:a="http://schemas.openxmlformats.org/drawingml/2006/main"/>
           <a:p xmlns:a="http://schemas.openxmlformats.org/drawingml/2006/main">
             <a:pPr algn="l">
+              <a:buNone/>
               <a:defRPr sz="1425" b="0">
                 <a:solidFill>
                   <a:srgbClr val="587068"/>
@@ -11948,6 +12094,7 @@
           <a:lstStyle xmlns:a="http://schemas.openxmlformats.org/drawingml/2006/main"/>
           <a:p xmlns:a="http://schemas.openxmlformats.org/drawingml/2006/main">
             <a:pPr algn="l">
+              <a:buNone/>
               <a:defRPr sz="2025" b="1">
                 <a:solidFill>
                   <a:srgbClr val="10201A"/>
@@ -12031,6 +12178,7 @@
           <a:lstStyle xmlns:a="http://schemas.openxmlformats.org/drawingml/2006/main"/>
           <a:p xmlns:a="http://schemas.openxmlformats.org/drawingml/2006/main">
             <a:pPr algn="l">
+              <a:buNone/>
               <a:defRPr sz="1425" b="0">
                 <a:solidFill>
                   <a:srgbClr val="587068"/>
@@ -12114,6 +12262,7 @@
           <a:lstStyle xmlns:a="http://schemas.openxmlformats.org/drawingml/2006/main"/>
           <a:p xmlns:a="http://schemas.openxmlformats.org/drawingml/2006/main">
             <a:pPr algn="l">
+              <a:buNone/>
               <a:defRPr sz="1425" b="0">
                 <a:solidFill>
                   <a:srgbClr val="587068"/>
@@ -12197,6 +12346,7 @@
           <a:lstStyle xmlns:a="http://schemas.openxmlformats.org/drawingml/2006/main"/>
           <a:p xmlns:a="http://schemas.openxmlformats.org/drawingml/2006/main">
             <a:pPr algn="l">
+              <a:buNone/>
               <a:defRPr sz="1425" b="0">
                 <a:solidFill>
                   <a:srgbClr val="587068"/>
@@ -12280,6 +12430,7 @@
           <a:lstStyle xmlns:a="http://schemas.openxmlformats.org/drawingml/2006/main"/>
           <a:p xmlns:a="http://schemas.openxmlformats.org/drawingml/2006/main">
             <a:pPr algn="l">
+              <a:buNone/>
               <a:defRPr sz="1425" b="0">
                 <a:solidFill>
                   <a:srgbClr val="587068"/>
@@ -12330,6 +12481,7 @@
           <a:lstStyle xmlns:a="http://schemas.openxmlformats.org/drawingml/2006/main"/>
           <a:p xmlns:a="http://schemas.openxmlformats.org/drawingml/2006/main">
             <a:pPr algn="l">
+              <a:buNone/>
               <a:defRPr sz="975" b="0">
                 <a:solidFill>
                   <a:srgbClr val="587068"/>
@@ -12380,6 +12532,7 @@
           <a:lstStyle xmlns:a="http://schemas.openxmlformats.org/drawingml/2006/main"/>
           <a:p xmlns:a="http://schemas.openxmlformats.org/drawingml/2006/main">
             <a:pPr algn="r">
+              <a:buNone/>
               <a:defRPr sz="975" b="0">
                 <a:solidFill>
                   <a:srgbClr val="587068"/>
@@ -12459,6 +12612,7 @@
           <a:lstStyle xmlns:a="http://schemas.openxmlformats.org/drawingml/2006/main"/>
           <a:p xmlns:a="http://schemas.openxmlformats.org/drawingml/2006/main">
             <a:pPr algn="l">
+              <a:buNone/>
               <a:defRPr sz="2850" b="1">
                 <a:solidFill>
                   <a:srgbClr val="10201A"/>
@@ -12509,6 +12663,7 @@
           <a:lstStyle xmlns:a="http://schemas.openxmlformats.org/drawingml/2006/main"/>
           <a:p xmlns:a="http://schemas.openxmlformats.org/drawingml/2006/main">
             <a:pPr algn="l">
+              <a:buNone/>
               <a:defRPr sz="1350" b="0">
                 <a:solidFill>
                   <a:srgbClr val="587068"/>
@@ -12627,6 +12782,7 @@
           <a:lstStyle xmlns:a="http://schemas.openxmlformats.org/drawingml/2006/main"/>
           <a:p xmlns:a="http://schemas.openxmlformats.org/drawingml/2006/main">
             <a:pPr algn="l">
+              <a:buNone/>
               <a:defRPr sz="1950" b="1">
                 <a:solidFill>
                   <a:srgbClr val="10201A"/>
@@ -12677,6 +12833,7 @@
           <a:lstStyle xmlns:a="http://schemas.openxmlformats.org/drawingml/2006/main"/>
           <a:p xmlns:a="http://schemas.openxmlformats.org/drawingml/2006/main">
             <a:pPr algn="l">
+              <a:buNone/>
               <a:defRPr sz="1350" b="0">
                 <a:solidFill>
                   <a:srgbClr val="587068"/>
@@ -12762,6 +12919,7 @@
           <a:lstStyle xmlns:a="http://schemas.openxmlformats.org/drawingml/2006/main"/>
           <a:p xmlns:a="http://schemas.openxmlformats.org/drawingml/2006/main">
             <a:pPr algn="l">
+              <a:buNone/>
               <a:defRPr sz="1950" b="1">
                 <a:solidFill>
                   <a:srgbClr val="10201A"/>
@@ -12812,6 +12970,7 @@
           <a:lstStyle xmlns:a="http://schemas.openxmlformats.org/drawingml/2006/main"/>
           <a:p xmlns:a="http://schemas.openxmlformats.org/drawingml/2006/main">
             <a:pPr algn="l">
+              <a:buNone/>
               <a:defRPr sz="1350" b="0">
                 <a:solidFill>
                   <a:srgbClr val="587068"/>
@@ -12897,6 +13056,7 @@
           <a:lstStyle xmlns:a="http://schemas.openxmlformats.org/drawingml/2006/main"/>
           <a:p xmlns:a="http://schemas.openxmlformats.org/drawingml/2006/main">
             <a:pPr algn="l">
+              <a:buNone/>
               <a:defRPr sz="1950" b="1">
                 <a:solidFill>
                   <a:srgbClr val="10201A"/>
@@ -12947,6 +13107,7 @@
           <a:lstStyle xmlns:a="http://schemas.openxmlformats.org/drawingml/2006/main"/>
           <a:p xmlns:a="http://schemas.openxmlformats.org/drawingml/2006/main">
             <a:pPr algn="l">
+              <a:buNone/>
               <a:defRPr sz="1350" b="0">
                 <a:solidFill>
                   <a:srgbClr val="587068"/>
@@ -13032,6 +13193,7 @@
           <a:lstStyle xmlns:a="http://schemas.openxmlformats.org/drawingml/2006/main"/>
           <a:p xmlns:a="http://schemas.openxmlformats.org/drawingml/2006/main">
             <a:pPr algn="l">
+              <a:buNone/>
               <a:defRPr sz="1950" b="1">
                 <a:solidFill>
                   <a:srgbClr val="10201A"/>
@@ -13082,6 +13244,7 @@
           <a:lstStyle xmlns:a="http://schemas.openxmlformats.org/drawingml/2006/main"/>
           <a:p xmlns:a="http://schemas.openxmlformats.org/drawingml/2006/main">
             <a:pPr algn="l">
+              <a:buNone/>
               <a:defRPr sz="1350" b="0">
                 <a:solidFill>
                   <a:srgbClr val="587068"/>
@@ -13132,6 +13295,7 @@
           <a:lstStyle xmlns:a="http://schemas.openxmlformats.org/drawingml/2006/main"/>
           <a:p xmlns:a="http://schemas.openxmlformats.org/drawingml/2006/main">
             <a:pPr algn="ctr">
+              <a:buNone/>
               <a:defRPr sz="1800" b="1">
                 <a:solidFill>
                   <a:srgbClr val="38A169"/>
@@ -13182,6 +13346,7 @@
           <a:lstStyle xmlns:a="http://schemas.openxmlformats.org/drawingml/2006/main"/>
           <a:p xmlns:a="http://schemas.openxmlformats.org/drawingml/2006/main">
             <a:pPr algn="l">
+              <a:buNone/>
               <a:defRPr sz="975" b="0">
                 <a:solidFill>
                   <a:srgbClr val="587068"/>
@@ -13232,6 +13397,7 @@
           <a:lstStyle xmlns:a="http://schemas.openxmlformats.org/drawingml/2006/main"/>
           <a:p xmlns:a="http://schemas.openxmlformats.org/drawingml/2006/main">
             <a:pPr algn="r">
+              <a:buNone/>
               <a:defRPr sz="975" b="0">
                 <a:solidFill>
                   <a:srgbClr val="587068"/>
